--- a/output/pptx/Оценка_возможности_восстановления_влажности_почвы_презентация.pptx
+++ b/output/pptx/Оценка_возможности_восстановления_влажности_почвы_презентация.pptx
@@ -2,38 +2,38 @@
 <file path=ppt/presentation.xml><?xml version="1.0" encoding="utf-8"?>
 <p:presentation xmlns:p="http://schemas.openxmlformats.org/presentationml/2006/main" embedTrueTypeFonts="1" saveSubsetFonts="0">
   <p:sldMasterIdLst>
-    <p:sldMasterId xmlns:r="http://schemas.openxmlformats.org/officeDocument/2006/relationships" id="2147483648" r:id="R53d05bee03ba4262"/>
+    <p:sldMasterId xmlns:r="http://schemas.openxmlformats.org/officeDocument/2006/relationships" id="2147483648" r:id="Rc993f2b4173446a4"/>
   </p:sldMasterIdLst>
   <p:notesMasterIdLst>
-    <p:notesMasterId xmlns:r="http://schemas.openxmlformats.org/officeDocument/2006/relationships" r:id="R3cf0377982354520"/>
+    <p:notesMasterId xmlns:r="http://schemas.openxmlformats.org/officeDocument/2006/relationships" r:id="R58de1241a5d14fb1"/>
   </p:notesMasterIdLst>
   <p:sldIdLst>
-    <p:sldId xmlns:r="http://schemas.openxmlformats.org/officeDocument/2006/relationships" id="256" r:id="R887c8f5da84a4529"/>
-    <p:sldId xmlns:r="http://schemas.openxmlformats.org/officeDocument/2006/relationships" id="257" r:id="R4a6d4821e8414a1a"/>
-    <p:sldId xmlns:r="http://schemas.openxmlformats.org/officeDocument/2006/relationships" id="258" r:id="Rec82f70782f049b8"/>
-    <p:sldId xmlns:r="http://schemas.openxmlformats.org/officeDocument/2006/relationships" id="259" r:id="Raec1e18fc1cb413f"/>
-    <p:sldId xmlns:r="http://schemas.openxmlformats.org/officeDocument/2006/relationships" id="260" r:id="R68a5c250483b4773"/>
-    <p:sldId xmlns:r="http://schemas.openxmlformats.org/officeDocument/2006/relationships" id="261" r:id="Rafbe836443e04957"/>
-    <p:sldId xmlns:r="http://schemas.openxmlformats.org/officeDocument/2006/relationships" id="262" r:id="Rb0b11b29c2b64d5b"/>
+    <p:sldId xmlns:r="http://schemas.openxmlformats.org/officeDocument/2006/relationships" id="256" r:id="Rd2389d46c6b24a83"/>
+    <p:sldId xmlns:r="http://schemas.openxmlformats.org/officeDocument/2006/relationships" id="257" r:id="R5ca92a703fc241f6"/>
+    <p:sldId xmlns:r="http://schemas.openxmlformats.org/officeDocument/2006/relationships" id="258" r:id="R279440d864084e1d"/>
+    <p:sldId xmlns:r="http://schemas.openxmlformats.org/officeDocument/2006/relationships" id="259" r:id="R9fd813cd395d4b85"/>
+    <p:sldId xmlns:r="http://schemas.openxmlformats.org/officeDocument/2006/relationships" id="260" r:id="R17460c2fb9a84c13"/>
+    <p:sldId xmlns:r="http://schemas.openxmlformats.org/officeDocument/2006/relationships" id="261" r:id="Rffa4137226f64e47"/>
+    <p:sldId xmlns:r="http://schemas.openxmlformats.org/officeDocument/2006/relationships" id="262" r:id="R9b22e72cfae2411b"/>
   </p:sldIdLst>
   <p:sldSz cx="12192000" cy="6858000"/>
   <p:notesSz cx="6858000" cy="9144000"/>
   <p:embeddedFontLst>
     <p:embeddedFont>
       <p:font typeface="ALS Sector Regular"/>
-      <p:regular xmlns:r="http://schemas.openxmlformats.org/officeDocument/2006/relationships" r:id="Ra030c447baeb4a5c"/>
+      <p:regular xmlns:r="http://schemas.openxmlformats.org/officeDocument/2006/relationships" r:id="R87395683528d4107"/>
     </p:embeddedFont>
     <p:embeddedFont>
       <p:font typeface="Calibri"/>
-      <p:regular xmlns:r="http://schemas.openxmlformats.org/officeDocument/2006/relationships" r:id="Rb4cc71b114f34e54"/>
-      <p:bold xmlns:r="http://schemas.openxmlformats.org/officeDocument/2006/relationships" r:id="Ref3ded277e464ba7"/>
-      <p:italic xmlns:r="http://schemas.openxmlformats.org/officeDocument/2006/relationships" r:id="R3340d033a1f846c9"/>
-      <p:boldItalic xmlns:r="http://schemas.openxmlformats.org/officeDocument/2006/relationships" r:id="Red85ac70168d4664"/>
+      <p:regular xmlns:r="http://schemas.openxmlformats.org/officeDocument/2006/relationships" r:id="Rf6695abbc3254cab"/>
+      <p:bold xmlns:r="http://schemas.openxmlformats.org/officeDocument/2006/relationships" r:id="Re58beaa3e40c4b97"/>
+      <p:italic xmlns:r="http://schemas.openxmlformats.org/officeDocument/2006/relationships" r:id="R1deff6129d5043fe"/>
+      <p:boldItalic xmlns:r="http://schemas.openxmlformats.org/officeDocument/2006/relationships" r:id="R1cb61a52fe47489a"/>
     </p:embeddedFont>
     <p:embeddedFont>
       <p:font typeface="Calibri Light"/>
-      <p:regular xmlns:r="http://schemas.openxmlformats.org/officeDocument/2006/relationships" r:id="R4fd8c74c8ebb4a4c"/>
-      <p:italic xmlns:r="http://schemas.openxmlformats.org/officeDocument/2006/relationships" r:id="Rec5b53710bc44876"/>
+      <p:regular xmlns:r="http://schemas.openxmlformats.org/officeDocument/2006/relationships" r:id="Re1c0ccfd92524eb7"/>
+      <p:italic xmlns:r="http://schemas.openxmlformats.org/officeDocument/2006/relationships" r:id="R0ddad3bf91324777"/>
     </p:embeddedFont>
   </p:embeddedFontLst>
 </p:presentation>
@@ -3847,17 +3847,17 @@
   </p:cSld>
   <p:clrMap bg1="lt1" tx1="dk1" bg2="lt2" tx2="dk2" accent1="accent1" accent2="accent2" accent3="accent3" accent4="accent4" accent5="accent5" accent6="accent6" hlink="hlink" folHlink="folHlink"/>
   <p:sldLayoutIdLst>
-    <p:sldLayoutId xmlns:r="http://schemas.openxmlformats.org/officeDocument/2006/relationships" id="2147483649" r:id="R9c50659dccc64416"/>
-    <p:sldLayoutId xmlns:r="http://schemas.openxmlformats.org/officeDocument/2006/relationships" id="2147483650" r:id="R21ea0c2372ce49c0"/>
-    <p:sldLayoutId xmlns:r="http://schemas.openxmlformats.org/officeDocument/2006/relationships" id="2147483651" r:id="Raae77b1482914455"/>
-    <p:sldLayoutId xmlns:r="http://schemas.openxmlformats.org/officeDocument/2006/relationships" id="2147483652" r:id="R9c1ad5bec4f94788"/>
-    <p:sldLayoutId xmlns:r="http://schemas.openxmlformats.org/officeDocument/2006/relationships" id="2147483653" r:id="Rc71277f1f52849c3"/>
-    <p:sldLayoutId xmlns:r="http://schemas.openxmlformats.org/officeDocument/2006/relationships" id="2147483654" r:id="Rda0dfef7683d43d6"/>
-    <p:sldLayoutId xmlns:r="http://schemas.openxmlformats.org/officeDocument/2006/relationships" id="2147483655" r:id="R5bd313abbc234fdc"/>
-    <p:sldLayoutId xmlns:r="http://schemas.openxmlformats.org/officeDocument/2006/relationships" id="2147483656" r:id="Rbbc8aa07cb6346a6"/>
-    <p:sldLayoutId xmlns:r="http://schemas.openxmlformats.org/officeDocument/2006/relationships" id="2147483657" r:id="Rcb9d02ff607b417c"/>
-    <p:sldLayoutId xmlns:r="http://schemas.openxmlformats.org/officeDocument/2006/relationships" id="2147483658" r:id="R313443fccbf14c4c"/>
-    <p:sldLayoutId xmlns:r="http://schemas.openxmlformats.org/officeDocument/2006/relationships" id="2147483659" r:id="R6f6e0baa1e564bd6"/>
+    <p:sldLayoutId xmlns:r="http://schemas.openxmlformats.org/officeDocument/2006/relationships" id="2147483649" r:id="R18c34b54998942b0"/>
+    <p:sldLayoutId xmlns:r="http://schemas.openxmlformats.org/officeDocument/2006/relationships" id="2147483650" r:id="Rd02642570e834d3b"/>
+    <p:sldLayoutId xmlns:r="http://schemas.openxmlformats.org/officeDocument/2006/relationships" id="2147483651" r:id="R328e856ea47449f9"/>
+    <p:sldLayoutId xmlns:r="http://schemas.openxmlformats.org/officeDocument/2006/relationships" id="2147483652" r:id="R8c5d6f92ad8f445d"/>
+    <p:sldLayoutId xmlns:r="http://schemas.openxmlformats.org/officeDocument/2006/relationships" id="2147483653" r:id="Rb83461314f49422b"/>
+    <p:sldLayoutId xmlns:r="http://schemas.openxmlformats.org/officeDocument/2006/relationships" id="2147483654" r:id="R6dad770d8c4d43ff"/>
+    <p:sldLayoutId xmlns:r="http://schemas.openxmlformats.org/officeDocument/2006/relationships" id="2147483655" r:id="R68288edf11cc44f0"/>
+    <p:sldLayoutId xmlns:r="http://schemas.openxmlformats.org/officeDocument/2006/relationships" id="2147483656" r:id="Rb656cc970c494987"/>
+    <p:sldLayoutId xmlns:r="http://schemas.openxmlformats.org/officeDocument/2006/relationships" id="2147483657" r:id="Rb705d4f1abe44ab5"/>
+    <p:sldLayoutId xmlns:r="http://schemas.openxmlformats.org/officeDocument/2006/relationships" id="2147483658" r:id="R41c0d5d814ca4b77"/>
+    <p:sldLayoutId xmlns:r="http://schemas.openxmlformats.org/officeDocument/2006/relationships" id="2147483659" r:id="Rf108dbd8022b4922"/>
   </p:sldLayoutIdLst>
   <p:txStyles>
     <p:titleStyle>
@@ -4670,7 +4670,7 @@
     <p:bg>
       <p:bgPr>
         <a:blipFill xmlns:a="http://schemas.openxmlformats.org/drawingml/2006/main" rotWithShape="1">
-          <a:blip xmlns:r="http://schemas.openxmlformats.org/officeDocument/2006/relationships" r:embed="R55d7ec27d38844af">
+          <a:blip xmlns:r="http://schemas.openxmlformats.org/officeDocument/2006/relationships" r:embed="R782222e5a2ed4cea">
             <a:lum/>
           </a:blip>
           <a:srcRect l="0" t="0" r="0" b="0"/>
@@ -5976,7 +5976,7 @@
       </p:sp>
       <p:cxnSp>
         <p:nvCxnSpPr>
-          <p:cNvPr id="36" name="Google Shape;422;g14739c8fea3_0_168"/>
+          <p:cNvPr id="43" name="Google Shape;422;g14739c8fea3_0_168"/>
           <p:cNvCxnSpPr/>
           <p:nvPr/>
         </p:nvCxnSpPr>
@@ -6236,6 +6236,421 @@
                 <a:cs typeface="ALS Sector Regular"/>
               </a:rPr>
               <a:t>Независимая проверка</a:t>
+            </a:r>
+          </a:p>
+        </p:txBody>
+      </p:sp>
+      <p:sp>
+        <p:nvSpPr>
+          <p:cNvPr id="31" name="">
+            <a:extLst xmlns:a="http://schemas.openxmlformats.org/drawingml/2006/main">
+              <a:ext uri="{FF2B5EF4-FFF2-40B4-BE49-F238E27FC236}">
+                <a16:creationId xmlns:a16="http://schemas.microsoft.com/office/drawing/2014/main" id="{F536732A-0973-49E6-892C-60B3BC1D8B16}"/>
+              </a:ext>
+            </a:extLst>
+          </p:cNvPr>
+          <p:cNvSpPr>
+            <a:spLocks xmlns:a="http://schemas.openxmlformats.org/drawingml/2006/main" noGrp="1"/>
+          </p:cNvSpPr>
+          <p:nvPr/>
+        </p:nvSpPr>
+        <p:spPr>
+          <a:xfrm xmlns:a="http://schemas.openxmlformats.org/drawingml/2006/main">
+            <a:off x="5267325" y="4838700"/>
+            <a:ext cx="323850" cy="266700"/>
+          </a:xfrm>
+          <a:prstGeom xmlns:a="http://schemas.openxmlformats.org/drawingml/2006/main" prst="rightArrow">
+            <a:avLst/>
+          </a:prstGeom>
+          <a:solidFill xmlns:a="http://schemas.openxmlformats.org/drawingml/2006/main">
+            <a:srgbClr val="D7E6FF"/>
+          </a:solidFill>
+          <a:ln xmlns:a="http://schemas.openxmlformats.org/drawingml/2006/main" w="0">
+            <a:solidFill>
+              <a:srgbClr val="D7E6FF"/>
+            </a:solidFill>
+            <a:prstDash val="solid"/>
+          </a:ln>
+        </p:spPr>
+      </p:sp>
+      <p:sp>
+        <p:nvSpPr>
+          <p:cNvPr id="32" name="">
+            <a:extLst xmlns:a="http://schemas.openxmlformats.org/drawingml/2006/main">
+              <a:ext uri="{FF2B5EF4-FFF2-40B4-BE49-F238E27FC236}">
+                <a16:creationId xmlns:a16="http://schemas.microsoft.com/office/drawing/2014/main" id="{E47FED8A-5E7D-4926-9C35-02A412797760}"/>
+              </a:ext>
+            </a:extLst>
+          </p:cNvPr>
+          <p:cNvSpPr>
+            <a:spLocks xmlns:a="http://schemas.openxmlformats.org/drawingml/2006/main" noGrp="1"/>
+          </p:cNvSpPr>
+          <p:nvPr/>
+        </p:nvSpPr>
+        <p:spPr>
+          <a:xfrm xmlns:a="http://schemas.openxmlformats.org/drawingml/2006/main">
+            <a:off x="7172325" y="4838700"/>
+            <a:ext cx="323850" cy="266700"/>
+          </a:xfrm>
+          <a:prstGeom xmlns:a="http://schemas.openxmlformats.org/drawingml/2006/main" prst="rightArrow">
+            <a:avLst/>
+          </a:prstGeom>
+          <a:solidFill xmlns:a="http://schemas.openxmlformats.org/drawingml/2006/main">
+            <a:srgbClr val="D7E6FF"/>
+          </a:solidFill>
+          <a:ln xmlns:a="http://schemas.openxmlformats.org/drawingml/2006/main" w="0">
+            <a:solidFill>
+              <a:srgbClr val="D7E6FF"/>
+            </a:solidFill>
+            <a:prstDash val="solid"/>
+          </a:ln>
+        </p:spPr>
+      </p:sp>
+      <p:sp>
+        <p:nvSpPr>
+          <p:cNvPr id="33" name="">
+            <a:extLst xmlns:a="http://schemas.openxmlformats.org/drawingml/2006/main">
+              <a:ext uri="{FF2B5EF4-FFF2-40B4-BE49-F238E27FC236}">
+                <a16:creationId xmlns:a16="http://schemas.microsoft.com/office/drawing/2014/main" id="{49D67404-564C-443D-A4AB-7C30853B7583}"/>
+              </a:ext>
+            </a:extLst>
+          </p:cNvPr>
+          <p:cNvSpPr>
+            <a:spLocks xmlns:a="http://schemas.openxmlformats.org/drawingml/2006/main" noGrp="1"/>
+          </p:cNvSpPr>
+          <p:nvPr/>
+        </p:nvSpPr>
+        <p:spPr>
+          <a:xfrm xmlns:a="http://schemas.openxmlformats.org/drawingml/2006/main">
+            <a:off x="9077325" y="4838700"/>
+            <a:ext cx="323850" cy="266700"/>
+          </a:xfrm>
+          <a:prstGeom xmlns:a="http://schemas.openxmlformats.org/drawingml/2006/main" prst="rightArrow">
+            <a:avLst/>
+          </a:prstGeom>
+          <a:solidFill xmlns:a="http://schemas.openxmlformats.org/drawingml/2006/main">
+            <a:srgbClr val="D7E6FF"/>
+          </a:solidFill>
+          <a:ln xmlns:a="http://schemas.openxmlformats.org/drawingml/2006/main" w="0">
+            <a:solidFill>
+              <a:srgbClr val="D7E6FF"/>
+            </a:solidFill>
+            <a:prstDash val="solid"/>
+          </a:ln>
+        </p:spPr>
+      </p:sp>
+      <p:sp>
+        <p:nvSpPr>
+          <p:cNvPr id="34" name="">
+            <a:extLst xmlns:a="http://schemas.openxmlformats.org/drawingml/2006/main">
+              <a:ext uri="{FF2B5EF4-FFF2-40B4-BE49-F238E27FC236}">
+                <a16:creationId xmlns:a16="http://schemas.microsoft.com/office/drawing/2014/main" id="{5B32B10A-7513-4692-B0F3-40EE973AC1B0}"/>
+              </a:ext>
+            </a:extLst>
+          </p:cNvPr>
+          <p:cNvSpPr>
+            <a:spLocks xmlns:a="http://schemas.openxmlformats.org/drawingml/2006/main" noGrp="1"/>
+          </p:cNvSpPr>
+          <p:nvPr/>
+        </p:nvSpPr>
+        <p:spPr>
+          <a:xfrm xmlns:a="http://schemas.openxmlformats.org/drawingml/2006/main">
+            <a:off x="3695700" y="4476750"/>
+            <a:ext cx="1466850" cy="895350"/>
+          </a:xfrm>
+          <a:prstGeom xmlns:a="http://schemas.openxmlformats.org/drawingml/2006/main" prst="roundRect">
+            <a:avLst>
+              <a:gd name="adj" fmla="val 12766"/>
+            </a:avLst>
+          </a:prstGeom>
+          <a:solidFill xmlns:a="http://schemas.openxmlformats.org/drawingml/2006/main">
+            <a:srgbClr val="FFFFFF"/>
+          </a:solidFill>
+          <a:ln xmlns:a="http://schemas.openxmlformats.org/drawingml/2006/main" w="9525">
+            <a:solidFill>
+              <a:srgbClr val="B8D3FF"/>
+            </a:solidFill>
+            <a:prstDash val="solid"/>
+          </a:ln>
+        </p:spPr>
+        <p:style>
+          <a:lnRef xmlns:a="http://schemas.openxmlformats.org/drawingml/2006/main" idx="0"/>
+          <a:fillRef xmlns:a="http://schemas.openxmlformats.org/drawingml/2006/main" idx="0"/>
+          <a:effectRef xmlns:a="http://schemas.openxmlformats.org/drawingml/2006/main" idx="4"/>
+          <a:fontRef xmlns:a="http://schemas.openxmlformats.org/drawingml/2006/main" idx="major"/>
+        </p:style>
+        <p:txBody>
+          <a:bodyPr xmlns:a="http://schemas.openxmlformats.org/drawingml/2006/main" anchor="ctr"/>
+          <a:lstStyle xmlns:a="http://schemas.openxmlformats.org/drawingml/2006/main"/>
+          <a:p xmlns:a="http://schemas.openxmlformats.org/drawingml/2006/main">
+            <a:pPr algn="ctr">
+              <a:defRPr sz="1050" b="1">
+                <a:solidFill>
+                  <a:srgbClr val="216FE8"/>
+                </a:solidFill>
+              </a:defRPr>
+            </a:pPr>
+            <a:r>
+              <a:rPr sz="1050" b="1">
+                <a:solidFill>
+                  <a:srgbClr val="216FE8"/>
+                </a:solidFill>
+              </a:rPr>
+              <a:t>Sentinel-2</a:t>
+            </a:r>
+          </a:p>
+          <a:p xmlns:a="http://schemas.openxmlformats.org/drawingml/2006/main">
+            <a:pPr algn="ctr">
+              <a:defRPr sz="1050" b="1">
+                <a:solidFill>
+                  <a:srgbClr val="216FE8"/>
+                </a:solidFill>
+              </a:defRPr>
+            </a:pPr>
+            <a:r>
+              <a:rPr sz="1050" b="1">
+                <a:solidFill>
+                  <a:srgbClr val="216FE8"/>
+                </a:solidFill>
+              </a:rPr>
+              <a:t>FCOVER</a:t>
+            </a:r>
+          </a:p>
+        </p:txBody>
+      </p:sp>
+      <p:sp>
+        <p:nvSpPr>
+          <p:cNvPr id="35" name="">
+            <a:extLst xmlns:a="http://schemas.openxmlformats.org/drawingml/2006/main">
+              <a:ext uri="{FF2B5EF4-FFF2-40B4-BE49-F238E27FC236}">
+                <a16:creationId xmlns:a16="http://schemas.microsoft.com/office/drawing/2014/main" id="{C948258C-9365-4720-A758-9086C46DBFDB}"/>
+              </a:ext>
+            </a:extLst>
+          </p:cNvPr>
+          <p:cNvSpPr>
+            <a:spLocks xmlns:a="http://schemas.openxmlformats.org/drawingml/2006/main" noGrp="1"/>
+          </p:cNvSpPr>
+          <p:nvPr/>
+        </p:nvSpPr>
+        <p:spPr>
+          <a:xfrm xmlns:a="http://schemas.openxmlformats.org/drawingml/2006/main">
+            <a:off x="5600700" y="4476750"/>
+            <a:ext cx="1466850" cy="895350"/>
+          </a:xfrm>
+          <a:prstGeom xmlns:a="http://schemas.openxmlformats.org/drawingml/2006/main" prst="roundRect">
+            <a:avLst>
+              <a:gd name="adj" fmla="val 12766"/>
+            </a:avLst>
+          </a:prstGeom>
+          <a:solidFill xmlns:a="http://schemas.openxmlformats.org/drawingml/2006/main">
+            <a:srgbClr val="FFFFFF"/>
+          </a:solidFill>
+          <a:ln xmlns:a="http://schemas.openxmlformats.org/drawingml/2006/main" w="9525">
+            <a:solidFill>
+              <a:srgbClr val="B8D3FF"/>
+            </a:solidFill>
+            <a:prstDash val="solid"/>
+          </a:ln>
+        </p:spPr>
+        <p:style>
+          <a:lnRef xmlns:a="http://schemas.openxmlformats.org/drawingml/2006/main" idx="0"/>
+          <a:fillRef xmlns:a="http://schemas.openxmlformats.org/drawingml/2006/main" idx="0"/>
+          <a:effectRef xmlns:a="http://schemas.openxmlformats.org/drawingml/2006/main" idx="4"/>
+          <a:fontRef xmlns:a="http://schemas.openxmlformats.org/drawingml/2006/main" idx="major"/>
+        </p:style>
+        <p:txBody>
+          <a:bodyPr xmlns:a="http://schemas.openxmlformats.org/drawingml/2006/main" anchor="ctr"/>
+          <a:lstStyle xmlns:a="http://schemas.openxmlformats.org/drawingml/2006/main"/>
+          <a:p xmlns:a="http://schemas.openxmlformats.org/drawingml/2006/main">
+            <a:pPr algn="ctr">
+              <a:defRPr sz="1050" b="1">
+                <a:solidFill>
+                  <a:srgbClr val="216FE8"/>
+                </a:solidFill>
+              </a:defRPr>
+            </a:pPr>
+            <a:r>
+              <a:rPr sz="1050" b="1">
+                <a:solidFill>
+                  <a:srgbClr val="216FE8"/>
+                </a:solidFill>
+              </a:rPr>
+              <a:t>Растительный</a:t>
+            </a:r>
+          </a:p>
+          <a:p xmlns:a="http://schemas.openxmlformats.org/drawingml/2006/main">
+            <a:pPr algn="ctr">
+              <a:defRPr sz="1050" b="1">
+                <a:solidFill>
+                  <a:srgbClr val="216FE8"/>
+                </a:solidFill>
+              </a:defRPr>
+            </a:pPr>
+            <a:r>
+              <a:rPr sz="1050" b="1">
+                <a:solidFill>
+                  <a:srgbClr val="216FE8"/>
+                </a:solidFill>
+              </a:rPr>
+              <a:t>блок модели</a:t>
+            </a:r>
+          </a:p>
+        </p:txBody>
+      </p:sp>
+      <p:sp>
+        <p:nvSpPr>
+          <p:cNvPr id="36" name="">
+            <a:extLst xmlns:a="http://schemas.openxmlformats.org/drawingml/2006/main">
+              <a:ext uri="{FF2B5EF4-FFF2-40B4-BE49-F238E27FC236}">
+                <a16:creationId xmlns:a16="http://schemas.microsoft.com/office/drawing/2014/main" id="{EFA6DF90-6898-4C47-B8AD-C2AFD3CBBD58}"/>
+              </a:ext>
+            </a:extLst>
+          </p:cNvPr>
+          <p:cNvSpPr>
+            <a:spLocks xmlns:a="http://schemas.openxmlformats.org/drawingml/2006/main" noGrp="1"/>
+          </p:cNvSpPr>
+          <p:nvPr/>
+        </p:nvSpPr>
+        <p:spPr>
+          <a:xfrm xmlns:a="http://schemas.openxmlformats.org/drawingml/2006/main">
+            <a:off x="7505700" y="4476750"/>
+            <a:ext cx="1466850" cy="895350"/>
+          </a:xfrm>
+          <a:prstGeom xmlns:a="http://schemas.openxmlformats.org/drawingml/2006/main" prst="roundRect">
+            <a:avLst>
+              <a:gd name="adj" fmla="val 12766"/>
+            </a:avLst>
+          </a:prstGeom>
+          <a:solidFill xmlns:a="http://schemas.openxmlformats.org/drawingml/2006/main">
+            <a:srgbClr val="EAF3FF"/>
+          </a:solidFill>
+          <a:ln xmlns:a="http://schemas.openxmlformats.org/drawingml/2006/main" w="9525">
+            <a:solidFill>
+              <a:srgbClr val="B8D3FF"/>
+            </a:solidFill>
+            <a:prstDash val="solid"/>
+          </a:ln>
+        </p:spPr>
+        <p:style>
+          <a:lnRef xmlns:a="http://schemas.openxmlformats.org/drawingml/2006/main" idx="0"/>
+          <a:fillRef xmlns:a="http://schemas.openxmlformats.org/drawingml/2006/main" idx="0"/>
+          <a:effectRef xmlns:a="http://schemas.openxmlformats.org/drawingml/2006/main" idx="4"/>
+          <a:fontRef xmlns:a="http://schemas.openxmlformats.org/drawingml/2006/main" idx="major"/>
+        </p:style>
+        <p:txBody>
+          <a:bodyPr xmlns:a="http://schemas.openxmlformats.org/drawingml/2006/main" anchor="ctr"/>
+          <a:lstStyle xmlns:a="http://schemas.openxmlformats.org/drawingml/2006/main"/>
+          <a:p xmlns:a="http://schemas.openxmlformats.org/drawingml/2006/main">
+            <a:pPr algn="ctr">
+              <a:defRPr sz="1050" b="1">
+                <a:solidFill>
+                  <a:srgbClr val="216FE8"/>
+                </a:solidFill>
+              </a:defRPr>
+            </a:pPr>
+            <a:r>
+              <a:rPr sz="1050" b="1">
+                <a:solidFill>
+                  <a:srgbClr val="216FE8"/>
+                </a:solidFill>
+              </a:rPr>
+              <a:t>Расчёт</a:t>
+            </a:r>
+          </a:p>
+          <a:p xmlns:a="http://schemas.openxmlformats.org/drawingml/2006/main">
+            <a:pPr algn="ctr">
+              <a:defRPr sz="1050" b="1">
+                <a:solidFill>
+                  <a:srgbClr val="216FE8"/>
+                </a:solidFill>
+              </a:defRPr>
+            </a:pPr>
+            <a:r>
+              <a:rPr sz="1050" b="1">
+                <a:solidFill>
+                  <a:srgbClr val="216FE8"/>
+                </a:solidFill>
+              </a:rPr>
+              <a:t>θ 0–10 см</a:t>
+            </a:r>
+          </a:p>
+        </p:txBody>
+      </p:sp>
+      <p:sp>
+        <p:nvSpPr>
+          <p:cNvPr id="37" name="">
+            <a:extLst xmlns:a="http://schemas.openxmlformats.org/drawingml/2006/main">
+              <a:ext uri="{FF2B5EF4-FFF2-40B4-BE49-F238E27FC236}">
+                <a16:creationId xmlns:a16="http://schemas.microsoft.com/office/drawing/2014/main" id="{33EA0D0B-D6E4-4071-9107-027C92CDA3EA}"/>
+              </a:ext>
+            </a:extLst>
+          </p:cNvPr>
+          <p:cNvSpPr>
+            <a:spLocks xmlns:a="http://schemas.openxmlformats.org/drawingml/2006/main" noGrp="1"/>
+          </p:cNvSpPr>
+          <p:nvPr/>
+        </p:nvSpPr>
+        <p:spPr>
+          <a:xfrm xmlns:a="http://schemas.openxmlformats.org/drawingml/2006/main">
+            <a:off x="9410700" y="4476750"/>
+            <a:ext cx="1466850" cy="895350"/>
+          </a:xfrm>
+          <a:prstGeom xmlns:a="http://schemas.openxmlformats.org/drawingml/2006/main" prst="roundRect">
+            <a:avLst>
+              <a:gd name="adj" fmla="val 12766"/>
+            </a:avLst>
+          </a:prstGeom>
+          <a:solidFill xmlns:a="http://schemas.openxmlformats.org/drawingml/2006/main">
+            <a:srgbClr val="216FE8"/>
+          </a:solidFill>
+          <a:ln xmlns:a="http://schemas.openxmlformats.org/drawingml/2006/main" w="9525">
+            <a:solidFill>
+              <a:srgbClr val="B8D3FF"/>
+            </a:solidFill>
+            <a:prstDash val="solid"/>
+          </a:ln>
+        </p:spPr>
+        <p:style>
+          <a:lnRef xmlns:a="http://schemas.openxmlformats.org/drawingml/2006/main" idx="0"/>
+          <a:fillRef xmlns:a="http://schemas.openxmlformats.org/drawingml/2006/main" idx="0"/>
+          <a:effectRef xmlns:a="http://schemas.openxmlformats.org/drawingml/2006/main" idx="4"/>
+          <a:fontRef xmlns:a="http://schemas.openxmlformats.org/drawingml/2006/main" idx="major"/>
+        </p:style>
+        <p:txBody>
+          <a:bodyPr xmlns:a="http://schemas.openxmlformats.org/drawingml/2006/main" anchor="ctr"/>
+          <a:lstStyle xmlns:a="http://schemas.openxmlformats.org/drawingml/2006/main"/>
+          <a:p xmlns:a="http://schemas.openxmlformats.org/drawingml/2006/main">
+            <a:pPr algn="ctr">
+              <a:defRPr sz="1050" b="1">
+                <a:solidFill>
+                  <a:srgbClr val="FFFFFF"/>
+                </a:solidFill>
+              </a:defRPr>
+            </a:pPr>
+            <a:r>
+              <a:rPr sz="1050" b="1">
+                <a:solidFill>
+                  <a:srgbClr val="FFFFFF"/>
+                </a:solidFill>
+              </a:rPr>
+              <a:t>Sentinel-1 VV</a:t>
+            </a:r>
+          </a:p>
+          <a:p xmlns:a="http://schemas.openxmlformats.org/drawingml/2006/main">
+            <a:pPr algn="ctr">
+              <a:defRPr sz="1050" b="1">
+                <a:solidFill>
+                  <a:srgbClr val="FFFFFF"/>
+                </a:solidFill>
+              </a:defRPr>
+            </a:pPr>
+            <a:r>
+              <a:rPr sz="1050" b="1">
+                <a:solidFill>
+                  <a:srgbClr val="FFFFFF"/>
+                </a:solidFill>
+              </a:rPr>
+              <a:t>независимая проверка</a:t>
             </a:r>
           </a:p>
         </p:txBody>
@@ -9573,7 +9988,7 @@
         </p:xfrm>
         <a:graphic xmlns:a="http://schemas.openxmlformats.org/drawingml/2006/main">
           <a:graphicData uri="http://schemas.openxmlformats.org/drawingml/2006/chart">
-            <c:chart xmlns:r="http://schemas.openxmlformats.org/officeDocument/2006/relationships" xmlns:c="http://schemas.openxmlformats.org/drawingml/2006/chart" r:id="Raf24a878a4c147fd"/>
+            <c:chart xmlns:r="http://schemas.openxmlformats.org/officeDocument/2006/relationships" xmlns:c="http://schemas.openxmlformats.org/drawingml/2006/chart" r:id="Rb0fc6fb1f53640ba"/>
           </a:graphicData>
         </a:graphic>
       </p:graphicFrame>

--- a/output/pptx/Оценка_возможности_восстановления_влажности_почвы_презентация.pptx
+++ b/output/pptx/Оценка_возможности_восстановления_влажности_почвы_презентация.pptx
@@ -2,38 +2,38 @@
 <file path=ppt/presentation.xml><?xml version="1.0" encoding="utf-8"?>
 <p:presentation xmlns:p="http://schemas.openxmlformats.org/presentationml/2006/main" embedTrueTypeFonts="1" saveSubsetFonts="0">
   <p:sldMasterIdLst>
-    <p:sldMasterId xmlns:r="http://schemas.openxmlformats.org/officeDocument/2006/relationships" id="2147483648" r:id="Rc993f2b4173446a4"/>
+    <p:sldMasterId xmlns:r="http://schemas.openxmlformats.org/officeDocument/2006/relationships" id="2147483648" r:id="R4da75f7fc7764494"/>
   </p:sldMasterIdLst>
   <p:notesMasterIdLst>
-    <p:notesMasterId xmlns:r="http://schemas.openxmlformats.org/officeDocument/2006/relationships" r:id="R58de1241a5d14fb1"/>
+    <p:notesMasterId xmlns:r="http://schemas.openxmlformats.org/officeDocument/2006/relationships" r:id="R5d043db6e78d4e86"/>
   </p:notesMasterIdLst>
   <p:sldIdLst>
-    <p:sldId xmlns:r="http://schemas.openxmlformats.org/officeDocument/2006/relationships" id="256" r:id="Rd2389d46c6b24a83"/>
-    <p:sldId xmlns:r="http://schemas.openxmlformats.org/officeDocument/2006/relationships" id="257" r:id="R5ca92a703fc241f6"/>
-    <p:sldId xmlns:r="http://schemas.openxmlformats.org/officeDocument/2006/relationships" id="258" r:id="R279440d864084e1d"/>
-    <p:sldId xmlns:r="http://schemas.openxmlformats.org/officeDocument/2006/relationships" id="259" r:id="R9fd813cd395d4b85"/>
-    <p:sldId xmlns:r="http://schemas.openxmlformats.org/officeDocument/2006/relationships" id="260" r:id="R17460c2fb9a84c13"/>
-    <p:sldId xmlns:r="http://schemas.openxmlformats.org/officeDocument/2006/relationships" id="261" r:id="Rffa4137226f64e47"/>
-    <p:sldId xmlns:r="http://schemas.openxmlformats.org/officeDocument/2006/relationships" id="262" r:id="R9b22e72cfae2411b"/>
+    <p:sldId xmlns:r="http://schemas.openxmlformats.org/officeDocument/2006/relationships" id="256" r:id="R0ef57df46f98469c"/>
+    <p:sldId xmlns:r="http://schemas.openxmlformats.org/officeDocument/2006/relationships" id="257" r:id="R76f73960f1d34a82"/>
+    <p:sldId xmlns:r="http://schemas.openxmlformats.org/officeDocument/2006/relationships" id="258" r:id="R9815c2f0448a4348"/>
+    <p:sldId xmlns:r="http://schemas.openxmlformats.org/officeDocument/2006/relationships" id="259" r:id="R27a32fa793eb4cbe"/>
+    <p:sldId xmlns:r="http://schemas.openxmlformats.org/officeDocument/2006/relationships" id="260" r:id="R2b65922626e843af"/>
+    <p:sldId xmlns:r="http://schemas.openxmlformats.org/officeDocument/2006/relationships" id="261" r:id="R1400c7c4f37d4751"/>
+    <p:sldId xmlns:r="http://schemas.openxmlformats.org/officeDocument/2006/relationships" id="262" r:id="R1fa2d423e513406e"/>
   </p:sldIdLst>
   <p:sldSz cx="12192000" cy="6858000"/>
   <p:notesSz cx="6858000" cy="9144000"/>
   <p:embeddedFontLst>
     <p:embeddedFont>
       <p:font typeface="ALS Sector Regular"/>
-      <p:regular xmlns:r="http://schemas.openxmlformats.org/officeDocument/2006/relationships" r:id="R87395683528d4107"/>
+      <p:regular xmlns:r="http://schemas.openxmlformats.org/officeDocument/2006/relationships" r:id="R3fdd1faf61b1401a"/>
     </p:embeddedFont>
     <p:embeddedFont>
       <p:font typeface="Calibri"/>
-      <p:regular xmlns:r="http://schemas.openxmlformats.org/officeDocument/2006/relationships" r:id="Rf6695abbc3254cab"/>
-      <p:bold xmlns:r="http://schemas.openxmlformats.org/officeDocument/2006/relationships" r:id="Re58beaa3e40c4b97"/>
-      <p:italic xmlns:r="http://schemas.openxmlformats.org/officeDocument/2006/relationships" r:id="R1deff6129d5043fe"/>
-      <p:boldItalic xmlns:r="http://schemas.openxmlformats.org/officeDocument/2006/relationships" r:id="R1cb61a52fe47489a"/>
+      <p:regular xmlns:r="http://schemas.openxmlformats.org/officeDocument/2006/relationships" r:id="R55609c4990034202"/>
+      <p:bold xmlns:r="http://schemas.openxmlformats.org/officeDocument/2006/relationships" r:id="Re0135803bbad4ac3"/>
+      <p:italic xmlns:r="http://schemas.openxmlformats.org/officeDocument/2006/relationships" r:id="Re6af39029efa4025"/>
+      <p:boldItalic xmlns:r="http://schemas.openxmlformats.org/officeDocument/2006/relationships" r:id="R276bd444b09440fe"/>
     </p:embeddedFont>
     <p:embeddedFont>
       <p:font typeface="Calibri Light"/>
-      <p:regular xmlns:r="http://schemas.openxmlformats.org/officeDocument/2006/relationships" r:id="Re1c0ccfd92524eb7"/>
-      <p:italic xmlns:r="http://schemas.openxmlformats.org/officeDocument/2006/relationships" r:id="R0ddad3bf91324777"/>
+      <p:regular xmlns:r="http://schemas.openxmlformats.org/officeDocument/2006/relationships" r:id="R11e9bb51fbf84516"/>
+      <p:italic xmlns:r="http://schemas.openxmlformats.org/officeDocument/2006/relationships" r:id="R66e892845d2c4e22"/>
     </p:embeddedFont>
   </p:embeddedFontLst>
 </p:presentation>
@@ -685,7 +685,7 @@
           </a:p>
           <a:p xmlns:a="http://schemas.openxmlformats.org/drawingml/2006/main">
             <a:r>
-              <a:t>Финальные тезисы, раздел «Материалы и методы»; sp_full_experiment_protocol.json, schema version 2.</a:t>
+              <a:t>Документация проекта: docs/wiki/ARCHITECTURE.md, docs/wiki/PIPELINES.md; финальные тезисы; sp_full_experiment_protocol.json.</a:t>
             </a:r>
           </a:p>
           <a:p xmlns:a="http://schemas.openxmlformats.org/drawingml/2006/main">
@@ -695,7 +695,7 @@
           </a:p>
           <a:p xmlns:a="http://schemas.openxmlformats.org/drawingml/2006/main">
             <a:r>
-              <a:t>Поля разделены на шесть групп. Качество оценивается только на полях, которые не участвовали в обучении.</a:t>
+              <a:t>Архитектура: единственный пользовательский интерфейс — QGIS-плагин. Он связывает локальные пространственные и временные данные с PyQGIS/GDAL-сценариями и выдаёт слои, диаграммы и JSON-протокол.</a:t>
             </a:r>
           </a:p>
         </p:txBody>
@@ -3847,17 +3847,17 @@
   </p:cSld>
   <p:clrMap bg1="lt1" tx1="dk1" bg2="lt2" tx2="dk2" accent1="accent1" accent2="accent2" accent3="accent3" accent4="accent4" accent5="accent5" accent6="accent6" hlink="hlink" folHlink="folHlink"/>
   <p:sldLayoutIdLst>
-    <p:sldLayoutId xmlns:r="http://schemas.openxmlformats.org/officeDocument/2006/relationships" id="2147483649" r:id="R18c34b54998942b0"/>
-    <p:sldLayoutId xmlns:r="http://schemas.openxmlformats.org/officeDocument/2006/relationships" id="2147483650" r:id="Rd02642570e834d3b"/>
-    <p:sldLayoutId xmlns:r="http://schemas.openxmlformats.org/officeDocument/2006/relationships" id="2147483651" r:id="R328e856ea47449f9"/>
-    <p:sldLayoutId xmlns:r="http://schemas.openxmlformats.org/officeDocument/2006/relationships" id="2147483652" r:id="R8c5d6f92ad8f445d"/>
-    <p:sldLayoutId xmlns:r="http://schemas.openxmlformats.org/officeDocument/2006/relationships" id="2147483653" r:id="Rb83461314f49422b"/>
-    <p:sldLayoutId xmlns:r="http://schemas.openxmlformats.org/officeDocument/2006/relationships" id="2147483654" r:id="R6dad770d8c4d43ff"/>
-    <p:sldLayoutId xmlns:r="http://schemas.openxmlformats.org/officeDocument/2006/relationships" id="2147483655" r:id="R68288edf11cc44f0"/>
-    <p:sldLayoutId xmlns:r="http://schemas.openxmlformats.org/officeDocument/2006/relationships" id="2147483656" r:id="Rb656cc970c494987"/>
-    <p:sldLayoutId xmlns:r="http://schemas.openxmlformats.org/officeDocument/2006/relationships" id="2147483657" r:id="Rb705d4f1abe44ab5"/>
-    <p:sldLayoutId xmlns:r="http://schemas.openxmlformats.org/officeDocument/2006/relationships" id="2147483658" r:id="R41c0d5d814ca4b77"/>
-    <p:sldLayoutId xmlns:r="http://schemas.openxmlformats.org/officeDocument/2006/relationships" id="2147483659" r:id="Rf108dbd8022b4922"/>
+    <p:sldLayoutId xmlns:r="http://schemas.openxmlformats.org/officeDocument/2006/relationships" id="2147483649" r:id="R10bc2247322647ad"/>
+    <p:sldLayoutId xmlns:r="http://schemas.openxmlformats.org/officeDocument/2006/relationships" id="2147483650" r:id="R4c53724b22974057"/>
+    <p:sldLayoutId xmlns:r="http://schemas.openxmlformats.org/officeDocument/2006/relationships" id="2147483651" r:id="Rbbcc31337ced4a79"/>
+    <p:sldLayoutId xmlns:r="http://schemas.openxmlformats.org/officeDocument/2006/relationships" id="2147483652" r:id="R6fb9c4f2f1e449ee"/>
+    <p:sldLayoutId xmlns:r="http://schemas.openxmlformats.org/officeDocument/2006/relationships" id="2147483653" r:id="R8718f86cdbc043e7"/>
+    <p:sldLayoutId xmlns:r="http://schemas.openxmlformats.org/officeDocument/2006/relationships" id="2147483654" r:id="R024db7835cc6418e"/>
+    <p:sldLayoutId xmlns:r="http://schemas.openxmlformats.org/officeDocument/2006/relationships" id="2147483655" r:id="Re52c84997b3c44af"/>
+    <p:sldLayoutId xmlns:r="http://schemas.openxmlformats.org/officeDocument/2006/relationships" id="2147483656" r:id="Re4e1efd0fb4741af"/>
+    <p:sldLayoutId xmlns:r="http://schemas.openxmlformats.org/officeDocument/2006/relationships" id="2147483657" r:id="R3fdc17ab05714ded"/>
+    <p:sldLayoutId xmlns:r="http://schemas.openxmlformats.org/officeDocument/2006/relationships" id="2147483658" r:id="R11fbe3e1071f4dc9"/>
+    <p:sldLayoutId xmlns:r="http://schemas.openxmlformats.org/officeDocument/2006/relationships" id="2147483659" r:id="Rac004dcb42684a33"/>
   </p:sldLayoutIdLst>
   <p:txStyles>
     <p:titleStyle>
@@ -4670,7 +4670,7 @@
     <p:bg>
       <p:bgPr>
         <a:blipFill xmlns:a="http://schemas.openxmlformats.org/drawingml/2006/main" rotWithShape="1">
-          <a:blip xmlns:r="http://schemas.openxmlformats.org/officeDocument/2006/relationships" r:embed="R782222e5a2ed4cea">
+          <a:blip xmlns:r="http://schemas.openxmlformats.org/officeDocument/2006/relationships" r:embed="Rb1fdd4f9bf8144d7">
             <a:lum/>
           </a:blip>
           <a:srcRect l="0" t="0" r="0" b="0"/>
@@ -5697,7 +5697,7 @@
         <p:spPr>
           <a:xfrm xmlns:a="http://schemas.openxmlformats.org/drawingml/2006/main">
             <a:off x="696308" y="544804"/>
-            <a:ext cx="4574939" cy="701040"/>
+            <a:ext cx="4574939" cy="353943"/>
           </a:xfrm>
           <a:prstGeom xmlns:a="http://schemas.openxmlformats.org/drawingml/2006/main" prst="rect">
             <a:avLst/>
@@ -5728,7 +5728,7 @@
                 <a:ea typeface="ALS Sector Regular"/>
                 <a:cs typeface="ALS Sector Regular"/>
               </a:rPr>
-              <a:t>Данные и дизайн эксперимента</a:t>
+              <a:t>Архитектура ИС</a:t>
             </a:r>
           </a:p>
         </p:txBody>
@@ -5778,7 +5778,7 @@
                 <a:ea typeface="ALS Sector Regular"/>
                 <a:cs typeface="ALS Sector Regular"/>
               </a:rPr>
-              <a:t>36 полей</a:t>
+              <a:t>Контуры полей</a:t>
             </a:r>
           </a:p>
           <a:p xmlns:a="http://schemas.openxmlformats.org/drawingml/2006/main">
@@ -5797,7 +5797,26 @@
                 <a:ea typeface="ALS Sector Regular"/>
                 <a:cs typeface="ALS Sector Regular"/>
               </a:rPr>
-              <a:t>2 118 совпадений «поле–дата Sentinel-1»</a:t>
+              <a:t>Sentinel-1 / Sentinel-2</a:t>
+            </a:r>
+          </a:p>
+          <a:p xmlns:a="http://schemas.openxmlformats.org/drawingml/2006/main">
+            <a:pPr>
+              <a:lnSpc>
+                <a:spcPct val="114000"/>
+              </a:lnSpc>
+              <a:buNone/>
+            </a:pPr>
+            <a:r>
+              <a:rPr sz="1200">
+                <a:solidFill>
+                  <a:srgbClr val="434343"/>
+                </a:solidFill>
+                <a:latin typeface="ALS Sector Regular"/>
+                <a:ea typeface="ALS Sector Regular"/>
+                <a:cs typeface="ALS Sector Regular"/>
+              </a:rPr>
+              <a:t>суточные ряды модели</a:t>
             </a:r>
           </a:p>
         </p:txBody>
@@ -5850,7 +5869,7 @@
                 <a:ea typeface="ALS Sector Regular"/>
                 <a:cs typeface="ALS Sector Regular"/>
               </a:rPr>
-              <a:t>Исходные данные</a:t>
+              <a:t>Входы</a:t>
             </a:r>
           </a:p>
         </p:txBody>
@@ -5900,7 +5919,7 @@
                 <a:ea typeface="ALS Sector Regular"/>
                 <a:cs typeface="ALS Sector Regular"/>
               </a:rPr>
-              <a:t>Sentinel-2 → FCOVER →</a:t>
+              <a:t>Плагин QGIS</a:t>
             </a:r>
           </a:p>
           <a:p xmlns:a="http://schemas.openxmlformats.org/drawingml/2006/main">
@@ -5919,7 +5938,7 @@
                 <a:ea typeface="ALS Sector Regular"/>
                 <a:cs typeface="ALS Sector Regular"/>
               </a:rPr>
-              <a:t>расчёт покрытия модели</a:t>
+              <a:t>запуск сценариев и просмотр</a:t>
             </a:r>
           </a:p>
         </p:txBody>
@@ -5969,7 +5988,7 @@
                 <a:ea typeface="ALS Sector Regular"/>
                 <a:cs typeface="ALS Sector Regular"/>
               </a:rPr>
-              <a:t>Растительный блок</a:t>
+              <a:t>Интерфейс</a:t>
             </a:r>
           </a:p>
         </p:txBody>
@@ -6044,7 +6063,7 @@
                 <a:ea typeface="ALS Sector Regular"/>
                 <a:cs typeface="ALS Sector Regular"/>
               </a:rPr>
-              <a:t>Суточная модель →</a:t>
+              <a:t>PyQGIS / GDAL</a:t>
             </a:r>
           </a:p>
           <a:p xmlns:a="http://schemas.openxmlformats.org/drawingml/2006/main">
@@ -6063,7 +6082,7 @@
                 <a:ea typeface="ALS Sector Regular"/>
                 <a:cs typeface="ALS Sector Regular"/>
               </a:rPr>
-              <a:t>влажность слоя 0–10 см</a:t>
+              <a:t>расчёты и аналитические сценарии</a:t>
             </a:r>
           </a:p>
         </p:txBody>
@@ -6116,7 +6135,7 @@
                 <a:ea typeface="ALS Sector Regular"/>
                 <a:cs typeface="ALS Sector Regular"/>
               </a:rPr>
-              <a:t>Водный блок</a:t>
+              <a:t>Обработка</a:t>
             </a:r>
           </a:p>
         </p:txBody>
@@ -6166,7 +6185,7 @@
                 <a:ea typeface="ALS Sector Regular"/>
                 <a:cs typeface="ALS Sector Regular"/>
               </a:rPr>
-              <a:t>Sentinel-1 VV, дБ</a:t>
+              <a:t>Слои и карты QGIS</a:t>
             </a:r>
           </a:p>
           <a:p xmlns:a="http://schemas.openxmlformats.org/drawingml/2006/main">
@@ -6185,7 +6204,7 @@
                 <a:ea typeface="ALS Sector Regular"/>
                 <a:cs typeface="ALS Sector Regular"/>
               </a:rPr>
-              <a:t>6 межполевых фолдов по 6 полей</a:t>
+              <a:t>диаграммы и JSON-протокол</a:t>
             </a:r>
           </a:p>
         </p:txBody>
@@ -6235,7 +6254,7 @@
                 <a:ea typeface="ALS Sector Regular"/>
                 <a:cs typeface="ALS Sector Regular"/>
               </a:rPr>
-              <a:t>Независимая проверка</a:t>
+              <a:t>Выходы</a:t>
             </a:r>
           </a:p>
         </p:txBody>
@@ -6245,7 +6264,7 @@
           <p:cNvPr id="31" name="">
             <a:extLst xmlns:a="http://schemas.openxmlformats.org/drawingml/2006/main">
               <a:ext uri="{FF2B5EF4-FFF2-40B4-BE49-F238E27FC236}">
-                <a16:creationId xmlns:a16="http://schemas.microsoft.com/office/drawing/2014/main" id="{F536732A-0973-49E6-892C-60B3BC1D8B16}"/>
+                <a16:creationId xmlns:a16="http://schemas.microsoft.com/office/drawing/2014/main" id="{77C4749C-BD68-46D3-8E02-F6BFE6C03780}"/>
               </a:ext>
             </a:extLst>
           </p:cNvPr>
@@ -6278,7 +6297,7 @@
           <p:cNvPr id="32" name="">
             <a:extLst xmlns:a="http://schemas.openxmlformats.org/drawingml/2006/main">
               <a:ext uri="{FF2B5EF4-FFF2-40B4-BE49-F238E27FC236}">
-                <a16:creationId xmlns:a16="http://schemas.microsoft.com/office/drawing/2014/main" id="{E47FED8A-5E7D-4926-9C35-02A412797760}"/>
+                <a16:creationId xmlns:a16="http://schemas.microsoft.com/office/drawing/2014/main" id="{1FB8A9AF-E9D3-45BB-86DA-330ADE7538C4}"/>
               </a:ext>
             </a:extLst>
           </p:cNvPr>
@@ -6311,7 +6330,7 @@
           <p:cNvPr id="33" name="">
             <a:extLst xmlns:a="http://schemas.openxmlformats.org/drawingml/2006/main">
               <a:ext uri="{FF2B5EF4-FFF2-40B4-BE49-F238E27FC236}">
-                <a16:creationId xmlns:a16="http://schemas.microsoft.com/office/drawing/2014/main" id="{49D67404-564C-443D-A4AB-7C30853B7583}"/>
+                <a16:creationId xmlns:a16="http://schemas.microsoft.com/office/drawing/2014/main" id="{812C49B8-45C2-40E1-9CFA-8C3A92FBD77F}"/>
               </a:ext>
             </a:extLst>
           </p:cNvPr>
@@ -6344,7 +6363,7 @@
           <p:cNvPr id="34" name="">
             <a:extLst xmlns:a="http://schemas.openxmlformats.org/drawingml/2006/main">
               <a:ext uri="{FF2B5EF4-FFF2-40B4-BE49-F238E27FC236}">
-                <a16:creationId xmlns:a16="http://schemas.microsoft.com/office/drawing/2014/main" id="{5B32B10A-7513-4692-B0F3-40EE973AC1B0}"/>
+                <a16:creationId xmlns:a16="http://schemas.microsoft.com/office/drawing/2014/main" id="{9E8E7C64-9E77-4A3E-93F5-A169E70A7FF4}"/>
               </a:ext>
             </a:extLst>
           </p:cNvPr>
@@ -6396,7 +6415,7 @@
                   <a:srgbClr val="216FE8"/>
                 </a:solidFill>
               </a:rPr>
-              <a:t>Sentinel-2</a:t>
+              <a:t>Данные</a:t>
             </a:r>
           </a:p>
           <a:p xmlns:a="http://schemas.openxmlformats.org/drawingml/2006/main">
@@ -6413,7 +6432,7 @@
                   <a:srgbClr val="216FE8"/>
                 </a:solidFill>
               </a:rPr>
-              <a:t>FCOVER</a:t>
+              <a:t>слои и временные ряды</a:t>
             </a:r>
           </a:p>
         </p:txBody>
@@ -6423,7 +6442,7 @@
           <p:cNvPr id="35" name="">
             <a:extLst xmlns:a="http://schemas.openxmlformats.org/drawingml/2006/main">
               <a:ext uri="{FF2B5EF4-FFF2-40B4-BE49-F238E27FC236}">
-                <a16:creationId xmlns:a16="http://schemas.microsoft.com/office/drawing/2014/main" id="{C948258C-9365-4720-A758-9086C46DBFDB}"/>
+                <a16:creationId xmlns:a16="http://schemas.microsoft.com/office/drawing/2014/main" id="{5A29D5CC-3E83-40F4-990F-7CCF0528DC3E}"/>
               </a:ext>
             </a:extLst>
           </p:cNvPr>
@@ -6475,7 +6494,7 @@
                   <a:srgbClr val="216FE8"/>
                 </a:solidFill>
               </a:rPr>
-              <a:t>Растительный</a:t>
+              <a:t>Модуль QGIS</a:t>
             </a:r>
           </a:p>
           <a:p xmlns:a="http://schemas.openxmlformats.org/drawingml/2006/main">
@@ -6492,7 +6511,7 @@
                   <a:srgbClr val="216FE8"/>
                 </a:solidFill>
               </a:rPr>
-              <a:t>блок модели</a:t>
+              <a:t>кнопки и просмотр</a:t>
             </a:r>
           </a:p>
         </p:txBody>
@@ -6502,7 +6521,7 @@
           <p:cNvPr id="36" name="">
             <a:extLst xmlns:a="http://schemas.openxmlformats.org/drawingml/2006/main">
               <a:ext uri="{FF2B5EF4-FFF2-40B4-BE49-F238E27FC236}">
-                <a16:creationId xmlns:a16="http://schemas.microsoft.com/office/drawing/2014/main" id="{EFA6DF90-6898-4C47-B8AD-C2AFD3CBBD58}"/>
+                <a16:creationId xmlns:a16="http://schemas.microsoft.com/office/drawing/2014/main" id="{B5FDD2C4-BB10-432A-A9FE-96248B12163D}"/>
               </a:ext>
             </a:extLst>
           </p:cNvPr>
@@ -6554,7 +6573,7 @@
                   <a:srgbClr val="216FE8"/>
                 </a:solidFill>
               </a:rPr>
-              <a:t>Расчёт</a:t>
+              <a:t>Сценарии</a:t>
             </a:r>
           </a:p>
           <a:p xmlns:a="http://schemas.openxmlformats.org/drawingml/2006/main">
@@ -6571,7 +6590,7 @@
                   <a:srgbClr val="216FE8"/>
                 </a:solidFill>
               </a:rPr>
-              <a:t>θ 0–10 см</a:t>
+              <a:t>расчёт и анализ</a:t>
             </a:r>
           </a:p>
         </p:txBody>
@@ -6581,7 +6600,7 @@
           <p:cNvPr id="37" name="">
             <a:extLst xmlns:a="http://schemas.openxmlformats.org/drawingml/2006/main">
               <a:ext uri="{FF2B5EF4-FFF2-40B4-BE49-F238E27FC236}">
-                <a16:creationId xmlns:a16="http://schemas.microsoft.com/office/drawing/2014/main" id="{33EA0D0B-D6E4-4071-9107-027C92CDA3EA}"/>
+                <a16:creationId xmlns:a16="http://schemas.microsoft.com/office/drawing/2014/main" id="{94457040-D5F4-4C06-8E68-B6F35CA1EB16}"/>
               </a:ext>
             </a:extLst>
           </p:cNvPr>
@@ -6633,7 +6652,7 @@
                   <a:srgbClr val="FFFFFF"/>
                 </a:solidFill>
               </a:rPr>
-              <a:t>Sentinel-1 VV</a:t>
+              <a:t>Результаты</a:t>
             </a:r>
           </a:p>
           <a:p xmlns:a="http://schemas.openxmlformats.org/drawingml/2006/main">
@@ -6650,7 +6669,7 @@
                   <a:srgbClr val="FFFFFF"/>
                 </a:solidFill>
               </a:rPr>
-              <a:t>независимая проверка</a:t>
+              <a:t>карты, графики, JSON</a:t>
             </a:r>
           </a:p>
         </p:txBody>
@@ -9988,7 +10007,7 @@
         </p:xfrm>
         <a:graphic xmlns:a="http://schemas.openxmlformats.org/drawingml/2006/main">
           <a:graphicData uri="http://schemas.openxmlformats.org/drawingml/2006/chart">
-            <c:chart xmlns:r="http://schemas.openxmlformats.org/officeDocument/2006/relationships" xmlns:c="http://schemas.openxmlformats.org/drawingml/2006/chart" r:id="Rb0fc6fb1f53640ba"/>
+            <c:chart xmlns:r="http://schemas.openxmlformats.org/officeDocument/2006/relationships" xmlns:c="http://schemas.openxmlformats.org/drawingml/2006/chart" r:id="R1d1a8a54676e4ea7"/>
           </a:graphicData>
         </a:graphic>
       </p:graphicFrame>

--- a/output/pptx/Оценка_возможности_восстановления_влажности_почвы_презентация.pptx
+++ b/output/pptx/Оценка_возможности_восстановления_влажности_почвы_презентация.pptx
@@ -18,24 +18,6 @@
   </p:sldIdLst>
   <p:sldSz cx="12192000" cy="6858000"/>
   <p:notesSz cx="6858000" cy="9144000"/>
-  <p:embeddedFontLst>
-    <p:embeddedFont>
-      <p:font typeface="ALS Sector Regular"/>
-      <p:regular xmlns:r="http://schemas.openxmlformats.org/officeDocument/2006/relationships" r:id="R3fdd1faf61b1401a"/>
-    </p:embeddedFont>
-    <p:embeddedFont>
-      <p:font typeface="Calibri"/>
-      <p:regular xmlns:r="http://schemas.openxmlformats.org/officeDocument/2006/relationships" r:id="R55609c4990034202"/>
-      <p:bold xmlns:r="http://schemas.openxmlformats.org/officeDocument/2006/relationships" r:id="Re0135803bbad4ac3"/>
-      <p:italic xmlns:r="http://schemas.openxmlformats.org/officeDocument/2006/relationships" r:id="Re6af39029efa4025"/>
-      <p:boldItalic xmlns:r="http://schemas.openxmlformats.org/officeDocument/2006/relationships" r:id="R276bd444b09440fe"/>
-    </p:embeddedFont>
-    <p:embeddedFont>
-      <p:font typeface="Calibri Light"/>
-      <p:regular xmlns:r="http://schemas.openxmlformats.org/officeDocument/2006/relationships" r:id="R11e9bb51fbf84516"/>
-      <p:italic xmlns:r="http://schemas.openxmlformats.org/officeDocument/2006/relationships" r:id="R66e892845d2c4e22"/>
-    </p:embeddedFont>
-  </p:embeddedFontLst>
 </p:presentation>
 </file>
 

--- a/output/pptx/Оценка_возможности_восстановления_влажности_почвы_презентация.pptx
+++ b/output/pptx/Оценка_возможности_восстановления_влажности_почвы_презентация.pptx
@@ -2,19 +2,19 @@
 <file path=ppt/presentation.xml><?xml version="1.0" encoding="utf-8"?>
 <p:presentation xmlns:p="http://schemas.openxmlformats.org/presentationml/2006/main" embedTrueTypeFonts="1" saveSubsetFonts="0">
   <p:sldMasterIdLst>
-    <p:sldMasterId xmlns:r="http://schemas.openxmlformats.org/officeDocument/2006/relationships" id="2147483648" r:id="R4da75f7fc7764494"/>
+    <p:sldMasterId xmlns:r="http://schemas.openxmlformats.org/officeDocument/2006/relationships" id="2147483648" r:id="Rda25dd21471d4510"/>
   </p:sldMasterIdLst>
   <p:notesMasterIdLst>
-    <p:notesMasterId xmlns:r="http://schemas.openxmlformats.org/officeDocument/2006/relationships" r:id="R5d043db6e78d4e86"/>
+    <p:notesMasterId xmlns:r="http://schemas.openxmlformats.org/officeDocument/2006/relationships" r:id="R12142724fb594945"/>
   </p:notesMasterIdLst>
   <p:sldIdLst>
-    <p:sldId xmlns:r="http://schemas.openxmlformats.org/officeDocument/2006/relationships" id="256" r:id="R0ef57df46f98469c"/>
-    <p:sldId xmlns:r="http://schemas.openxmlformats.org/officeDocument/2006/relationships" id="257" r:id="R76f73960f1d34a82"/>
-    <p:sldId xmlns:r="http://schemas.openxmlformats.org/officeDocument/2006/relationships" id="258" r:id="R9815c2f0448a4348"/>
-    <p:sldId xmlns:r="http://schemas.openxmlformats.org/officeDocument/2006/relationships" id="259" r:id="R27a32fa793eb4cbe"/>
-    <p:sldId xmlns:r="http://schemas.openxmlformats.org/officeDocument/2006/relationships" id="260" r:id="R2b65922626e843af"/>
-    <p:sldId xmlns:r="http://schemas.openxmlformats.org/officeDocument/2006/relationships" id="261" r:id="R1400c7c4f37d4751"/>
-    <p:sldId xmlns:r="http://schemas.openxmlformats.org/officeDocument/2006/relationships" id="262" r:id="R1fa2d423e513406e"/>
+    <p:sldId xmlns:r="http://schemas.openxmlformats.org/officeDocument/2006/relationships" id="256" r:id="Rc31b23f9a6534e95"/>
+    <p:sldId xmlns:r="http://schemas.openxmlformats.org/officeDocument/2006/relationships" id="257" r:id="R2604b24e49184272"/>
+    <p:sldId xmlns:r="http://schemas.openxmlformats.org/officeDocument/2006/relationships" id="258" r:id="R34352a7a3c5f4e25"/>
+    <p:sldId xmlns:r="http://schemas.openxmlformats.org/officeDocument/2006/relationships" id="259" r:id="R23541d6cb49a413b"/>
+    <p:sldId xmlns:r="http://schemas.openxmlformats.org/officeDocument/2006/relationships" id="260" r:id="R47dac4a39b9442a6"/>
+    <p:sldId xmlns:r="http://schemas.openxmlformats.org/officeDocument/2006/relationships" id="261" r:id="R86c566f199b64ca3"/>
+    <p:sldId xmlns:r="http://schemas.openxmlformats.org/officeDocument/2006/relationships" id="262" r:id="R6477a12e409a4c3c"/>
   </p:sldIdLst>
   <p:sldSz cx="12192000" cy="6858000"/>
   <p:notesSz cx="6858000" cy="9144000"/>
@@ -667,7 +667,7 @@
           </a:p>
           <a:p xmlns:a="http://schemas.openxmlformats.org/drawingml/2006/main">
             <a:r>
-              <a:t>Документация проекта: docs/wiki/ARCHITECTURE.md, docs/wiki/PIPELINES.md; финальные тезисы; sp_full_experiment_protocol.json.</a:t>
+              <a:t>Авторская иллюстрация, предоставленная пользователем; документация проекта: docs/wiki/ARCHITECTURE.md, docs/wiki/PIPELINES.md.</a:t>
             </a:r>
           </a:p>
           <a:p xmlns:a="http://schemas.openxmlformats.org/drawingml/2006/main">
@@ -3829,17 +3829,17 @@
   </p:cSld>
   <p:clrMap bg1="lt1" tx1="dk1" bg2="lt2" tx2="dk2" accent1="accent1" accent2="accent2" accent3="accent3" accent4="accent4" accent5="accent5" accent6="accent6" hlink="hlink" folHlink="folHlink"/>
   <p:sldLayoutIdLst>
-    <p:sldLayoutId xmlns:r="http://schemas.openxmlformats.org/officeDocument/2006/relationships" id="2147483649" r:id="R10bc2247322647ad"/>
-    <p:sldLayoutId xmlns:r="http://schemas.openxmlformats.org/officeDocument/2006/relationships" id="2147483650" r:id="R4c53724b22974057"/>
-    <p:sldLayoutId xmlns:r="http://schemas.openxmlformats.org/officeDocument/2006/relationships" id="2147483651" r:id="Rbbcc31337ced4a79"/>
-    <p:sldLayoutId xmlns:r="http://schemas.openxmlformats.org/officeDocument/2006/relationships" id="2147483652" r:id="R6fb9c4f2f1e449ee"/>
-    <p:sldLayoutId xmlns:r="http://schemas.openxmlformats.org/officeDocument/2006/relationships" id="2147483653" r:id="R8718f86cdbc043e7"/>
-    <p:sldLayoutId xmlns:r="http://schemas.openxmlformats.org/officeDocument/2006/relationships" id="2147483654" r:id="R024db7835cc6418e"/>
-    <p:sldLayoutId xmlns:r="http://schemas.openxmlformats.org/officeDocument/2006/relationships" id="2147483655" r:id="Re52c84997b3c44af"/>
-    <p:sldLayoutId xmlns:r="http://schemas.openxmlformats.org/officeDocument/2006/relationships" id="2147483656" r:id="Re4e1efd0fb4741af"/>
-    <p:sldLayoutId xmlns:r="http://schemas.openxmlformats.org/officeDocument/2006/relationships" id="2147483657" r:id="R3fdc17ab05714ded"/>
-    <p:sldLayoutId xmlns:r="http://schemas.openxmlformats.org/officeDocument/2006/relationships" id="2147483658" r:id="R11fbe3e1071f4dc9"/>
-    <p:sldLayoutId xmlns:r="http://schemas.openxmlformats.org/officeDocument/2006/relationships" id="2147483659" r:id="Rac004dcb42684a33"/>
+    <p:sldLayoutId xmlns:r="http://schemas.openxmlformats.org/officeDocument/2006/relationships" id="2147483649" r:id="R4f942f0a025f45ef"/>
+    <p:sldLayoutId xmlns:r="http://schemas.openxmlformats.org/officeDocument/2006/relationships" id="2147483650" r:id="Rcc47087e1b734cfe"/>
+    <p:sldLayoutId xmlns:r="http://schemas.openxmlformats.org/officeDocument/2006/relationships" id="2147483651" r:id="Rcf716506427244b0"/>
+    <p:sldLayoutId xmlns:r="http://schemas.openxmlformats.org/officeDocument/2006/relationships" id="2147483652" r:id="R28065ce81238484a"/>
+    <p:sldLayoutId xmlns:r="http://schemas.openxmlformats.org/officeDocument/2006/relationships" id="2147483653" r:id="R471beae11c084df3"/>
+    <p:sldLayoutId xmlns:r="http://schemas.openxmlformats.org/officeDocument/2006/relationships" id="2147483654" r:id="R30cc93a62b8c4e01"/>
+    <p:sldLayoutId xmlns:r="http://schemas.openxmlformats.org/officeDocument/2006/relationships" id="2147483655" r:id="R7b4b3955810e46f2"/>
+    <p:sldLayoutId xmlns:r="http://schemas.openxmlformats.org/officeDocument/2006/relationships" id="2147483656" r:id="R91cba73eb80544a4"/>
+    <p:sldLayoutId xmlns:r="http://schemas.openxmlformats.org/officeDocument/2006/relationships" id="2147483657" r:id="Rc07d029a9d0d4c18"/>
+    <p:sldLayoutId xmlns:r="http://schemas.openxmlformats.org/officeDocument/2006/relationships" id="2147483658" r:id="Red20f59fe7aa4874"/>
+    <p:sldLayoutId xmlns:r="http://schemas.openxmlformats.org/officeDocument/2006/relationships" id="2147483659" r:id="Rd9f98b4d53644bdb"/>
   </p:sldLayoutIdLst>
   <p:txStyles>
     <p:titleStyle>
@@ -4652,7 +4652,7 @@
     <p:bg>
       <p:bgPr>
         <a:blipFill xmlns:a="http://schemas.openxmlformats.org/drawingml/2006/main" rotWithShape="1">
-          <a:blip xmlns:r="http://schemas.openxmlformats.org/officeDocument/2006/relationships" r:embed="Rb1fdd4f9bf8144d7">
+          <a:blip xmlns:r="http://schemas.openxmlformats.org/officeDocument/2006/relationships" r:embed="Rb767691281014045">
             <a:lum/>
           </a:blip>
           <a:srcRect l="0" t="0" r="0" b="0"/>
@@ -5977,7 +5977,7 @@
       </p:sp>
       <p:cxnSp>
         <p:nvCxnSpPr>
-          <p:cNvPr id="43" name="Google Shape;422;g14739c8fea3_0_168"/>
+          <p:cNvPr id="44" name="Google Shape;422;g14739c8fea3_0_168"/>
           <p:cNvCxnSpPr/>
           <p:nvPr/>
         </p:nvCxnSpPr>
@@ -6246,7 +6246,7 @@
           <p:cNvPr id="31" name="">
             <a:extLst xmlns:a="http://schemas.openxmlformats.org/drawingml/2006/main">
               <a:ext uri="{FF2B5EF4-FFF2-40B4-BE49-F238E27FC236}">
-                <a16:creationId xmlns:a16="http://schemas.microsoft.com/office/drawing/2014/main" id="{77C4749C-BD68-46D3-8E02-F6BFE6C03780}"/>
+                <a16:creationId xmlns:a16="http://schemas.microsoft.com/office/drawing/2014/main" id="{DA1C04F4-A62E-4B10-8157-330335862AFB}"/>
               </a:ext>
             </a:extLst>
           </p:cNvPr>
@@ -6279,7 +6279,7 @@
           <p:cNvPr id="32" name="">
             <a:extLst xmlns:a="http://schemas.openxmlformats.org/drawingml/2006/main">
               <a:ext uri="{FF2B5EF4-FFF2-40B4-BE49-F238E27FC236}">
-                <a16:creationId xmlns:a16="http://schemas.microsoft.com/office/drawing/2014/main" id="{1FB8A9AF-E9D3-45BB-86DA-330ADE7538C4}"/>
+                <a16:creationId xmlns:a16="http://schemas.microsoft.com/office/drawing/2014/main" id="{FDD256AE-6BE2-4FF4-A773-53B17911C9DC}"/>
               </a:ext>
             </a:extLst>
           </p:cNvPr>
@@ -6312,7 +6312,7 @@
           <p:cNvPr id="33" name="">
             <a:extLst xmlns:a="http://schemas.openxmlformats.org/drawingml/2006/main">
               <a:ext uri="{FF2B5EF4-FFF2-40B4-BE49-F238E27FC236}">
-                <a16:creationId xmlns:a16="http://schemas.microsoft.com/office/drawing/2014/main" id="{812C49B8-45C2-40E1-9CFA-8C3A92FBD77F}"/>
+                <a16:creationId xmlns:a16="http://schemas.microsoft.com/office/drawing/2014/main" id="{DE279D08-5220-46FF-996C-B9DFC552DED9}"/>
               </a:ext>
             </a:extLst>
           </p:cNvPr>
@@ -6345,7 +6345,7 @@
           <p:cNvPr id="34" name="">
             <a:extLst xmlns:a="http://schemas.openxmlformats.org/drawingml/2006/main">
               <a:ext uri="{FF2B5EF4-FFF2-40B4-BE49-F238E27FC236}">
-                <a16:creationId xmlns:a16="http://schemas.microsoft.com/office/drawing/2014/main" id="{9E8E7C64-9E77-4A3E-93F5-A169E70A7FF4}"/>
+                <a16:creationId xmlns:a16="http://schemas.microsoft.com/office/drawing/2014/main" id="{DCD2A129-3D76-4BC5-A593-07C5FB753AEA}"/>
               </a:ext>
             </a:extLst>
           </p:cNvPr>
@@ -6424,7 +6424,7 @@
           <p:cNvPr id="35" name="">
             <a:extLst xmlns:a="http://schemas.openxmlformats.org/drawingml/2006/main">
               <a:ext uri="{FF2B5EF4-FFF2-40B4-BE49-F238E27FC236}">
-                <a16:creationId xmlns:a16="http://schemas.microsoft.com/office/drawing/2014/main" id="{5A29D5CC-3E83-40F4-990F-7CCF0528DC3E}"/>
+                <a16:creationId xmlns:a16="http://schemas.microsoft.com/office/drawing/2014/main" id="{F168D695-5B84-4AF0-A48A-17E60F97022F}"/>
               </a:ext>
             </a:extLst>
           </p:cNvPr>
@@ -6503,7 +6503,7 @@
           <p:cNvPr id="36" name="">
             <a:extLst xmlns:a="http://schemas.openxmlformats.org/drawingml/2006/main">
               <a:ext uri="{FF2B5EF4-FFF2-40B4-BE49-F238E27FC236}">
-                <a16:creationId xmlns:a16="http://schemas.microsoft.com/office/drawing/2014/main" id="{B5FDD2C4-BB10-432A-A9FE-96248B12163D}"/>
+                <a16:creationId xmlns:a16="http://schemas.microsoft.com/office/drawing/2014/main" id="{55DFD289-D99F-4667-82C4-F72B96BE86FC}"/>
               </a:ext>
             </a:extLst>
           </p:cNvPr>
@@ -6582,7 +6582,7 @@
           <p:cNvPr id="37" name="">
             <a:extLst xmlns:a="http://schemas.openxmlformats.org/drawingml/2006/main">
               <a:ext uri="{FF2B5EF4-FFF2-40B4-BE49-F238E27FC236}">
-                <a16:creationId xmlns:a16="http://schemas.microsoft.com/office/drawing/2014/main" id="{94457040-D5F4-4C06-8E68-B6F35CA1EB16}"/>
+                <a16:creationId xmlns:a16="http://schemas.microsoft.com/office/drawing/2014/main" id="{B82B39FA-D55C-4A1C-843C-58A71CBA3980}"/>
               </a:ext>
             </a:extLst>
           </p:cNvPr>
@@ -6656,6 +6656,28 @@
           </a:p>
         </p:txBody>
       </p:sp>
+      <p:pic>
+        <p:nvPicPr>
+          <p:cNvPr id="56" name=""/>
+          <p:cNvPicPr>
+            <a:picLocks xmlns:a="http://schemas.openxmlformats.org/drawingml/2006/main" noChangeAspect="1"/>
+          </p:cNvPicPr>
+          <p:nvPr/>
+        </p:nvPicPr>
+        <p:blipFill>
+          <a:blip xmlns:r="http://schemas.openxmlformats.org/officeDocument/2006/relationships" xmlns:a="http://schemas.openxmlformats.org/drawingml/2006/main" r:embed="R4dfcc1f7e0844215"/>
+          <a:stretch xmlns:a="http://schemas.openxmlformats.org/drawingml/2006/main"/>
+        </p:blipFill>
+        <p:spPr>
+          <a:xfrm xmlns:a="http://schemas.openxmlformats.org/drawingml/2006/main">
+            <a:off x="349152" y="0"/>
+            <a:ext cx="11493697" cy="6858000"/>
+          </a:xfrm>
+          <a:prstGeom xmlns:a="http://schemas.openxmlformats.org/drawingml/2006/main" prst="rect">
+            <a:avLst/>
+          </a:prstGeom>
+        </p:spPr>
+      </p:pic>
     </p:spTree>
     <p:extLst>
       <p:ext uri="{BB962C8B-B14F-4D97-AF65-F5344CB8AC3E}">
@@ -9989,7 +10011,7 @@
         </p:xfrm>
         <a:graphic xmlns:a="http://schemas.openxmlformats.org/drawingml/2006/main">
           <a:graphicData uri="http://schemas.openxmlformats.org/drawingml/2006/chart">
-            <c:chart xmlns:r="http://schemas.openxmlformats.org/officeDocument/2006/relationships" xmlns:c="http://schemas.openxmlformats.org/drawingml/2006/chart" r:id="R1d1a8a54676e4ea7"/>
+            <c:chart xmlns:r="http://schemas.openxmlformats.org/officeDocument/2006/relationships" xmlns:c="http://schemas.openxmlformats.org/drawingml/2006/chart" r:id="R82e870ad5c40436a"/>
           </a:graphicData>
         </a:graphic>
       </p:graphicFrame>

--- a/output/pptx/Оценка_возможности_восстановления_влажности_почвы_презентация.pptx
+++ b/output/pptx/Оценка_возможности_восстановления_влажности_почвы_презентация.pptx
@@ -2,19 +2,19 @@
 <file path=ppt/presentation.xml><?xml version="1.0" encoding="utf-8"?>
 <p:presentation xmlns:p="http://schemas.openxmlformats.org/presentationml/2006/main" embedTrueTypeFonts="1" saveSubsetFonts="0">
   <p:sldMasterIdLst>
-    <p:sldMasterId xmlns:r="http://schemas.openxmlformats.org/officeDocument/2006/relationships" id="2147483648" r:id="Rda25dd21471d4510"/>
+    <p:sldMasterId xmlns:r="http://schemas.openxmlformats.org/officeDocument/2006/relationships" id="2147483648" r:id="R759e44549afd4ce9"/>
   </p:sldMasterIdLst>
   <p:notesMasterIdLst>
-    <p:notesMasterId xmlns:r="http://schemas.openxmlformats.org/officeDocument/2006/relationships" r:id="R12142724fb594945"/>
+    <p:notesMasterId xmlns:r="http://schemas.openxmlformats.org/officeDocument/2006/relationships" r:id="R69439ed8c14f4947"/>
   </p:notesMasterIdLst>
   <p:sldIdLst>
-    <p:sldId xmlns:r="http://schemas.openxmlformats.org/officeDocument/2006/relationships" id="256" r:id="Rc31b23f9a6534e95"/>
-    <p:sldId xmlns:r="http://schemas.openxmlformats.org/officeDocument/2006/relationships" id="257" r:id="R2604b24e49184272"/>
-    <p:sldId xmlns:r="http://schemas.openxmlformats.org/officeDocument/2006/relationships" id="258" r:id="R34352a7a3c5f4e25"/>
-    <p:sldId xmlns:r="http://schemas.openxmlformats.org/officeDocument/2006/relationships" id="259" r:id="R23541d6cb49a413b"/>
-    <p:sldId xmlns:r="http://schemas.openxmlformats.org/officeDocument/2006/relationships" id="260" r:id="R47dac4a39b9442a6"/>
-    <p:sldId xmlns:r="http://schemas.openxmlformats.org/officeDocument/2006/relationships" id="261" r:id="R86c566f199b64ca3"/>
-    <p:sldId xmlns:r="http://schemas.openxmlformats.org/officeDocument/2006/relationships" id="262" r:id="R6477a12e409a4c3c"/>
+    <p:sldId xmlns:r="http://schemas.openxmlformats.org/officeDocument/2006/relationships" id="256" r:id="R936f35d0346d4532"/>
+    <p:sldId xmlns:r="http://schemas.openxmlformats.org/officeDocument/2006/relationships" id="257" r:id="Rf74d86ce2bd64618"/>
+    <p:sldId xmlns:r="http://schemas.openxmlformats.org/officeDocument/2006/relationships" id="258" r:id="R751e439770684063"/>
+    <p:sldId xmlns:r="http://schemas.openxmlformats.org/officeDocument/2006/relationships" id="259" r:id="Rca574b0f9a8e4af5"/>
+    <p:sldId xmlns:r="http://schemas.openxmlformats.org/officeDocument/2006/relationships" id="260" r:id="R01162bff1f3c4a43"/>
+    <p:sldId xmlns:r="http://schemas.openxmlformats.org/officeDocument/2006/relationships" id="261" r:id="Ree773a76a7d74980"/>
+    <p:sldId xmlns:r="http://schemas.openxmlformats.org/officeDocument/2006/relationships" id="262" r:id="Rbbc930b702094b43"/>
   </p:sldIdLst>
   <p:sldSz cx="12192000" cy="6858000"/>
   <p:notesSz cx="6858000" cy="9144000"/>
@@ -579,7 +579,7 @@
           </a:p>
           <a:p xmlns:a="http://schemas.openxmlformats.org/drawingml/2006/main">
             <a:r>
-              <a:t>Финальные тезисы, введение и обсуждение.</a:t>
+              <a:t>Авторская иллюстрация, предоставленная пользователем; финальные тезисы, введение и обсуждение.</a:t>
             </a:r>
             <a:endParaRPr/>
           </a:p>
@@ -3829,17 +3829,17 @@
   </p:cSld>
   <p:clrMap bg1="lt1" tx1="dk1" bg2="lt2" tx2="dk2" accent1="accent1" accent2="accent2" accent3="accent3" accent4="accent4" accent5="accent5" accent6="accent6" hlink="hlink" folHlink="folHlink"/>
   <p:sldLayoutIdLst>
-    <p:sldLayoutId xmlns:r="http://schemas.openxmlformats.org/officeDocument/2006/relationships" id="2147483649" r:id="R4f942f0a025f45ef"/>
-    <p:sldLayoutId xmlns:r="http://schemas.openxmlformats.org/officeDocument/2006/relationships" id="2147483650" r:id="Rcc47087e1b734cfe"/>
-    <p:sldLayoutId xmlns:r="http://schemas.openxmlformats.org/officeDocument/2006/relationships" id="2147483651" r:id="Rcf716506427244b0"/>
-    <p:sldLayoutId xmlns:r="http://schemas.openxmlformats.org/officeDocument/2006/relationships" id="2147483652" r:id="R28065ce81238484a"/>
-    <p:sldLayoutId xmlns:r="http://schemas.openxmlformats.org/officeDocument/2006/relationships" id="2147483653" r:id="R471beae11c084df3"/>
-    <p:sldLayoutId xmlns:r="http://schemas.openxmlformats.org/officeDocument/2006/relationships" id="2147483654" r:id="R30cc93a62b8c4e01"/>
-    <p:sldLayoutId xmlns:r="http://schemas.openxmlformats.org/officeDocument/2006/relationships" id="2147483655" r:id="R7b4b3955810e46f2"/>
-    <p:sldLayoutId xmlns:r="http://schemas.openxmlformats.org/officeDocument/2006/relationships" id="2147483656" r:id="R91cba73eb80544a4"/>
-    <p:sldLayoutId xmlns:r="http://schemas.openxmlformats.org/officeDocument/2006/relationships" id="2147483657" r:id="Rc07d029a9d0d4c18"/>
-    <p:sldLayoutId xmlns:r="http://schemas.openxmlformats.org/officeDocument/2006/relationships" id="2147483658" r:id="Red20f59fe7aa4874"/>
-    <p:sldLayoutId xmlns:r="http://schemas.openxmlformats.org/officeDocument/2006/relationships" id="2147483659" r:id="Rd9f98b4d53644bdb"/>
+    <p:sldLayoutId xmlns:r="http://schemas.openxmlformats.org/officeDocument/2006/relationships" id="2147483649" r:id="R09bd58ffe8a74b29"/>
+    <p:sldLayoutId xmlns:r="http://schemas.openxmlformats.org/officeDocument/2006/relationships" id="2147483650" r:id="Rc8493c21cc074248"/>
+    <p:sldLayoutId xmlns:r="http://schemas.openxmlformats.org/officeDocument/2006/relationships" id="2147483651" r:id="Rc635751b85e6470c"/>
+    <p:sldLayoutId xmlns:r="http://schemas.openxmlformats.org/officeDocument/2006/relationships" id="2147483652" r:id="R4426eea5eb11470f"/>
+    <p:sldLayoutId xmlns:r="http://schemas.openxmlformats.org/officeDocument/2006/relationships" id="2147483653" r:id="R545cd6debd3e437e"/>
+    <p:sldLayoutId xmlns:r="http://schemas.openxmlformats.org/officeDocument/2006/relationships" id="2147483654" r:id="R223a09f4f6df482e"/>
+    <p:sldLayoutId xmlns:r="http://schemas.openxmlformats.org/officeDocument/2006/relationships" id="2147483655" r:id="Ra5503ebbe04f4fb6"/>
+    <p:sldLayoutId xmlns:r="http://schemas.openxmlformats.org/officeDocument/2006/relationships" id="2147483656" r:id="R1a5620b56d594551"/>
+    <p:sldLayoutId xmlns:r="http://schemas.openxmlformats.org/officeDocument/2006/relationships" id="2147483657" r:id="Ra57329ae58934f05"/>
+    <p:sldLayoutId xmlns:r="http://schemas.openxmlformats.org/officeDocument/2006/relationships" id="2147483658" r:id="Ra22e827efd904559"/>
+    <p:sldLayoutId xmlns:r="http://schemas.openxmlformats.org/officeDocument/2006/relationships" id="2147483659" r:id="R3bc62236139d4012"/>
   </p:sldLayoutIdLst>
   <p:txStyles>
     <p:titleStyle>
@@ -4652,7 +4652,7 @@
     <p:bg>
       <p:bgPr>
         <a:blipFill xmlns:a="http://schemas.openxmlformats.org/drawingml/2006/main" rotWithShape="1">
-          <a:blip xmlns:r="http://schemas.openxmlformats.org/officeDocument/2006/relationships" r:embed="Rb767691281014045">
+          <a:blip xmlns:r="http://schemas.openxmlformats.org/officeDocument/2006/relationships" r:embed="Rb3b362c80b694e8e">
             <a:lum/>
           </a:blip>
           <a:srcRect l="0" t="0" r="0" b="0"/>
@@ -5149,39 +5149,7 @@
                 <a:ea typeface="ALS Sector Regular"/>
                 <a:cs typeface="ALS Sector Regular"/>
               </a:rPr>
-              <a:t>Проверяем не калибровку влажности,</a:t>
-            </a:r>
-          </a:p>
-          <a:p xmlns:a="http://schemas.openxmlformats.org/drawingml/2006/main">
-            <a:r>
-              <a:rPr sz="2200">
-                <a:solidFill>
-                  <a:schemeClr val="accent1">
-                    <a:lumMod val="60000"/>
-                    <a:lumOff val="40000"/>
-                  </a:schemeClr>
-                </a:solidFill>
-                <a:latin typeface="ALS Sector Regular"/>
-                <a:ea typeface="ALS Sector Regular"/>
-                <a:cs typeface="ALS Sector Regular"/>
-              </a:rPr>
-              <a:t>а независимую согласованность</a:t>
-            </a:r>
-          </a:p>
-          <a:p xmlns:a="http://schemas.openxmlformats.org/drawingml/2006/main">
-            <a:r>
-              <a:rPr sz="2200">
-                <a:solidFill>
-                  <a:schemeClr val="accent1">
-                    <a:lumMod val="60000"/>
-                    <a:lumOff val="40000"/>
-                  </a:schemeClr>
-                </a:solidFill>
-                <a:latin typeface="ALS Sector Regular"/>
-                <a:ea typeface="ALS Sector Regular"/>
-                <a:cs typeface="ALS Sector Regular"/>
-              </a:rPr>
-              <a:t>расчётной динамики и радара</a:t>
+              <a:t/>
             </a:r>
           </a:p>
         </p:txBody>
@@ -5323,7 +5291,7 @@
       </p:sp>
       <p:cxnSp>
         <p:nvCxnSpPr>
-          <p:cNvPr id="34" name="Google Shape;55;p2"/>
+          <p:cNvPr id="39" name="Google Shape;55;p2"/>
           <p:cNvCxnSpPr/>
           <p:nvPr/>
         </p:nvCxnSpPr>
@@ -5401,7 +5369,7 @@
       </p:sp>
       <p:cxnSp>
         <p:nvCxnSpPr>
-          <p:cNvPr id="36" name="Google Shape;57;p2"/>
+          <p:cNvPr id="41" name="Google Shape;57;p2"/>
           <p:cNvCxnSpPr/>
           <p:nvPr/>
         </p:nvCxnSpPr>
@@ -5479,7 +5447,7 @@
       </p:sp>
       <p:cxnSp>
         <p:nvCxnSpPr>
-          <p:cNvPr id="38" name="Google Shape;59;p2"/>
+          <p:cNvPr id="43" name="Google Shape;59;p2"/>
           <p:cNvCxnSpPr/>
           <p:nvPr/>
         </p:nvCxnSpPr>
@@ -5557,7 +5525,7 @@
       </p:sp>
       <p:cxnSp>
         <p:nvCxnSpPr>
-          <p:cNvPr id="40" name="Google Shape;55;p2"/>
+          <p:cNvPr id="45" name="Google Shape;55;p2"/>
           <p:cNvCxnSpPr/>
           <p:nvPr/>
         </p:nvCxnSpPr>
@@ -5629,6 +5597,329 @@
                 <a:cs typeface="ALS Sector Regular"/>
               </a:rPr>
               <a:t>Прямая влажность недоступна</a:t>
+            </a:r>
+          </a:p>
+        </p:txBody>
+      </p:sp>
+      <p:pic>
+        <p:nvPicPr>
+          <p:cNvPr id="47" name=""/>
+          <p:cNvPicPr>
+            <a:picLocks xmlns:a="http://schemas.openxmlformats.org/drawingml/2006/main" noChangeAspect="1"/>
+          </p:cNvPicPr>
+          <p:nvPr/>
+        </p:nvPicPr>
+        <p:blipFill>
+          <a:blip xmlns:r="http://schemas.openxmlformats.org/officeDocument/2006/relationships" xmlns:a="http://schemas.openxmlformats.org/drawingml/2006/main" r:embed="R5a6e81d0cd914dcd"/>
+          <a:stretch xmlns:a="http://schemas.openxmlformats.org/drawingml/2006/main"/>
+        </p:blipFill>
+        <p:spPr>
+          <a:xfrm xmlns:a="http://schemas.openxmlformats.org/drawingml/2006/main">
+            <a:off x="7924800" y="1151014"/>
+            <a:ext cx="3905250" cy="4879822"/>
+          </a:xfrm>
+          <a:prstGeom xmlns:a="http://schemas.openxmlformats.org/drawingml/2006/main" prst="roundRect">
+            <a:avLst>
+              <a:gd name="adj" fmla="val 2927"/>
+            </a:avLst>
+          </a:prstGeom>
+        </p:spPr>
+      </p:pic>
+      <p:sp>
+        <p:nvSpPr>
+          <p:cNvPr id="30" name="">
+            <a:extLst xmlns:a="http://schemas.openxmlformats.org/drawingml/2006/main">
+              <a:ext uri="{FF2B5EF4-FFF2-40B4-BE49-F238E27FC236}">
+                <a16:creationId xmlns:a16="http://schemas.microsoft.com/office/drawing/2014/main" id="{6D5A33B9-A515-44C5-AE75-1B72BEF63429}"/>
+              </a:ext>
+            </a:extLst>
+          </p:cNvPr>
+          <p:cNvSpPr>
+            <a:spLocks xmlns:a="http://schemas.openxmlformats.org/drawingml/2006/main" noGrp="1"/>
+          </p:cNvSpPr>
+          <p:nvPr/>
+        </p:nvSpPr>
+        <p:spPr>
+          <a:xfrm xmlns:a="http://schemas.openxmlformats.org/drawingml/2006/main">
+            <a:off x="8096250" y="1390650"/>
+            <a:ext cx="1276350" cy="400050"/>
+          </a:xfrm>
+          <a:prstGeom xmlns:a="http://schemas.openxmlformats.org/drawingml/2006/main" prst="roundRect">
+            <a:avLst>
+              <a:gd name="adj" fmla="val 28571"/>
+            </a:avLst>
+          </a:prstGeom>
+          <a:solidFill xmlns:a="http://schemas.openxmlformats.org/drawingml/2006/main">
+            <a:srgbClr val="FFFFFF"/>
+          </a:solidFill>
+          <a:ln xmlns:a="http://schemas.openxmlformats.org/drawingml/2006/main" w="9525">
+            <a:solidFill>
+              <a:srgbClr val="B8D3FF"/>
+            </a:solidFill>
+            <a:prstDash val="solid"/>
+          </a:ln>
+        </p:spPr>
+        <p:style>
+          <a:lnRef xmlns:a="http://schemas.openxmlformats.org/drawingml/2006/main" idx="0"/>
+          <a:fillRef xmlns:a="http://schemas.openxmlformats.org/drawingml/2006/main" idx="0"/>
+          <a:effectRef xmlns:a="http://schemas.openxmlformats.org/drawingml/2006/main" idx="4"/>
+          <a:fontRef xmlns:a="http://schemas.openxmlformats.org/drawingml/2006/main" idx="major"/>
+        </p:style>
+        <p:txBody>
+          <a:bodyPr xmlns:a="http://schemas.openxmlformats.org/drawingml/2006/main" anchor="ctr"/>
+          <a:lstStyle xmlns:a="http://schemas.openxmlformats.org/drawingml/2006/main"/>
+          <a:p xmlns:a="http://schemas.openxmlformats.org/drawingml/2006/main">
+            <a:pPr algn="ctr">
+              <a:defRPr sz="975" b="1">
+                <a:solidFill>
+                  <a:srgbClr val="1856B6"/>
+                </a:solidFill>
+              </a:defRPr>
+            </a:pPr>
+            <a:r>
+              <a:rPr sz="975" b="1">
+                <a:solidFill>
+                  <a:srgbClr val="1856B6"/>
+                </a:solidFill>
+              </a:rPr>
+              <a:t>Sentinel-1</a:t>
+            </a:r>
+          </a:p>
+          <a:p xmlns:a="http://schemas.openxmlformats.org/drawingml/2006/main">
+            <a:pPr algn="ctr">
+              <a:defRPr sz="975" b="1">
+                <a:solidFill>
+                  <a:srgbClr val="1856B6"/>
+                </a:solidFill>
+              </a:defRPr>
+            </a:pPr>
+            <a:r>
+              <a:rPr sz="975" b="1">
+                <a:solidFill>
+                  <a:srgbClr val="1856B6"/>
+                </a:solidFill>
+              </a:rPr>
+              <a:t>VV</a:t>
+            </a:r>
+          </a:p>
+        </p:txBody>
+      </p:sp>
+      <p:sp>
+        <p:nvSpPr>
+          <p:cNvPr id="31" name="">
+            <a:extLst xmlns:a="http://schemas.openxmlformats.org/drawingml/2006/main">
+              <a:ext uri="{FF2B5EF4-FFF2-40B4-BE49-F238E27FC236}">
+                <a16:creationId xmlns:a16="http://schemas.microsoft.com/office/drawing/2014/main" id="{E79190DF-94C0-4650-91B0-5FD988C8A36E}"/>
+              </a:ext>
+            </a:extLst>
+          </p:cNvPr>
+          <p:cNvSpPr>
+            <a:spLocks xmlns:a="http://schemas.openxmlformats.org/drawingml/2006/main" noGrp="1"/>
+          </p:cNvSpPr>
+          <p:nvPr/>
+        </p:nvSpPr>
+        <p:spPr>
+          <a:xfrm xmlns:a="http://schemas.openxmlformats.org/drawingml/2006/main">
+            <a:off x="10287000" y="1466850"/>
+            <a:ext cx="1333500" cy="400050"/>
+          </a:xfrm>
+          <a:prstGeom xmlns:a="http://schemas.openxmlformats.org/drawingml/2006/main" prst="roundRect">
+            <a:avLst>
+              <a:gd name="adj" fmla="val 28571"/>
+            </a:avLst>
+          </a:prstGeom>
+          <a:solidFill xmlns:a="http://schemas.openxmlformats.org/drawingml/2006/main">
+            <a:srgbClr val="FFFFFF"/>
+          </a:solidFill>
+          <a:ln xmlns:a="http://schemas.openxmlformats.org/drawingml/2006/main" w="9525">
+            <a:solidFill>
+              <a:srgbClr val="B8D3FF"/>
+            </a:solidFill>
+            <a:prstDash val="solid"/>
+          </a:ln>
+        </p:spPr>
+        <p:style>
+          <a:lnRef xmlns:a="http://schemas.openxmlformats.org/drawingml/2006/main" idx="0"/>
+          <a:fillRef xmlns:a="http://schemas.openxmlformats.org/drawingml/2006/main" idx="0"/>
+          <a:effectRef xmlns:a="http://schemas.openxmlformats.org/drawingml/2006/main" idx="4"/>
+          <a:fontRef xmlns:a="http://schemas.openxmlformats.org/drawingml/2006/main" idx="major"/>
+        </p:style>
+        <p:txBody>
+          <a:bodyPr xmlns:a="http://schemas.openxmlformats.org/drawingml/2006/main" anchor="ctr"/>
+          <a:lstStyle xmlns:a="http://schemas.openxmlformats.org/drawingml/2006/main"/>
+          <a:p xmlns:a="http://schemas.openxmlformats.org/drawingml/2006/main">
+            <a:pPr algn="ctr">
+              <a:defRPr sz="975" b="1">
+                <a:solidFill>
+                  <a:srgbClr val="1856B6"/>
+                </a:solidFill>
+              </a:defRPr>
+            </a:pPr>
+            <a:r>
+              <a:rPr sz="975" b="1">
+                <a:solidFill>
+                  <a:srgbClr val="1856B6"/>
+                </a:solidFill>
+              </a:rPr>
+              <a:t>Sentinel-2</a:t>
+            </a:r>
+          </a:p>
+          <a:p xmlns:a="http://schemas.openxmlformats.org/drawingml/2006/main">
+            <a:pPr algn="ctr">
+              <a:defRPr sz="975" b="1">
+                <a:solidFill>
+                  <a:srgbClr val="1856B6"/>
+                </a:solidFill>
+              </a:defRPr>
+            </a:pPr>
+            <a:r>
+              <a:rPr sz="975" b="1">
+                <a:solidFill>
+                  <a:srgbClr val="1856B6"/>
+                </a:solidFill>
+              </a:rPr>
+              <a:t>FCOVER</a:t>
+            </a:r>
+          </a:p>
+        </p:txBody>
+      </p:sp>
+      <p:sp>
+        <p:nvSpPr>
+          <p:cNvPr id="32" name="">
+            <a:extLst xmlns:a="http://schemas.openxmlformats.org/drawingml/2006/main">
+              <a:ext uri="{FF2B5EF4-FFF2-40B4-BE49-F238E27FC236}">
+                <a16:creationId xmlns:a16="http://schemas.microsoft.com/office/drawing/2014/main" id="{0C4D4A69-36D2-4C96-9B18-93963F644E5B}"/>
+              </a:ext>
+            </a:extLst>
+          </p:cNvPr>
+          <p:cNvSpPr>
+            <a:spLocks xmlns:a="http://schemas.openxmlformats.org/drawingml/2006/main" noGrp="1"/>
+          </p:cNvSpPr>
+          <p:nvPr/>
+        </p:nvSpPr>
+        <p:spPr>
+          <a:xfrm xmlns:a="http://schemas.openxmlformats.org/drawingml/2006/main">
+            <a:off x="8953500" y="5076825"/>
+            <a:ext cx="1809750" cy="419100"/>
+          </a:xfrm>
+          <a:prstGeom xmlns:a="http://schemas.openxmlformats.org/drawingml/2006/main" prst="roundRect">
+            <a:avLst>
+              <a:gd name="adj" fmla="val 27273"/>
+            </a:avLst>
+          </a:prstGeom>
+          <a:solidFill xmlns:a="http://schemas.openxmlformats.org/drawingml/2006/main">
+            <a:srgbClr val="FFFFFF"/>
+          </a:solidFill>
+          <a:ln xmlns:a="http://schemas.openxmlformats.org/drawingml/2006/main" w="9525">
+            <a:solidFill>
+              <a:srgbClr val="B8D3FF"/>
+            </a:solidFill>
+            <a:prstDash val="solid"/>
+          </a:ln>
+        </p:spPr>
+        <p:style>
+          <a:lnRef xmlns:a="http://schemas.openxmlformats.org/drawingml/2006/main" idx="0"/>
+          <a:fillRef xmlns:a="http://schemas.openxmlformats.org/drawingml/2006/main" idx="0"/>
+          <a:effectRef xmlns:a="http://schemas.openxmlformats.org/drawingml/2006/main" idx="4"/>
+          <a:fontRef xmlns:a="http://schemas.openxmlformats.org/drawingml/2006/main" idx="major"/>
+        </p:style>
+        <p:txBody>
+          <a:bodyPr xmlns:a="http://schemas.openxmlformats.org/drawingml/2006/main" anchor="ctr"/>
+          <a:lstStyle xmlns:a="http://schemas.openxmlformats.org/drawingml/2006/main"/>
+          <a:p xmlns:a="http://schemas.openxmlformats.org/drawingml/2006/main">
+            <a:pPr algn="ctr">
+              <a:defRPr sz="975" b="1">
+                <a:solidFill>
+                  <a:srgbClr val="1856B6"/>
+                </a:solidFill>
+              </a:defRPr>
+            </a:pPr>
+            <a:r>
+              <a:rPr sz="975" b="1">
+                <a:solidFill>
+                  <a:srgbClr val="1856B6"/>
+                </a:solidFill>
+              </a:rPr>
+              <a:t>Расчётная влажность</a:t>
+            </a:r>
+          </a:p>
+          <a:p xmlns:a="http://schemas.openxmlformats.org/drawingml/2006/main">
+            <a:pPr algn="ctr">
+              <a:defRPr sz="975" b="1">
+                <a:solidFill>
+                  <a:srgbClr val="1856B6"/>
+                </a:solidFill>
+              </a:defRPr>
+            </a:pPr>
+            <a:r>
+              <a:rPr sz="975" b="1">
+                <a:solidFill>
+                  <a:srgbClr val="1856B6"/>
+                </a:solidFill>
+              </a:rPr>
+              <a:t>θ 0–10 см</a:t>
+            </a:r>
+          </a:p>
+        </p:txBody>
+      </p:sp>
+      <p:sp>
+        <p:nvSpPr>
+          <p:cNvPr id="33" name="">
+            <a:extLst xmlns:a="http://schemas.openxmlformats.org/drawingml/2006/main">
+              <a:ext uri="{FF2B5EF4-FFF2-40B4-BE49-F238E27FC236}">
+                <a16:creationId xmlns:a16="http://schemas.microsoft.com/office/drawing/2014/main" id="{D890BFE3-6A01-466A-9937-E30B4F5343F4}"/>
+              </a:ext>
+            </a:extLst>
+          </p:cNvPr>
+          <p:cNvSpPr>
+            <a:spLocks xmlns:a="http://schemas.openxmlformats.org/drawingml/2006/main" noGrp="1"/>
+          </p:cNvSpPr>
+          <p:nvPr/>
+        </p:nvSpPr>
+        <p:spPr>
+          <a:xfrm xmlns:a="http://schemas.openxmlformats.org/drawingml/2006/main">
+            <a:off x="8096250" y="6191250"/>
+            <a:ext cx="3524250" cy="361950"/>
+          </a:xfrm>
+          <a:prstGeom xmlns:a="http://schemas.openxmlformats.org/drawingml/2006/main" prst="roundRect">
+            <a:avLst>
+              <a:gd name="adj" fmla="val 31579"/>
+            </a:avLst>
+          </a:prstGeom>
+          <a:solidFill xmlns:a="http://schemas.openxmlformats.org/drawingml/2006/main">
+            <a:srgbClr val="FFFFFF"/>
+          </a:solidFill>
+          <a:ln xmlns:a="http://schemas.openxmlformats.org/drawingml/2006/main" w="9525">
+            <a:solidFill>
+              <a:srgbClr val="B8D3FF"/>
+            </a:solidFill>
+            <a:prstDash val="solid"/>
+          </a:ln>
+        </p:spPr>
+        <p:style>
+          <a:lnRef xmlns:a="http://schemas.openxmlformats.org/drawingml/2006/main" idx="0"/>
+          <a:fillRef xmlns:a="http://schemas.openxmlformats.org/drawingml/2006/main" idx="0"/>
+          <a:effectRef xmlns:a="http://schemas.openxmlformats.org/drawingml/2006/main" idx="4"/>
+          <a:fontRef xmlns:a="http://schemas.openxmlformats.org/drawingml/2006/main" idx="major"/>
+        </p:style>
+        <p:txBody>
+          <a:bodyPr xmlns:a="http://schemas.openxmlformats.org/drawingml/2006/main" anchor="ctr"/>
+          <a:lstStyle xmlns:a="http://schemas.openxmlformats.org/drawingml/2006/main"/>
+          <a:p xmlns:a="http://schemas.openxmlformats.org/drawingml/2006/main">
+            <a:pPr algn="ctr">
+              <a:defRPr sz="975" b="1">
+                <a:solidFill>
+                  <a:srgbClr val="1856B6"/>
+                </a:solidFill>
+              </a:defRPr>
+            </a:pPr>
+            <a:r>
+              <a:rPr sz="975" b="1">
+                <a:solidFill>
+                  <a:srgbClr val="1856B6"/>
+                </a:solidFill>
+              </a:rPr>
+              <a:t>VV — не прямое измерение влажности</a:t>
             </a:r>
           </a:p>
         </p:txBody>
@@ -6246,7 +6537,7 @@
           <p:cNvPr id="31" name="">
             <a:extLst xmlns:a="http://schemas.openxmlformats.org/drawingml/2006/main">
               <a:ext uri="{FF2B5EF4-FFF2-40B4-BE49-F238E27FC236}">
-                <a16:creationId xmlns:a16="http://schemas.microsoft.com/office/drawing/2014/main" id="{DA1C04F4-A62E-4B10-8157-330335862AFB}"/>
+                <a16:creationId xmlns:a16="http://schemas.microsoft.com/office/drawing/2014/main" id="{755D7016-54DB-48A5-9468-B24D07FC2DCF}"/>
               </a:ext>
             </a:extLst>
           </p:cNvPr>
@@ -6279,7 +6570,7 @@
           <p:cNvPr id="32" name="">
             <a:extLst xmlns:a="http://schemas.openxmlformats.org/drawingml/2006/main">
               <a:ext uri="{FF2B5EF4-FFF2-40B4-BE49-F238E27FC236}">
-                <a16:creationId xmlns:a16="http://schemas.microsoft.com/office/drawing/2014/main" id="{FDD256AE-6BE2-4FF4-A773-53B17911C9DC}"/>
+                <a16:creationId xmlns:a16="http://schemas.microsoft.com/office/drawing/2014/main" id="{2BBAAC0F-472C-4109-B28B-3FFC2A8C0F80}"/>
               </a:ext>
             </a:extLst>
           </p:cNvPr>
@@ -6312,7 +6603,7 @@
           <p:cNvPr id="33" name="">
             <a:extLst xmlns:a="http://schemas.openxmlformats.org/drawingml/2006/main">
               <a:ext uri="{FF2B5EF4-FFF2-40B4-BE49-F238E27FC236}">
-                <a16:creationId xmlns:a16="http://schemas.microsoft.com/office/drawing/2014/main" id="{DE279D08-5220-46FF-996C-B9DFC552DED9}"/>
+                <a16:creationId xmlns:a16="http://schemas.microsoft.com/office/drawing/2014/main" id="{9F43849E-3C15-4EBB-A853-5E218381C0C2}"/>
               </a:ext>
             </a:extLst>
           </p:cNvPr>
@@ -6345,7 +6636,7 @@
           <p:cNvPr id="34" name="">
             <a:extLst xmlns:a="http://schemas.openxmlformats.org/drawingml/2006/main">
               <a:ext uri="{FF2B5EF4-FFF2-40B4-BE49-F238E27FC236}">
-                <a16:creationId xmlns:a16="http://schemas.microsoft.com/office/drawing/2014/main" id="{DCD2A129-3D76-4BC5-A593-07C5FB753AEA}"/>
+                <a16:creationId xmlns:a16="http://schemas.microsoft.com/office/drawing/2014/main" id="{EDB29122-2F83-427F-86C4-5A0AD1E8D47A}"/>
               </a:ext>
             </a:extLst>
           </p:cNvPr>
@@ -6424,7 +6715,7 @@
           <p:cNvPr id="35" name="">
             <a:extLst xmlns:a="http://schemas.openxmlformats.org/drawingml/2006/main">
               <a:ext uri="{FF2B5EF4-FFF2-40B4-BE49-F238E27FC236}">
-                <a16:creationId xmlns:a16="http://schemas.microsoft.com/office/drawing/2014/main" id="{F168D695-5B84-4AF0-A48A-17E60F97022F}"/>
+                <a16:creationId xmlns:a16="http://schemas.microsoft.com/office/drawing/2014/main" id="{C789616A-1AC0-4176-88F3-33AAB8229F1F}"/>
               </a:ext>
             </a:extLst>
           </p:cNvPr>
@@ -6503,7 +6794,7 @@
           <p:cNvPr id="36" name="">
             <a:extLst xmlns:a="http://schemas.openxmlformats.org/drawingml/2006/main">
               <a:ext uri="{FF2B5EF4-FFF2-40B4-BE49-F238E27FC236}">
-                <a16:creationId xmlns:a16="http://schemas.microsoft.com/office/drawing/2014/main" id="{55DFD289-D99F-4667-82C4-F72B96BE86FC}"/>
+                <a16:creationId xmlns:a16="http://schemas.microsoft.com/office/drawing/2014/main" id="{F7B6B3F1-7C5E-4796-999D-266689AD0599}"/>
               </a:ext>
             </a:extLst>
           </p:cNvPr>
@@ -6582,7 +6873,7 @@
           <p:cNvPr id="37" name="">
             <a:extLst xmlns:a="http://schemas.openxmlformats.org/drawingml/2006/main">
               <a:ext uri="{FF2B5EF4-FFF2-40B4-BE49-F238E27FC236}">
-                <a16:creationId xmlns:a16="http://schemas.microsoft.com/office/drawing/2014/main" id="{B82B39FA-D55C-4A1C-843C-58A71CBA3980}"/>
+                <a16:creationId xmlns:a16="http://schemas.microsoft.com/office/drawing/2014/main" id="{BE95C8E1-BF95-4AE9-89E4-6E95E2490B45}"/>
               </a:ext>
             </a:extLst>
           </p:cNvPr>
@@ -6665,7 +6956,7 @@
           <p:nvPr/>
         </p:nvPicPr>
         <p:blipFill>
-          <a:blip xmlns:r="http://schemas.openxmlformats.org/officeDocument/2006/relationships" xmlns:a="http://schemas.openxmlformats.org/drawingml/2006/main" r:embed="R4dfcc1f7e0844215"/>
+          <a:blip xmlns:r="http://schemas.openxmlformats.org/officeDocument/2006/relationships" xmlns:a="http://schemas.openxmlformats.org/drawingml/2006/main" r:embed="R227d07991b62499e"/>
           <a:stretch xmlns:a="http://schemas.openxmlformats.org/drawingml/2006/main"/>
         </p:blipFill>
         <p:spPr>
@@ -10011,7 +10302,7 @@
         </p:xfrm>
         <a:graphic xmlns:a="http://schemas.openxmlformats.org/drawingml/2006/main">
           <a:graphicData uri="http://schemas.openxmlformats.org/drawingml/2006/chart">
-            <c:chart xmlns:r="http://schemas.openxmlformats.org/officeDocument/2006/relationships" xmlns:c="http://schemas.openxmlformats.org/drawingml/2006/chart" r:id="R82e870ad5c40436a"/>
+            <c:chart xmlns:r="http://schemas.openxmlformats.org/officeDocument/2006/relationships" xmlns:c="http://schemas.openxmlformats.org/drawingml/2006/chart" r:id="R37b7cfeba1e14228"/>
           </a:graphicData>
         </a:graphic>
       </p:graphicFrame>

--- a/output/pptx/Оценка_возможности_восстановления_влажности_почвы_презентация.pptx
+++ b/output/pptx/Оценка_возможности_восстановления_влажности_почвы_презентация.pptx
@@ -2,19 +2,19 @@
 <file path=ppt/presentation.xml><?xml version="1.0" encoding="utf-8"?>
 <p:presentation xmlns:p="http://schemas.openxmlformats.org/presentationml/2006/main" embedTrueTypeFonts="1" saveSubsetFonts="0">
   <p:sldMasterIdLst>
-    <p:sldMasterId xmlns:r="http://schemas.openxmlformats.org/officeDocument/2006/relationships" id="2147483648" r:id="R759e44549afd4ce9"/>
+    <p:sldMasterId xmlns:r="http://schemas.openxmlformats.org/officeDocument/2006/relationships" id="2147483648" r:id="R9796dc5f6220409e"/>
   </p:sldMasterIdLst>
   <p:notesMasterIdLst>
-    <p:notesMasterId xmlns:r="http://schemas.openxmlformats.org/officeDocument/2006/relationships" r:id="R69439ed8c14f4947"/>
+    <p:notesMasterId xmlns:r="http://schemas.openxmlformats.org/officeDocument/2006/relationships" r:id="R79f1946ccc594d63"/>
   </p:notesMasterIdLst>
   <p:sldIdLst>
-    <p:sldId xmlns:r="http://schemas.openxmlformats.org/officeDocument/2006/relationships" id="256" r:id="R936f35d0346d4532"/>
-    <p:sldId xmlns:r="http://schemas.openxmlformats.org/officeDocument/2006/relationships" id="257" r:id="Rf74d86ce2bd64618"/>
-    <p:sldId xmlns:r="http://schemas.openxmlformats.org/officeDocument/2006/relationships" id="258" r:id="R751e439770684063"/>
-    <p:sldId xmlns:r="http://schemas.openxmlformats.org/officeDocument/2006/relationships" id="259" r:id="Rca574b0f9a8e4af5"/>
-    <p:sldId xmlns:r="http://schemas.openxmlformats.org/officeDocument/2006/relationships" id="260" r:id="R01162bff1f3c4a43"/>
-    <p:sldId xmlns:r="http://schemas.openxmlformats.org/officeDocument/2006/relationships" id="261" r:id="Ree773a76a7d74980"/>
-    <p:sldId xmlns:r="http://schemas.openxmlformats.org/officeDocument/2006/relationships" id="262" r:id="Rbbc930b702094b43"/>
+    <p:sldId xmlns:r="http://schemas.openxmlformats.org/officeDocument/2006/relationships" id="256" r:id="Redc75c464aaf49bd"/>
+    <p:sldId xmlns:r="http://schemas.openxmlformats.org/officeDocument/2006/relationships" id="257" r:id="R3753302dc7e342f4"/>
+    <p:sldId xmlns:r="http://schemas.openxmlformats.org/officeDocument/2006/relationships" id="258" r:id="Re153a37469394916"/>
+    <p:sldId xmlns:r="http://schemas.openxmlformats.org/officeDocument/2006/relationships" id="259" r:id="R4554de4ff5514a03"/>
+    <p:sldId xmlns:r="http://schemas.openxmlformats.org/officeDocument/2006/relationships" id="260" r:id="R676a9004059f46db"/>
+    <p:sldId xmlns:r="http://schemas.openxmlformats.org/officeDocument/2006/relationships" id="261" r:id="Rf090ea6f4d254583"/>
+    <p:sldId xmlns:r="http://schemas.openxmlformats.org/officeDocument/2006/relationships" id="262" r:id="Rf7bc111e43d44e8e"/>
   </p:sldIdLst>
   <p:sldSz cx="12192000" cy="6858000"/>
   <p:notesSz cx="6858000" cy="9144000"/>
@@ -3829,17 +3829,17 @@
   </p:cSld>
   <p:clrMap bg1="lt1" tx1="dk1" bg2="lt2" tx2="dk2" accent1="accent1" accent2="accent2" accent3="accent3" accent4="accent4" accent5="accent5" accent6="accent6" hlink="hlink" folHlink="folHlink"/>
   <p:sldLayoutIdLst>
-    <p:sldLayoutId xmlns:r="http://schemas.openxmlformats.org/officeDocument/2006/relationships" id="2147483649" r:id="R09bd58ffe8a74b29"/>
-    <p:sldLayoutId xmlns:r="http://schemas.openxmlformats.org/officeDocument/2006/relationships" id="2147483650" r:id="Rc8493c21cc074248"/>
-    <p:sldLayoutId xmlns:r="http://schemas.openxmlformats.org/officeDocument/2006/relationships" id="2147483651" r:id="Rc635751b85e6470c"/>
-    <p:sldLayoutId xmlns:r="http://schemas.openxmlformats.org/officeDocument/2006/relationships" id="2147483652" r:id="R4426eea5eb11470f"/>
-    <p:sldLayoutId xmlns:r="http://schemas.openxmlformats.org/officeDocument/2006/relationships" id="2147483653" r:id="R545cd6debd3e437e"/>
-    <p:sldLayoutId xmlns:r="http://schemas.openxmlformats.org/officeDocument/2006/relationships" id="2147483654" r:id="R223a09f4f6df482e"/>
-    <p:sldLayoutId xmlns:r="http://schemas.openxmlformats.org/officeDocument/2006/relationships" id="2147483655" r:id="Ra5503ebbe04f4fb6"/>
-    <p:sldLayoutId xmlns:r="http://schemas.openxmlformats.org/officeDocument/2006/relationships" id="2147483656" r:id="R1a5620b56d594551"/>
-    <p:sldLayoutId xmlns:r="http://schemas.openxmlformats.org/officeDocument/2006/relationships" id="2147483657" r:id="Ra57329ae58934f05"/>
-    <p:sldLayoutId xmlns:r="http://schemas.openxmlformats.org/officeDocument/2006/relationships" id="2147483658" r:id="Ra22e827efd904559"/>
-    <p:sldLayoutId xmlns:r="http://schemas.openxmlformats.org/officeDocument/2006/relationships" id="2147483659" r:id="R3bc62236139d4012"/>
+    <p:sldLayoutId xmlns:r="http://schemas.openxmlformats.org/officeDocument/2006/relationships" id="2147483649" r:id="Rb08917bc2b6247ff"/>
+    <p:sldLayoutId xmlns:r="http://schemas.openxmlformats.org/officeDocument/2006/relationships" id="2147483650" r:id="Rd3a40784e2ab4924"/>
+    <p:sldLayoutId xmlns:r="http://schemas.openxmlformats.org/officeDocument/2006/relationships" id="2147483651" r:id="R2bd9451f7bc34da0"/>
+    <p:sldLayoutId xmlns:r="http://schemas.openxmlformats.org/officeDocument/2006/relationships" id="2147483652" r:id="Raab8917bdc994737"/>
+    <p:sldLayoutId xmlns:r="http://schemas.openxmlformats.org/officeDocument/2006/relationships" id="2147483653" r:id="R19628a67652f4a70"/>
+    <p:sldLayoutId xmlns:r="http://schemas.openxmlformats.org/officeDocument/2006/relationships" id="2147483654" r:id="R5fb29c39a0394329"/>
+    <p:sldLayoutId xmlns:r="http://schemas.openxmlformats.org/officeDocument/2006/relationships" id="2147483655" r:id="R7f9a803728c141dc"/>
+    <p:sldLayoutId xmlns:r="http://schemas.openxmlformats.org/officeDocument/2006/relationships" id="2147483656" r:id="R03cb0f756a3b43fb"/>
+    <p:sldLayoutId xmlns:r="http://schemas.openxmlformats.org/officeDocument/2006/relationships" id="2147483657" r:id="Rfd828d2078e74fa4"/>
+    <p:sldLayoutId xmlns:r="http://schemas.openxmlformats.org/officeDocument/2006/relationships" id="2147483658" r:id="R1d26bbc4feed4113"/>
+    <p:sldLayoutId xmlns:r="http://schemas.openxmlformats.org/officeDocument/2006/relationships" id="2147483659" r:id="R0baf831540c04365"/>
   </p:sldLayoutIdLst>
   <p:txStyles>
     <p:titleStyle>
@@ -4652,7 +4652,7 @@
     <p:bg>
       <p:bgPr>
         <a:blipFill xmlns:a="http://schemas.openxmlformats.org/drawingml/2006/main" rotWithShape="1">
-          <a:blip xmlns:r="http://schemas.openxmlformats.org/officeDocument/2006/relationships" r:embed="Rb3b362c80b694e8e">
+          <a:blip xmlns:r="http://schemas.openxmlformats.org/officeDocument/2006/relationships" r:embed="R145405c4e2f54f55">
             <a:lum/>
           </a:blip>
           <a:srcRect l="0" t="0" r="0" b="0"/>
@@ -5610,7 +5610,7 @@
           <p:nvPr/>
         </p:nvPicPr>
         <p:blipFill>
-          <a:blip xmlns:r="http://schemas.openxmlformats.org/officeDocument/2006/relationships" xmlns:a="http://schemas.openxmlformats.org/drawingml/2006/main" r:embed="R5a6e81d0cd914dcd"/>
+          <a:blip xmlns:r="http://schemas.openxmlformats.org/officeDocument/2006/relationships" xmlns:a="http://schemas.openxmlformats.org/drawingml/2006/main" r:embed="R72ada32883664b42"/>
           <a:stretch xmlns:a="http://schemas.openxmlformats.org/drawingml/2006/main"/>
         </p:blipFill>
         <p:spPr>
@@ -5630,7 +5630,7 @@
           <p:cNvPr id="30" name="">
             <a:extLst xmlns:a="http://schemas.openxmlformats.org/drawingml/2006/main">
               <a:ext uri="{FF2B5EF4-FFF2-40B4-BE49-F238E27FC236}">
-                <a16:creationId xmlns:a16="http://schemas.microsoft.com/office/drawing/2014/main" id="{6D5A33B9-A515-44C5-AE75-1B72BEF63429}"/>
+                <a16:creationId xmlns:a16="http://schemas.microsoft.com/office/drawing/2014/main" id="{E49878E4-A124-46B2-BF5B-CDC1F61BD523}"/>
               </a:ext>
             </a:extLst>
           </p:cNvPr>
@@ -5641,7 +5641,7 @@
         </p:nvSpPr>
         <p:spPr>
           <a:xfrm xmlns:a="http://schemas.openxmlformats.org/drawingml/2006/main">
-            <a:off x="8096250" y="1390650"/>
+            <a:off x="8096250" y="1200150"/>
             <a:ext cx="1276350" cy="400050"/>
           </a:xfrm>
           <a:prstGeom xmlns:a="http://schemas.openxmlformats.org/drawingml/2006/main" prst="roundRect">
@@ -5709,7 +5709,7 @@
           <p:cNvPr id="31" name="">
             <a:extLst xmlns:a="http://schemas.openxmlformats.org/drawingml/2006/main">
               <a:ext uri="{FF2B5EF4-FFF2-40B4-BE49-F238E27FC236}">
-                <a16:creationId xmlns:a16="http://schemas.microsoft.com/office/drawing/2014/main" id="{E79190DF-94C0-4650-91B0-5FD988C8A36E}"/>
+                <a16:creationId xmlns:a16="http://schemas.microsoft.com/office/drawing/2014/main" id="{39FA2CCE-8E0D-4E12-B643-C36145BFAFFF}"/>
               </a:ext>
             </a:extLst>
           </p:cNvPr>
@@ -5720,7 +5720,7 @@
         </p:nvSpPr>
         <p:spPr>
           <a:xfrm xmlns:a="http://schemas.openxmlformats.org/drawingml/2006/main">
-            <a:off x="10287000" y="1466850"/>
+            <a:off x="10287000" y="1276350"/>
             <a:ext cx="1333500" cy="400050"/>
           </a:xfrm>
           <a:prstGeom xmlns:a="http://schemas.openxmlformats.org/drawingml/2006/main" prst="roundRect">
@@ -5788,7 +5788,7 @@
           <p:cNvPr id="32" name="">
             <a:extLst xmlns:a="http://schemas.openxmlformats.org/drawingml/2006/main">
               <a:ext uri="{FF2B5EF4-FFF2-40B4-BE49-F238E27FC236}">
-                <a16:creationId xmlns:a16="http://schemas.microsoft.com/office/drawing/2014/main" id="{0C4D4A69-36D2-4C96-9B18-93963F644E5B}"/>
+                <a16:creationId xmlns:a16="http://schemas.microsoft.com/office/drawing/2014/main" id="{A09EA261-C641-4CC8-BD36-EDF6F03E33B3}"/>
               </a:ext>
             </a:extLst>
           </p:cNvPr>
@@ -5867,7 +5867,7 @@
           <p:cNvPr id="33" name="">
             <a:extLst xmlns:a="http://schemas.openxmlformats.org/drawingml/2006/main">
               <a:ext uri="{FF2B5EF4-FFF2-40B4-BE49-F238E27FC236}">
-                <a16:creationId xmlns:a16="http://schemas.microsoft.com/office/drawing/2014/main" id="{D890BFE3-6A01-466A-9937-E30B4F5343F4}"/>
+                <a16:creationId xmlns:a16="http://schemas.microsoft.com/office/drawing/2014/main" id="{C5CA58AC-4ED8-42B3-8710-6FB8E121219B}"/>
               </a:ext>
             </a:extLst>
           </p:cNvPr>
@@ -6537,7 +6537,7 @@
           <p:cNvPr id="31" name="">
             <a:extLst xmlns:a="http://schemas.openxmlformats.org/drawingml/2006/main">
               <a:ext uri="{FF2B5EF4-FFF2-40B4-BE49-F238E27FC236}">
-                <a16:creationId xmlns:a16="http://schemas.microsoft.com/office/drawing/2014/main" id="{755D7016-54DB-48A5-9468-B24D07FC2DCF}"/>
+                <a16:creationId xmlns:a16="http://schemas.microsoft.com/office/drawing/2014/main" id="{35867CD9-F6F1-4770-BC18-72659BA2CF05}"/>
               </a:ext>
             </a:extLst>
           </p:cNvPr>
@@ -6570,7 +6570,7 @@
           <p:cNvPr id="32" name="">
             <a:extLst xmlns:a="http://schemas.openxmlformats.org/drawingml/2006/main">
               <a:ext uri="{FF2B5EF4-FFF2-40B4-BE49-F238E27FC236}">
-                <a16:creationId xmlns:a16="http://schemas.microsoft.com/office/drawing/2014/main" id="{2BBAAC0F-472C-4109-B28B-3FFC2A8C0F80}"/>
+                <a16:creationId xmlns:a16="http://schemas.microsoft.com/office/drawing/2014/main" id="{169D56DE-611C-4FA1-8419-265E319C9776}"/>
               </a:ext>
             </a:extLst>
           </p:cNvPr>
@@ -6603,7 +6603,7 @@
           <p:cNvPr id="33" name="">
             <a:extLst xmlns:a="http://schemas.openxmlformats.org/drawingml/2006/main">
               <a:ext uri="{FF2B5EF4-FFF2-40B4-BE49-F238E27FC236}">
-                <a16:creationId xmlns:a16="http://schemas.microsoft.com/office/drawing/2014/main" id="{9F43849E-3C15-4EBB-A853-5E218381C0C2}"/>
+                <a16:creationId xmlns:a16="http://schemas.microsoft.com/office/drawing/2014/main" id="{CD60AD87-27BC-4404-BE56-735C0D3675D6}"/>
               </a:ext>
             </a:extLst>
           </p:cNvPr>
@@ -6636,7 +6636,7 @@
           <p:cNvPr id="34" name="">
             <a:extLst xmlns:a="http://schemas.openxmlformats.org/drawingml/2006/main">
               <a:ext uri="{FF2B5EF4-FFF2-40B4-BE49-F238E27FC236}">
-                <a16:creationId xmlns:a16="http://schemas.microsoft.com/office/drawing/2014/main" id="{EDB29122-2F83-427F-86C4-5A0AD1E8D47A}"/>
+                <a16:creationId xmlns:a16="http://schemas.microsoft.com/office/drawing/2014/main" id="{C43AF7E3-332A-4491-AF3F-12BA1850FC8C}"/>
               </a:ext>
             </a:extLst>
           </p:cNvPr>
@@ -6715,7 +6715,7 @@
           <p:cNvPr id="35" name="">
             <a:extLst xmlns:a="http://schemas.openxmlformats.org/drawingml/2006/main">
               <a:ext uri="{FF2B5EF4-FFF2-40B4-BE49-F238E27FC236}">
-                <a16:creationId xmlns:a16="http://schemas.microsoft.com/office/drawing/2014/main" id="{C789616A-1AC0-4176-88F3-33AAB8229F1F}"/>
+                <a16:creationId xmlns:a16="http://schemas.microsoft.com/office/drawing/2014/main" id="{62B5F9C9-DD7A-4C1E-A2CC-2A4EDBD8C597}"/>
               </a:ext>
             </a:extLst>
           </p:cNvPr>
@@ -6794,7 +6794,7 @@
           <p:cNvPr id="36" name="">
             <a:extLst xmlns:a="http://schemas.openxmlformats.org/drawingml/2006/main">
               <a:ext uri="{FF2B5EF4-FFF2-40B4-BE49-F238E27FC236}">
-                <a16:creationId xmlns:a16="http://schemas.microsoft.com/office/drawing/2014/main" id="{F7B6B3F1-7C5E-4796-999D-266689AD0599}"/>
+                <a16:creationId xmlns:a16="http://schemas.microsoft.com/office/drawing/2014/main" id="{835D2A03-5593-436E-AC58-541B37311EEF}"/>
               </a:ext>
             </a:extLst>
           </p:cNvPr>
@@ -6873,7 +6873,7 @@
           <p:cNvPr id="37" name="">
             <a:extLst xmlns:a="http://schemas.openxmlformats.org/drawingml/2006/main">
               <a:ext uri="{FF2B5EF4-FFF2-40B4-BE49-F238E27FC236}">
-                <a16:creationId xmlns:a16="http://schemas.microsoft.com/office/drawing/2014/main" id="{BE95C8E1-BF95-4AE9-89E4-6E95E2490B45}"/>
+                <a16:creationId xmlns:a16="http://schemas.microsoft.com/office/drawing/2014/main" id="{1527B06B-367C-4974-8CAB-C23F15F68AF4}"/>
               </a:ext>
             </a:extLst>
           </p:cNvPr>
@@ -6956,7 +6956,7 @@
           <p:nvPr/>
         </p:nvPicPr>
         <p:blipFill>
-          <a:blip xmlns:r="http://schemas.openxmlformats.org/officeDocument/2006/relationships" xmlns:a="http://schemas.openxmlformats.org/drawingml/2006/main" r:embed="R227d07991b62499e"/>
+          <a:blip xmlns:r="http://schemas.openxmlformats.org/officeDocument/2006/relationships" xmlns:a="http://schemas.openxmlformats.org/drawingml/2006/main" r:embed="R9340600bb7c14353"/>
           <a:stretch xmlns:a="http://schemas.openxmlformats.org/drawingml/2006/main"/>
         </p:blipFill>
         <p:spPr>
@@ -10302,7 +10302,7 @@
         </p:xfrm>
         <a:graphic xmlns:a="http://schemas.openxmlformats.org/drawingml/2006/main">
           <a:graphicData uri="http://schemas.openxmlformats.org/drawingml/2006/chart">
-            <c:chart xmlns:r="http://schemas.openxmlformats.org/officeDocument/2006/relationships" xmlns:c="http://schemas.openxmlformats.org/drawingml/2006/chart" r:id="R37b7cfeba1e14228"/>
+            <c:chart xmlns:r="http://schemas.openxmlformats.org/officeDocument/2006/relationships" xmlns:c="http://schemas.openxmlformats.org/drawingml/2006/chart" r:id="R5450b6b4a7f34dc6"/>
           </a:graphicData>
         </a:graphic>
       </p:graphicFrame>

--- a/output/pptx/Оценка_возможности_восстановления_влажности_почвы_презентация.pptx
+++ b/output/pptx/Оценка_возможности_восстановления_влажности_почвы_презентация.pptx
@@ -1,1050 +1,21 @@
 
 <file path=ppt/presentation.xml><?xml version="1.0" encoding="utf-8"?>
-<p:presentation xmlns:p="http://schemas.openxmlformats.org/presentationml/2006/main" embedTrueTypeFonts="1" saveSubsetFonts="0">
+<p:presentation xmlns:p="http://schemas.openxmlformats.org/presentationml/2006/main">
   <p:sldMasterIdLst>
-    <p:sldMasterId xmlns:r="http://schemas.openxmlformats.org/officeDocument/2006/relationships" id="2147483648" r:id="R9796dc5f6220409e"/>
+    <p:sldMasterId xmlns:r="http://schemas.openxmlformats.org/officeDocument/2006/relationships" id="2147483648" r:id="Rbb48e0d9ad74444f"/>
   </p:sldMasterIdLst>
-  <p:notesMasterIdLst>
-    <p:notesMasterId xmlns:r="http://schemas.openxmlformats.org/officeDocument/2006/relationships" r:id="R79f1946ccc594d63"/>
-  </p:notesMasterIdLst>
   <p:sldIdLst>
-    <p:sldId xmlns:r="http://schemas.openxmlformats.org/officeDocument/2006/relationships" id="256" r:id="Redc75c464aaf49bd"/>
-    <p:sldId xmlns:r="http://schemas.openxmlformats.org/officeDocument/2006/relationships" id="257" r:id="R3753302dc7e342f4"/>
-    <p:sldId xmlns:r="http://schemas.openxmlformats.org/officeDocument/2006/relationships" id="258" r:id="Re153a37469394916"/>
-    <p:sldId xmlns:r="http://schemas.openxmlformats.org/officeDocument/2006/relationships" id="259" r:id="R4554de4ff5514a03"/>
-    <p:sldId xmlns:r="http://schemas.openxmlformats.org/officeDocument/2006/relationships" id="260" r:id="R676a9004059f46db"/>
-    <p:sldId xmlns:r="http://schemas.openxmlformats.org/officeDocument/2006/relationships" id="261" r:id="Rf090ea6f4d254583"/>
-    <p:sldId xmlns:r="http://schemas.openxmlformats.org/officeDocument/2006/relationships" id="262" r:id="Rf7bc111e43d44e8e"/>
+    <p:sldId xmlns:r="http://schemas.openxmlformats.org/officeDocument/2006/relationships" id="256" r:id="R264d3b28d6274256"/>
+    <p:sldId xmlns:r="http://schemas.openxmlformats.org/officeDocument/2006/relationships" id="257" r:id="R184a8be5002149ae"/>
+    <p:sldId xmlns:r="http://schemas.openxmlformats.org/officeDocument/2006/relationships" id="258" r:id="R8c160ad99906474b"/>
+    <p:sldId xmlns:r="http://schemas.openxmlformats.org/officeDocument/2006/relationships" id="259" r:id="R257c2004a5624cc5"/>
+    <p:sldId xmlns:r="http://schemas.openxmlformats.org/officeDocument/2006/relationships" id="260" r:id="R9907e982e1fb44e2"/>
+    <p:sldId xmlns:r="http://schemas.openxmlformats.org/officeDocument/2006/relationships" id="261" r:id="Rd748183bb5314ccf"/>
+    <p:sldId xmlns:r="http://schemas.openxmlformats.org/officeDocument/2006/relationships" id="262" r:id="R97e29419c41041ec"/>
   </p:sldIdLst>
   <p:sldSz cx="12192000" cy="6858000"/>
   <p:notesSz cx="6858000" cy="9144000"/>
 </p:presentation>
-</file>
-
-<file path=ppt/notesMasters/notesMaster1.xml><?xml version="1.0" encoding="utf-8"?>
-<p:notesMaster xmlns:p="http://schemas.openxmlformats.org/presentationml/2006/main">
-  <p:cSld>
-    <p:bg>
-      <p:bgRef idx="1001">
-        <a:schemeClr xmlns:a="http://schemas.openxmlformats.org/drawingml/2006/main" val="bg1"/>
-      </p:bgRef>
-    </p:bg>
-    <p:spTree>
-      <p:nvGrpSpPr>
-        <p:cNvPr id="1" name=""/>
-        <p:cNvGrpSpPr/>
-        <p:nvPr/>
-      </p:nvGrpSpPr>
-      <p:grpSpPr>
-        <a:xfrm xmlns:a="http://schemas.openxmlformats.org/drawingml/2006/main"/>
-      </p:grpSpPr>
-      <p:sp>
-        <p:nvSpPr>
-          <p:cNvPr id="2" name="Header Placeholder"/>
-          <p:cNvSpPr/>
-          <p:nvPr>
-            <p:ph type="hdr" sz="quarter"/>
-          </p:nvPr>
-        </p:nvSpPr>
-        <p:spPr>
-          <a:prstGeom xmlns:a="http://schemas.openxmlformats.org/drawingml/2006/main" prst="rect">
-            <a:avLst/>
-          </a:prstGeom>
-        </p:spPr>
-        <p:txBody>
-          <a:bodyPr xmlns:a="http://schemas.openxmlformats.org/drawingml/2006/main"/>
-          <a:lstStyle xmlns:a="http://schemas.openxmlformats.org/drawingml/2006/main"/>
-          <a:p xmlns:a="http://schemas.openxmlformats.org/drawingml/2006/main"/>
-        </p:txBody>
-      </p:sp>
-      <p:sp>
-        <p:nvSpPr>
-          <p:cNvPr id="3" name="Date Placeholder"/>
-          <p:cNvSpPr/>
-          <p:nvPr>
-            <p:ph type="dt" sz="quarter" idx="1"/>
-          </p:nvPr>
-        </p:nvSpPr>
-        <p:spPr>
-          <a:prstGeom xmlns:a="http://schemas.openxmlformats.org/drawingml/2006/main" prst="rect">
-            <a:avLst/>
-          </a:prstGeom>
-        </p:spPr>
-        <p:txBody>
-          <a:bodyPr xmlns:a="http://schemas.openxmlformats.org/drawingml/2006/main"/>
-          <a:lstStyle xmlns:a="http://schemas.openxmlformats.org/drawingml/2006/main"/>
-          <a:p xmlns:a="http://schemas.openxmlformats.org/drawingml/2006/main"/>
-        </p:txBody>
-      </p:sp>
-      <p:sp>
-        <p:nvSpPr>
-          <p:cNvPr id="4" name="Slide Image Placeholder"/>
-          <p:cNvSpPr/>
-          <p:nvPr>
-            <p:ph type="sldImg" idx="2"/>
-          </p:nvPr>
-        </p:nvSpPr>
-        <p:spPr>
-          <a:prstGeom xmlns:a="http://schemas.openxmlformats.org/drawingml/2006/main" prst="rect">
-            <a:avLst/>
-          </a:prstGeom>
-        </p:spPr>
-        <p:txBody>
-          <a:bodyPr xmlns:a="http://schemas.openxmlformats.org/drawingml/2006/main"/>
-          <a:lstStyle xmlns:a="http://schemas.openxmlformats.org/drawingml/2006/main"/>
-          <a:p xmlns:a="http://schemas.openxmlformats.org/drawingml/2006/main"/>
-        </p:txBody>
-      </p:sp>
-      <p:sp>
-        <p:nvSpPr>
-          <p:cNvPr id="5" name="Notes Placeholder"/>
-          <p:cNvSpPr/>
-          <p:nvPr>
-            <p:ph type="body" sz="quarter" idx="3"/>
-          </p:nvPr>
-        </p:nvSpPr>
-        <p:spPr>
-          <a:prstGeom xmlns:a="http://schemas.openxmlformats.org/drawingml/2006/main" prst="rect">
-            <a:avLst/>
-          </a:prstGeom>
-        </p:spPr>
-        <p:txBody>
-          <a:bodyPr xmlns:a="http://schemas.openxmlformats.org/drawingml/2006/main"/>
-          <a:lstStyle xmlns:a="http://schemas.openxmlformats.org/drawingml/2006/main"/>
-          <a:p xmlns:a="http://schemas.openxmlformats.org/drawingml/2006/main"/>
-        </p:txBody>
-      </p:sp>
-      <p:sp>
-        <p:nvSpPr>
-          <p:cNvPr id="6" name="Footer Placeholder"/>
-          <p:cNvSpPr/>
-          <p:nvPr>
-            <p:ph type="ftr" sz="quarter" idx="4"/>
-          </p:nvPr>
-        </p:nvSpPr>
-        <p:spPr>
-          <a:prstGeom xmlns:a="http://schemas.openxmlformats.org/drawingml/2006/main" prst="rect">
-            <a:avLst/>
-          </a:prstGeom>
-        </p:spPr>
-        <p:txBody>
-          <a:bodyPr xmlns:a="http://schemas.openxmlformats.org/drawingml/2006/main"/>
-          <a:lstStyle xmlns:a="http://schemas.openxmlformats.org/drawingml/2006/main"/>
-          <a:p xmlns:a="http://schemas.openxmlformats.org/drawingml/2006/main"/>
-        </p:txBody>
-      </p:sp>
-      <p:sp>
-        <p:nvSpPr>
-          <p:cNvPr id="7" name="Slide Number Placeholder"/>
-          <p:cNvSpPr/>
-          <p:nvPr>
-            <p:ph type="sldNum" sz="quarter" idx="5"/>
-          </p:nvPr>
-        </p:nvSpPr>
-        <p:spPr>
-          <a:prstGeom xmlns:a="http://schemas.openxmlformats.org/drawingml/2006/main" prst="rect">
-            <a:avLst/>
-          </a:prstGeom>
-        </p:spPr>
-        <p:txBody>
-          <a:bodyPr xmlns:a="http://schemas.openxmlformats.org/drawingml/2006/main"/>
-          <a:lstStyle xmlns:a="http://schemas.openxmlformats.org/drawingml/2006/main"/>
-          <a:p xmlns:a="http://schemas.openxmlformats.org/drawingml/2006/main"/>
-        </p:txBody>
-      </p:sp>
-    </p:spTree>
-  </p:cSld>
-  <p:clrMap bg1="lt1" tx1="dk1" bg2="lt2" tx2="dk2" accent1="accent1" accent2="accent2" accent3="accent3" accent4="accent4" accent5="accent5" accent6="accent6" hlink="hlink" folHlink="folHlink"/>
-  <p:notesStyle>
-    <a:lvl1pPr xmlns:a="http://schemas.openxmlformats.org/drawingml/2006/main" marL="0" algn="l" defTabSz="914400" rtl="0" eaLnBrk="1" latinLnBrk="0" hangingPunct="1">
-      <a:defRPr sz="1200" kern="1200"/>
-    </a:lvl1pPr>
-  </p:notesStyle>
-</p:notesMaster>
-</file>
-
-<file path=ppt/notesMasters/theme/theme3.xml><?xml version="1.0" encoding="utf-8"?>
-<a:theme xmlns:a="http://schemas.openxmlformats.org/drawingml/2006/main" name="Тема Office">
-  <a:themeElements>
-    <a:clrScheme name="Стандартная">
-      <a:dk1>
-        <a:sysClr val="windowText" lastClr="000000"/>
-      </a:dk1>
-      <a:lt1>
-        <a:sysClr val="window" lastClr="FFFFFF"/>
-      </a:lt1>
-      <a:dk2>
-        <a:srgbClr val="44546A"/>
-      </a:dk2>
-      <a:lt2>
-        <a:srgbClr val="E7E6E6"/>
-      </a:lt2>
-      <a:accent1>
-        <a:srgbClr val="4472C4"/>
-      </a:accent1>
-      <a:accent2>
-        <a:srgbClr val="ED7D31"/>
-      </a:accent2>
-      <a:accent3>
-        <a:srgbClr val="A5A5A5"/>
-      </a:accent3>
-      <a:accent4>
-        <a:srgbClr val="FFC000"/>
-      </a:accent4>
-      <a:accent5>
-        <a:srgbClr val="5B9BD5"/>
-      </a:accent5>
-      <a:accent6>
-        <a:srgbClr val="70AD47"/>
-      </a:accent6>
-      <a:hlink>
-        <a:srgbClr val="0563C1"/>
-      </a:hlink>
-      <a:folHlink>
-        <a:srgbClr val="954F72"/>
-      </a:folHlink>
-    </a:clrScheme>
-    <a:fontScheme name="Стандартная">
-      <a:majorFont>
-        <a:latin typeface="Calibri Light"/>
-        <a:ea typeface=""/>
-        <a:cs typeface=""/>
-        <a:font script="Jpan" typeface="游ゴシック Light"/>
-        <a:font script="Hang" typeface="맑은 고딕"/>
-        <a:font script="Hans" typeface="等线 Light"/>
-        <a:font script="Hant" typeface="新細明體"/>
-        <a:font script="Arab" typeface="Times New Roman"/>
-        <a:font script="Hebr" typeface="Times New Roman"/>
-        <a:font script="Thai" typeface="Angsana New"/>
-        <a:font script="Ethi" typeface="Nyala"/>
-        <a:font script="Beng" typeface="Vrinda"/>
-        <a:font script="Gujr" typeface="Shruti"/>
-        <a:font script="Khmr" typeface="MoolBoran"/>
-        <a:font script="Knda" typeface="Tunga"/>
-        <a:font script="Guru" typeface="Raavi"/>
-        <a:font script="Cans" typeface="Euphemia"/>
-        <a:font script="Cher" typeface="Plantagenet Cherokee"/>
-        <a:font script="Yiii" typeface="Microsoft Yi Baiti"/>
-        <a:font script="Tibt" typeface="Microsoft Himalaya"/>
-        <a:font script="Thaa" typeface="MV Boli"/>
-        <a:font script="Deva" typeface="Mangal"/>
-        <a:font script="Telu" typeface="Gautami"/>
-        <a:font script="Taml" typeface="Latha"/>
-        <a:font script="Syrc" typeface="Estrangelo Edessa"/>
-        <a:font script="Orya" typeface="Kalinga"/>
-        <a:font script="Mlym" typeface="Kartika"/>
-        <a:font script="Laoo" typeface="DokChampa"/>
-        <a:font script="Sinh" typeface="Iskoola Pota"/>
-        <a:font script="Mong" typeface="Mongolian Baiti"/>
-        <a:font script="Viet" typeface="Times New Roman"/>
-        <a:font script="Uigh" typeface="Microsoft Uighur"/>
-        <a:font script="Geor" typeface="Sylfaen"/>
-        <a:font script="Armn" typeface="Arial"/>
-        <a:font script="Bugi" typeface="Leelawadee UI"/>
-        <a:font script="Bopo" typeface="Microsoft JhengHei"/>
-        <a:font script="Java" typeface="Javanese Text"/>
-        <a:font script="Lisu" typeface="Segoe UI"/>
-        <a:font script="Mymr" typeface="Myanmar Text"/>
-        <a:font script="Nkoo" typeface="Ebrima"/>
-        <a:font script="Olck" typeface="Nirmala UI"/>
-        <a:font script="Osma" typeface="Ebrima"/>
-        <a:font script="Phag" typeface="Phagspa"/>
-        <a:font script="Syrn" typeface="Estrangelo Edessa"/>
-        <a:font script="Syrj" typeface="Estrangelo Edessa"/>
-        <a:font script="Syre" typeface="Estrangelo Edessa"/>
-        <a:font script="Sora" typeface="Nirmala UI"/>
-        <a:font script="Tale" typeface="Microsoft Tai Le"/>
-        <a:font script="Talu" typeface="Microsoft New Tai Lue"/>
-        <a:font script="Tfng" typeface="Ebrima"/>
-      </a:majorFont>
-      <a:minorFont>
-        <a:latin typeface="Calibri"/>
-        <a:ea typeface=""/>
-        <a:cs typeface=""/>
-        <a:font script="Jpan" typeface="游ゴシック"/>
-        <a:font script="Hang" typeface="맑은 고딕"/>
-        <a:font script="Hans" typeface="等线"/>
-        <a:font script="Hant" typeface="新細明體"/>
-        <a:font script="Arab" typeface="Arial"/>
-        <a:font script="Hebr" typeface="Arial"/>
-        <a:font script="Thai" typeface="Cordia New"/>
-        <a:font script="Ethi" typeface="Nyala"/>
-        <a:font script="Beng" typeface="Vrinda"/>
-        <a:font script="Gujr" typeface="Shruti"/>
-        <a:font script="Khmr" typeface="DaunPenh"/>
-        <a:font script="Knda" typeface="Tunga"/>
-        <a:font script="Guru" typeface="Raavi"/>
-        <a:font script="Cans" typeface="Euphemia"/>
-        <a:font script="Cher" typeface="Plantagenet Cherokee"/>
-        <a:font script="Yiii" typeface="Microsoft Yi Baiti"/>
-        <a:font script="Tibt" typeface="Microsoft Himalaya"/>
-        <a:font script="Thaa" typeface="MV Boli"/>
-        <a:font script="Deva" typeface="Mangal"/>
-        <a:font script="Telu" typeface="Gautami"/>
-        <a:font script="Taml" typeface="Latha"/>
-        <a:font script="Syrc" typeface="Estrangelo Edessa"/>
-        <a:font script="Orya" typeface="Kalinga"/>
-        <a:font script="Mlym" typeface="Kartika"/>
-        <a:font script="Laoo" typeface="DokChampa"/>
-        <a:font script="Sinh" typeface="Iskoola Pota"/>
-        <a:font script="Mong" typeface="Mongolian Baiti"/>
-        <a:font script="Viet" typeface="Arial"/>
-        <a:font script="Uigh" typeface="Microsoft Uighur"/>
-        <a:font script="Geor" typeface="Sylfaen"/>
-        <a:font script="Armn" typeface="Arial"/>
-        <a:font script="Bugi" typeface="Leelawadee UI"/>
-        <a:font script="Bopo" typeface="Microsoft JhengHei"/>
-        <a:font script="Java" typeface="Javanese Text"/>
-        <a:font script="Lisu" typeface="Segoe UI"/>
-        <a:font script="Mymr" typeface="Myanmar Text"/>
-        <a:font script="Nkoo" typeface="Ebrima"/>
-        <a:font script="Olck" typeface="Nirmala UI"/>
-        <a:font script="Osma" typeface="Ebrima"/>
-        <a:font script="Phag" typeface="Phagspa"/>
-        <a:font script="Syrn" typeface="Estrangelo Edessa"/>
-        <a:font script="Syrj" typeface="Estrangelo Edessa"/>
-        <a:font script="Syre" typeface="Estrangelo Edessa"/>
-        <a:font script="Sora" typeface="Nirmala UI"/>
-        <a:font script="Tale" typeface="Microsoft Tai Le"/>
-        <a:font script="Talu" typeface="Microsoft New Tai Lue"/>
-        <a:font script="Tfng" typeface="Ebrima"/>
-      </a:minorFont>
-    </a:fontScheme>
-    <a:fmtScheme name="Стандартная">
-      <a:fillStyleLst>
-        <a:solidFill>
-          <a:schemeClr val="phClr"/>
-        </a:solidFill>
-        <a:gradFill rotWithShape="1">
-          <a:gsLst>
-            <a:gs pos="0">
-              <a:schemeClr val="phClr">
-                <a:tint val="67000"/>
-                <a:lumMod val="110000"/>
-                <a:satMod val="105000"/>
-              </a:schemeClr>
-            </a:gs>
-            <a:gs pos="50000">
-              <a:schemeClr val="phClr">
-                <a:tint val="73000"/>
-                <a:lumMod val="105000"/>
-                <a:satMod val="103000"/>
-              </a:schemeClr>
-            </a:gs>
-            <a:gs pos="100000">
-              <a:schemeClr val="phClr">
-                <a:tint val="81000"/>
-                <a:lumMod val="105000"/>
-                <a:satMod val="109000"/>
-              </a:schemeClr>
-            </a:gs>
-          </a:gsLst>
-          <a:lin ang="5400000" scaled="0"/>
-        </a:gradFill>
-        <a:gradFill rotWithShape="1">
-          <a:gsLst>
-            <a:gs pos="0">
-              <a:schemeClr val="phClr">
-                <a:tint val="94000"/>
-                <a:lumMod val="102000"/>
-                <a:satMod val="103000"/>
-              </a:schemeClr>
-            </a:gs>
-            <a:gs pos="50000">
-              <a:schemeClr val="phClr">
-                <a:shade val="100000"/>
-                <a:lumMod val="100000"/>
-                <a:satMod val="110000"/>
-              </a:schemeClr>
-            </a:gs>
-            <a:gs pos="100000">
-              <a:schemeClr val="phClr">
-                <a:shade val="78000"/>
-                <a:lumMod val="99000"/>
-                <a:satMod val="120000"/>
-              </a:schemeClr>
-            </a:gs>
-          </a:gsLst>
-          <a:lin ang="5400000" scaled="0"/>
-        </a:gradFill>
-      </a:fillStyleLst>
-      <a:lnStyleLst>
-        <a:ln w="6350">
-          <a:solidFill>
-            <a:schemeClr val="phClr"/>
-          </a:solidFill>
-          <a:prstDash val="solid"/>
-        </a:ln>
-        <a:ln w="12700">
-          <a:solidFill>
-            <a:schemeClr val="phClr"/>
-          </a:solidFill>
-          <a:prstDash val="solid"/>
-        </a:ln>
-        <a:ln w="19050">
-          <a:solidFill>
-            <a:schemeClr val="phClr"/>
-          </a:solidFill>
-          <a:prstDash val="solid"/>
-        </a:ln>
-      </a:lnStyleLst>
-      <a:effectStyleLst>
-        <a:effectStyle>
-          <a:effectLst/>
-        </a:effectStyle>
-        <a:effectStyle>
-          <a:effectLst/>
-        </a:effectStyle>
-        <a:effectStyle>
-          <a:effectLst>
-            <a:outerShdw blurRad="57150" dist="19050" dir="5400000" algn="ctr" rotWithShape="0">
-              <a:srgbClr val="000000">
-                <a:alpha val="63000"/>
-              </a:srgbClr>
-            </a:outerShdw>
-          </a:effectLst>
-        </a:effectStyle>
-      </a:effectStyleLst>
-      <a:bgFillStyleLst>
-        <a:solidFill>
-          <a:schemeClr val="phClr"/>
-        </a:solidFill>
-        <a:solidFill>
-          <a:schemeClr val="phClr">
-            <a:tint val="95000"/>
-            <a:satMod val="170000"/>
-          </a:schemeClr>
-        </a:solidFill>
-        <a:gradFill rotWithShape="1">
-          <a:gsLst>
-            <a:gs pos="0">
-              <a:schemeClr val="phClr">
-                <a:tint val="93000"/>
-                <a:shade val="98000"/>
-                <a:lumMod val="102000"/>
-                <a:satMod val="150000"/>
-              </a:schemeClr>
-            </a:gs>
-            <a:gs pos="50000">
-              <a:schemeClr val="phClr">
-                <a:tint val="98000"/>
-                <a:shade val="90000"/>
-                <a:lumMod val="103000"/>
-                <a:satMod val="130000"/>
-              </a:schemeClr>
-            </a:gs>
-            <a:gs pos="100000">
-              <a:schemeClr val="phClr">
-                <a:shade val="63000"/>
-                <a:satMod val="120000"/>
-              </a:schemeClr>
-            </a:gs>
-          </a:gsLst>
-          <a:lin ang="5400000" scaled="0"/>
-        </a:gradFill>
-      </a:bgFillStyleLst>
-    </a:fmtScheme>
-  </a:themeElements>
-</a:theme>
-</file>
-
-<file path=ppt/notesSlides/notesSlide1.xml><?xml version="1.0" encoding="utf-8"?>
-<p:notes xmlns:p="http://schemas.openxmlformats.org/presentationml/2006/main">
-  <p:cSld>
-    <p:spTree>
-      <p:nvGrpSpPr>
-        <p:cNvPr id="1" name=""/>
-        <p:cNvGrpSpPr/>
-        <p:nvPr/>
-      </p:nvGrpSpPr>
-      <p:grpSpPr>
-        <a:xfrm xmlns:a="http://schemas.openxmlformats.org/drawingml/2006/main"/>
-      </p:grpSpPr>
-      <p:sp>
-        <p:nvSpPr>
-          <p:cNvPr id="2" name="Slide Image Placeholder 1"/>
-          <p:cNvSpPr>
-            <a:spLocks xmlns:a="http://schemas.openxmlformats.org/drawingml/2006/main" noGrp="1"/>
-          </p:cNvSpPr>
-          <p:nvPr>
-            <p:ph type="sldImg" idx="0"/>
-          </p:nvPr>
-        </p:nvSpPr>
-        <p:spPr/>
-      </p:sp>
-      <p:sp>
-        <p:nvSpPr>
-          <p:cNvPr id="3" name="Notes Placeholder 2"/>
-          <p:cNvSpPr>
-            <a:spLocks xmlns:a="http://schemas.openxmlformats.org/drawingml/2006/main" noGrp="1"/>
-          </p:cNvSpPr>
-          <p:nvPr>
-            <p:ph type="body" idx="1"/>
-          </p:nvPr>
-        </p:nvSpPr>
-        <p:spPr/>
-        <p:txBody>
-          <a:bodyPr xmlns:a="http://schemas.openxmlformats.org/drawingml/2006/main"/>
-          <a:lstStyle xmlns:a="http://schemas.openxmlformats.org/drawingml/2006/main"/>
-          <a:p xmlns:a="http://schemas.openxmlformats.org/drawingml/2006/main">
-            <a:r>
-              <a:t>[Sources]</a:t>
-            </a:r>
-          </a:p>
-          <a:p xmlns:a="http://schemas.openxmlformats.org/drawingml/2006/main">
-            <a:r>
-              <a:t>Финальные тезисы: «Оценка возможности восстановления данных о влажности почвы…», 2026.</a:t>
-            </a:r>
-          </a:p>
-          <a:p xmlns:a="http://schemas.openxmlformats.org/drawingml/2006/main">
-            <a:r>
-              <a:t/>
-            </a:r>
-          </a:p>
-          <a:p xmlns:a="http://schemas.openxmlformats.org/drawingml/2006/main">
-            <a:r>
-              <a:t>Открытие: задача — проверить, согласуется ли независимый Sentinel-1 с расчётным приповерхностным водным состоянием.</a:t>
-            </a:r>
-          </a:p>
-        </p:txBody>
-      </p:sp>
-      <p:sp>
-        <p:nvSpPr>
-          <p:cNvPr id="4" name="Slide Number Placeholder 3"/>
-          <p:cNvSpPr>
-            <a:spLocks xmlns:a="http://schemas.openxmlformats.org/drawingml/2006/main" noGrp="1"/>
-          </p:cNvSpPr>
-          <p:nvPr>
-            <p:ph type="sldNum" idx="5"/>
-          </p:nvPr>
-        </p:nvSpPr>
-        <p:spPr/>
-        <p:txBody>
-          <a:bodyPr xmlns:a="http://schemas.openxmlformats.org/drawingml/2006/main"/>
-          <a:lstStyle xmlns:a="http://schemas.openxmlformats.org/drawingml/2006/main"/>
-          <a:p xmlns:a="http://schemas.openxmlformats.org/drawingml/2006/main"/>
-        </p:txBody>
-      </p:sp>
-    </p:spTree>
-  </p:cSld>
-  <p:clrMapOvr>
-    <a:masterClrMapping xmlns:a="http://schemas.openxmlformats.org/drawingml/2006/main"/>
-  </p:clrMapOvr>
-</p:notes>
-</file>
-
-<file path=ppt/notesSlides/notesSlide2.xml><?xml version="1.0" encoding="utf-8"?>
-<p:notes xmlns:p="http://schemas.openxmlformats.org/presentationml/2006/main">
-  <p:cSld>
-    <p:spTree>
-      <p:nvGrpSpPr>
-        <p:cNvPr id="1" name=""/>
-        <p:cNvGrpSpPr/>
-        <p:nvPr/>
-      </p:nvGrpSpPr>
-      <p:grpSpPr>
-        <a:xfrm xmlns:a="http://schemas.openxmlformats.org/drawingml/2006/main"/>
-      </p:grpSpPr>
-      <p:sp>
-        <p:nvSpPr>
-          <p:cNvPr id="2" name="Slide Image Placeholder 1"/>
-          <p:cNvSpPr>
-            <a:spLocks xmlns:a="http://schemas.openxmlformats.org/drawingml/2006/main" noGrp="1"/>
-          </p:cNvSpPr>
-          <p:nvPr>
-            <p:ph type="sldImg" idx="0"/>
-          </p:nvPr>
-        </p:nvSpPr>
-        <p:spPr/>
-      </p:sp>
-      <p:sp>
-        <p:nvSpPr>
-          <p:cNvPr id="3" name="Notes Placeholder 2"/>
-          <p:cNvSpPr>
-            <a:spLocks xmlns:a="http://schemas.openxmlformats.org/drawingml/2006/main" noGrp="1"/>
-          </p:cNvSpPr>
-          <p:nvPr>
-            <p:ph type="body" idx="1"/>
-          </p:nvPr>
-        </p:nvSpPr>
-        <p:spPr/>
-        <p:txBody>
-          <a:bodyPr xmlns:a="http://schemas.openxmlformats.org/drawingml/2006/main"/>
-          <a:lstStyle xmlns:a="http://schemas.openxmlformats.org/drawingml/2006/main"/>
-          <a:p xmlns:a="http://schemas.openxmlformats.org/drawingml/2006/main">
-            <a:r>
-              <a:t>[Sources]</a:t>
-            </a:r>
-            <a:endParaRPr/>
-          </a:p>
-          <a:p xmlns:a="http://schemas.openxmlformats.org/drawingml/2006/main">
-            <a:r>
-              <a:t>Авторская иллюстрация, предоставленная пользователем; финальные тезисы, введение и обсуждение.</a:t>
-            </a:r>
-            <a:endParaRPr/>
-          </a:p>
-          <a:p xmlns:a="http://schemas.openxmlformats.org/drawingml/2006/main">
-            <a:r>
-              <a:t/>
-            </a:r>
-            <a:endParaRPr/>
-          </a:p>
-          <a:p xmlns:a="http://schemas.openxmlformats.org/drawingml/2006/main">
-            <a:r>
-              <a:t>Ключевой тезис: мы не выдаём VV за прямое измерение влажности. Проверяем, даёт ли он независимое подтверждение расчётной динамики.</a:t>
-            </a:r>
-            <a:endParaRPr/>
-          </a:p>
-        </p:txBody>
-      </p:sp>
-      <p:sp>
-        <p:nvSpPr>
-          <p:cNvPr id="4" name="Slide Number Placeholder 3"/>
-          <p:cNvSpPr>
-            <a:spLocks xmlns:a="http://schemas.openxmlformats.org/drawingml/2006/main" noGrp="1"/>
-          </p:cNvSpPr>
-          <p:nvPr>
-            <p:ph type="sldNum" idx="5"/>
-          </p:nvPr>
-        </p:nvSpPr>
-        <p:spPr/>
-        <p:txBody>
-          <a:bodyPr xmlns:a="http://schemas.openxmlformats.org/drawingml/2006/main"/>
-          <a:lstStyle xmlns:a="http://schemas.openxmlformats.org/drawingml/2006/main"/>
-          <a:p xmlns:a="http://schemas.openxmlformats.org/drawingml/2006/main"/>
-        </p:txBody>
-      </p:sp>
-    </p:spTree>
-  </p:cSld>
-  <p:clrMapOvr>
-    <a:masterClrMapping xmlns:a="http://schemas.openxmlformats.org/drawingml/2006/main"/>
-  </p:clrMapOvr>
-</p:notes>
-</file>
-
-<file path=ppt/notesSlides/notesSlide3.xml><?xml version="1.0" encoding="utf-8"?>
-<p:notes xmlns:p="http://schemas.openxmlformats.org/presentationml/2006/main">
-  <p:cSld>
-    <p:spTree>
-      <p:nvGrpSpPr>
-        <p:cNvPr id="1" name=""/>
-        <p:cNvGrpSpPr/>
-        <p:nvPr/>
-      </p:nvGrpSpPr>
-      <p:grpSpPr>
-        <a:xfrm xmlns:a="http://schemas.openxmlformats.org/drawingml/2006/main"/>
-      </p:grpSpPr>
-      <p:sp>
-        <p:nvSpPr>
-          <p:cNvPr id="2" name="Slide Image Placeholder 1"/>
-          <p:cNvSpPr>
-            <a:spLocks xmlns:a="http://schemas.openxmlformats.org/drawingml/2006/main" noGrp="1"/>
-          </p:cNvSpPr>
-          <p:nvPr>
-            <p:ph type="sldImg" idx="0"/>
-          </p:nvPr>
-        </p:nvSpPr>
-        <p:spPr/>
-      </p:sp>
-      <p:sp>
-        <p:nvSpPr>
-          <p:cNvPr id="3" name="Notes Placeholder 2"/>
-          <p:cNvSpPr>
-            <a:spLocks xmlns:a="http://schemas.openxmlformats.org/drawingml/2006/main" noGrp="1"/>
-          </p:cNvSpPr>
-          <p:nvPr>
-            <p:ph type="body" idx="1"/>
-          </p:nvPr>
-        </p:nvSpPr>
-        <p:spPr/>
-        <p:txBody>
-          <a:bodyPr xmlns:a="http://schemas.openxmlformats.org/drawingml/2006/main"/>
-          <a:lstStyle xmlns:a="http://schemas.openxmlformats.org/drawingml/2006/main"/>
-          <a:p xmlns:a="http://schemas.openxmlformats.org/drawingml/2006/main">
-            <a:r>
-              <a:t>[Sources]</a:t>
-            </a:r>
-          </a:p>
-          <a:p xmlns:a="http://schemas.openxmlformats.org/drawingml/2006/main">
-            <a:r>
-              <a:t>Авторская иллюстрация, предоставленная пользователем; документация проекта: docs/wiki/ARCHITECTURE.md, docs/wiki/PIPELINES.md.</a:t>
-            </a:r>
-          </a:p>
-          <a:p xmlns:a="http://schemas.openxmlformats.org/drawingml/2006/main">
-            <a:r>
-              <a:t/>
-            </a:r>
-          </a:p>
-          <a:p xmlns:a="http://schemas.openxmlformats.org/drawingml/2006/main">
-            <a:r>
-              <a:t>Архитектура: единственный пользовательский интерфейс — QGIS-плагин. Он связывает локальные пространственные и временные данные с PyQGIS/GDAL-сценариями и выдаёт слои, диаграммы и JSON-протокол.</a:t>
-            </a:r>
-          </a:p>
-        </p:txBody>
-      </p:sp>
-      <p:sp>
-        <p:nvSpPr>
-          <p:cNvPr id="4" name="Slide Number Placeholder 3"/>
-          <p:cNvSpPr>
-            <a:spLocks xmlns:a="http://schemas.openxmlformats.org/drawingml/2006/main" noGrp="1"/>
-          </p:cNvSpPr>
-          <p:nvPr>
-            <p:ph type="sldNum" idx="5"/>
-          </p:nvPr>
-        </p:nvSpPr>
-        <p:spPr/>
-        <p:txBody>
-          <a:bodyPr xmlns:a="http://schemas.openxmlformats.org/drawingml/2006/main"/>
-          <a:lstStyle xmlns:a="http://schemas.openxmlformats.org/drawingml/2006/main"/>
-          <a:p xmlns:a="http://schemas.openxmlformats.org/drawingml/2006/main"/>
-        </p:txBody>
-      </p:sp>
-    </p:spTree>
-  </p:cSld>
-  <p:clrMapOvr>
-    <a:masterClrMapping xmlns:a="http://schemas.openxmlformats.org/drawingml/2006/main"/>
-  </p:clrMapOvr>
-</p:notes>
-</file>
-
-<file path=ppt/notesSlides/notesSlide4.xml><?xml version="1.0" encoding="utf-8"?>
-<p:notes xmlns:p="http://schemas.openxmlformats.org/presentationml/2006/main">
-  <p:cSld>
-    <p:spTree>
-      <p:nvGrpSpPr>
-        <p:cNvPr id="1" name=""/>
-        <p:cNvGrpSpPr/>
-        <p:nvPr/>
-      </p:nvGrpSpPr>
-      <p:grpSpPr>
-        <a:xfrm xmlns:a="http://schemas.openxmlformats.org/drawingml/2006/main"/>
-      </p:grpSpPr>
-      <p:sp>
-        <p:nvSpPr>
-          <p:cNvPr id="2" name="Slide Image Placeholder 1"/>
-          <p:cNvSpPr>
-            <a:spLocks xmlns:a="http://schemas.openxmlformats.org/drawingml/2006/main" noGrp="1"/>
-          </p:cNvSpPr>
-          <p:nvPr>
-            <p:ph type="sldImg" idx="0"/>
-          </p:nvPr>
-        </p:nvSpPr>
-        <p:spPr/>
-      </p:sp>
-      <p:sp>
-        <p:nvSpPr>
-          <p:cNvPr id="3" name="Notes Placeholder 2"/>
-          <p:cNvSpPr>
-            <a:spLocks xmlns:a="http://schemas.openxmlformats.org/drawingml/2006/main" noGrp="1"/>
-          </p:cNvSpPr>
-          <p:nvPr>
-            <p:ph type="body" idx="1"/>
-          </p:nvPr>
-        </p:nvSpPr>
-        <p:spPr/>
-        <p:txBody>
-          <a:bodyPr xmlns:a="http://schemas.openxmlformats.org/drawingml/2006/main"/>
-          <a:lstStyle xmlns:a="http://schemas.openxmlformats.org/drawingml/2006/main"/>
-          <a:p xmlns:a="http://schemas.openxmlformats.org/drawingml/2006/main">
-            <a:r>
-              <a:t>[Sources]</a:t>
-            </a:r>
-          </a:p>
-          <a:p xmlns:a="http://schemas.openxmlformats.org/drawingml/2006/main">
-            <a:r>
-              <a:t>sp_full_experiment_protocol.json: sentinel2_fcover и kornix_fcover_lag.</a:t>
-            </a:r>
-          </a:p>
-          <a:p xmlns:a="http://schemas.openxmlformats.org/drawingml/2006/main">
-            <a:r>
-              <a:t/>
-            </a:r>
-          </a:p>
-          <a:p xmlns:a="http://schemas.openxmlformats.org/drawingml/2006/main">
-            <a:r>
-              <a:t>Лаг относится к визуальному сопоставлению кривых покрытия: модельная кривая показана на 12 суток правее. Это не изменяет исходные даты в рядах.</a:t>
-            </a:r>
-          </a:p>
-        </p:txBody>
-      </p:sp>
-      <p:sp>
-        <p:nvSpPr>
-          <p:cNvPr id="4" name="Slide Number Placeholder 3"/>
-          <p:cNvSpPr>
-            <a:spLocks xmlns:a="http://schemas.openxmlformats.org/drawingml/2006/main" noGrp="1"/>
-          </p:cNvSpPr>
-          <p:nvPr>
-            <p:ph type="sldNum" idx="5"/>
-          </p:nvPr>
-        </p:nvSpPr>
-        <p:spPr/>
-        <p:txBody>
-          <a:bodyPr xmlns:a="http://schemas.openxmlformats.org/drawingml/2006/main"/>
-          <a:lstStyle xmlns:a="http://schemas.openxmlformats.org/drawingml/2006/main"/>
-          <a:p xmlns:a="http://schemas.openxmlformats.org/drawingml/2006/main"/>
-        </p:txBody>
-      </p:sp>
-    </p:spTree>
-  </p:cSld>
-  <p:clrMapOvr>
-    <a:masterClrMapping xmlns:a="http://schemas.openxmlformats.org/drawingml/2006/main"/>
-  </p:clrMapOvr>
-</p:notes>
-</file>
-
-<file path=ppt/notesSlides/notesSlide5.xml><?xml version="1.0" encoding="utf-8"?>
-<p:notes xmlns:p="http://schemas.openxmlformats.org/presentationml/2006/main">
-  <p:cSld>
-    <p:spTree>
-      <p:nvGrpSpPr>
-        <p:cNvPr id="1" name=""/>
-        <p:cNvGrpSpPr/>
-        <p:nvPr/>
-      </p:nvGrpSpPr>
-      <p:grpSpPr>
-        <a:xfrm xmlns:a="http://schemas.openxmlformats.org/drawingml/2006/main"/>
-      </p:grpSpPr>
-      <p:sp>
-        <p:nvSpPr>
-          <p:cNvPr id="2" name="Slide Image Placeholder 1"/>
-          <p:cNvSpPr>
-            <a:spLocks xmlns:a="http://schemas.openxmlformats.org/drawingml/2006/main" noGrp="1"/>
-          </p:cNvSpPr>
-          <p:nvPr>
-            <p:ph type="sldImg" idx="0"/>
-          </p:nvPr>
-        </p:nvSpPr>
-        <p:spPr/>
-      </p:sp>
-      <p:sp>
-        <p:nvSpPr>
-          <p:cNvPr id="3" name="Notes Placeholder 2"/>
-          <p:cNvSpPr>
-            <a:spLocks xmlns:a="http://schemas.openxmlformats.org/drawingml/2006/main" noGrp="1"/>
-          </p:cNvSpPr>
-          <p:nvPr>
-            <p:ph type="body" idx="1"/>
-          </p:nvPr>
-        </p:nvSpPr>
-        <p:spPr/>
-        <p:txBody>
-          <a:bodyPr xmlns:a="http://schemas.openxmlformats.org/drawingml/2006/main"/>
-          <a:lstStyle xmlns:a="http://schemas.openxmlformats.org/drawingml/2006/main"/>
-          <a:p xmlns:a="http://schemas.openxmlformats.org/drawingml/2006/main">
-            <a:r>
-              <a:t>[Sources]</a:t>
-            </a:r>
-          </a:p>
-          <a:p xmlns:a="http://schemas.openxmlformats.org/drawingml/2006/main">
-            <a:r>
-              <a:t>Финальные тезисы, раздел «Результаты»; sp_full_experiment_protocol.json: sentinel1_validation, cross_validated_predictive_gain.</a:t>
-            </a:r>
-          </a:p>
-          <a:p xmlns:a="http://schemas.openxmlformats.org/drawingml/2006/main">
-            <a:r>
-              <a:t/>
-            </a:r>
-          </a:p>
-          <a:p xmlns:a="http://schemas.openxmlformats.org/drawingml/2006/main">
-            <a:r>
-              <a:t>Главный результат — не абсолютное R², а устойчивый прирост M3 на полях, которые модель не видела. Прирост M3–M1: 0,078, bootstrap 95% CI 0,035…0,128.</a:t>
-            </a:r>
-          </a:p>
-        </p:txBody>
-      </p:sp>
-      <p:sp>
-        <p:nvSpPr>
-          <p:cNvPr id="4" name="Slide Number Placeholder 3"/>
-          <p:cNvSpPr>
-            <a:spLocks xmlns:a="http://schemas.openxmlformats.org/drawingml/2006/main" noGrp="1"/>
-          </p:cNvSpPr>
-          <p:nvPr>
-            <p:ph type="sldNum" idx="5"/>
-          </p:nvPr>
-        </p:nvSpPr>
-        <p:spPr/>
-        <p:txBody>
-          <a:bodyPr xmlns:a="http://schemas.openxmlformats.org/drawingml/2006/main"/>
-          <a:lstStyle xmlns:a="http://schemas.openxmlformats.org/drawingml/2006/main"/>
-          <a:p xmlns:a="http://schemas.openxmlformats.org/drawingml/2006/main"/>
-        </p:txBody>
-      </p:sp>
-    </p:spTree>
-  </p:cSld>
-  <p:clrMapOvr>
-    <a:masterClrMapping xmlns:a="http://schemas.openxmlformats.org/drawingml/2006/main"/>
-  </p:clrMapOvr>
-</p:notes>
-</file>
-
-<file path=ppt/notesSlides/notesSlide6.xml><?xml version="1.0" encoding="utf-8"?>
-<p:notes xmlns:p="http://schemas.openxmlformats.org/presentationml/2006/main">
-  <p:cSld>
-    <p:spTree>
-      <p:nvGrpSpPr>
-        <p:cNvPr id="1" name=""/>
-        <p:cNvGrpSpPr/>
-        <p:nvPr/>
-      </p:nvGrpSpPr>
-      <p:grpSpPr>
-        <a:xfrm xmlns:a="http://schemas.openxmlformats.org/drawingml/2006/main"/>
-      </p:grpSpPr>
-      <p:sp>
-        <p:nvSpPr>
-          <p:cNvPr id="2" name="Slide Image Placeholder 1"/>
-          <p:cNvSpPr>
-            <a:spLocks xmlns:a="http://schemas.openxmlformats.org/drawingml/2006/main" noGrp="1"/>
-          </p:cNvSpPr>
-          <p:nvPr>
-            <p:ph type="sldImg" idx="0"/>
-          </p:nvPr>
-        </p:nvSpPr>
-        <p:spPr/>
-      </p:sp>
-      <p:sp>
-        <p:nvSpPr>
-          <p:cNvPr id="3" name="Notes Placeholder 2"/>
-          <p:cNvSpPr>
-            <a:spLocks xmlns:a="http://schemas.openxmlformats.org/drawingml/2006/main" noGrp="1"/>
-          </p:cNvSpPr>
-          <p:nvPr>
-            <p:ph type="body" idx="1"/>
-          </p:nvPr>
-        </p:nvSpPr>
-        <p:spPr/>
-        <p:txBody>
-          <a:bodyPr xmlns:a="http://schemas.openxmlformats.org/drawingml/2006/main"/>
-          <a:lstStyle xmlns:a="http://schemas.openxmlformats.org/drawingml/2006/main"/>
-          <a:p xmlns:a="http://schemas.openxmlformats.org/drawingml/2006/main">
-            <a:r>
-              <a:t>[Sources]</a:t>
-            </a:r>
-          </a:p>
-          <a:p xmlns:a="http://schemas.openxmlformats.org/drawingml/2006/main">
-            <a:r>
-              <a:t>Финальные тезисы, раздел «Результаты»; sp_full_experiment_protocol.json: observability_analysis.</a:t>
-            </a:r>
-          </a:p>
-          <a:p xmlns:a="http://schemas.openxmlformats.org/drawingml/2006/main">
-            <a:r>
-              <a:t/>
-            </a:r>
-          </a:p>
-          <a:p xmlns:a="http://schemas.openxmlformats.org/drawingml/2006/main">
-            <a:r>
-              <a:t>Эти показатели — дополнительная диагностика. Основное доказательство — межполевая проверка M1–M3 на предыдущем слайде.</a:t>
-            </a:r>
-          </a:p>
-        </p:txBody>
-      </p:sp>
-      <p:sp>
-        <p:nvSpPr>
-          <p:cNvPr id="4" name="Slide Number Placeholder 3"/>
-          <p:cNvSpPr>
-            <a:spLocks xmlns:a="http://schemas.openxmlformats.org/drawingml/2006/main" noGrp="1"/>
-          </p:cNvSpPr>
-          <p:nvPr>
-            <p:ph type="sldNum" idx="5"/>
-          </p:nvPr>
-        </p:nvSpPr>
-        <p:spPr/>
-        <p:txBody>
-          <a:bodyPr xmlns:a="http://schemas.openxmlformats.org/drawingml/2006/main"/>
-          <a:lstStyle xmlns:a="http://schemas.openxmlformats.org/drawingml/2006/main"/>
-          <a:p xmlns:a="http://schemas.openxmlformats.org/drawingml/2006/main"/>
-        </p:txBody>
-      </p:sp>
-    </p:spTree>
-  </p:cSld>
-  <p:clrMapOvr>
-    <a:masterClrMapping xmlns:a="http://schemas.openxmlformats.org/drawingml/2006/main"/>
-  </p:clrMapOvr>
-</p:notes>
-</file>
-
-<file path=ppt/notesSlides/notesSlide7.xml><?xml version="1.0" encoding="utf-8"?>
-<p:notes xmlns:p="http://schemas.openxmlformats.org/presentationml/2006/main">
-  <p:cSld>
-    <p:spTree>
-      <p:nvGrpSpPr>
-        <p:cNvPr id="1" name=""/>
-        <p:cNvGrpSpPr/>
-        <p:nvPr/>
-      </p:nvGrpSpPr>
-      <p:grpSpPr>
-        <a:xfrm xmlns:a="http://schemas.openxmlformats.org/drawingml/2006/main"/>
-      </p:grpSpPr>
-      <p:sp>
-        <p:nvSpPr>
-          <p:cNvPr id="2" name="Slide Image Placeholder 1"/>
-          <p:cNvSpPr>
-            <a:spLocks xmlns:a="http://schemas.openxmlformats.org/drawingml/2006/main" noGrp="1"/>
-          </p:cNvSpPr>
-          <p:nvPr>
-            <p:ph type="sldImg" idx="0"/>
-          </p:nvPr>
-        </p:nvSpPr>
-        <p:spPr/>
-      </p:sp>
-      <p:sp>
-        <p:nvSpPr>
-          <p:cNvPr id="3" name="Notes Placeholder 2"/>
-          <p:cNvSpPr>
-            <a:spLocks xmlns:a="http://schemas.openxmlformats.org/drawingml/2006/main" noGrp="1"/>
-          </p:cNvSpPr>
-          <p:nvPr>
-            <p:ph type="body" idx="1"/>
-          </p:nvPr>
-        </p:nvSpPr>
-        <p:spPr/>
-        <p:txBody>
-          <a:bodyPr xmlns:a="http://schemas.openxmlformats.org/drawingml/2006/main"/>
-          <a:lstStyle xmlns:a="http://schemas.openxmlformats.org/drawingml/2006/main"/>
-          <a:p xmlns:a="http://schemas.openxmlformats.org/drawingml/2006/main">
-            <a:r>
-              <a:t>[Sources]</a:t>
-            </a:r>
-          </a:p>
-          <a:p xmlns:a="http://schemas.openxmlformats.org/drawingml/2006/main">
-            <a:r>
-              <a:t>Финальные тезисы, заключение.</a:t>
-            </a:r>
-          </a:p>
-          <a:p xmlns:a="http://schemas.openxmlformats.org/drawingml/2006/main">
-            <a:r>
-              <a:t/>
-            </a:r>
-          </a:p>
-          <a:p xmlns:a="http://schemas.openxmlformats.org/drawingml/2006/main">
-            <a:r>
-              <a:t>Закрытие: работа подтверждает необходимую предпосылку дальнейшей реконструкции. Для утверждений об абсолютной влажности и глубине до 1 м потребуются независимые наземные измерения.</a:t>
-            </a:r>
-          </a:p>
-        </p:txBody>
-      </p:sp>
-      <p:sp>
-        <p:nvSpPr>
-          <p:cNvPr id="4" name="Slide Number Placeholder 3"/>
-          <p:cNvSpPr>
-            <a:spLocks xmlns:a="http://schemas.openxmlformats.org/drawingml/2006/main" noGrp="1"/>
-          </p:cNvSpPr>
-          <p:nvPr>
-            <p:ph type="sldNum" idx="5"/>
-          </p:nvPr>
-        </p:nvSpPr>
-        <p:spPr/>
-        <p:txBody>
-          <a:bodyPr xmlns:a="http://schemas.openxmlformats.org/drawingml/2006/main"/>
-          <a:lstStyle xmlns:a="http://schemas.openxmlformats.org/drawingml/2006/main"/>
-          <a:p xmlns:a="http://schemas.openxmlformats.org/drawingml/2006/main"/>
-        </p:txBody>
-      </p:sp>
-    </p:spTree>
-  </p:cSld>
-  <p:clrMapOvr>
-    <a:masterClrMapping xmlns:a="http://schemas.openxmlformats.org/drawingml/2006/main"/>
-  </p:clrMapOvr>
-</p:notes>
 </file>
 
 <file path=ppt/slideLayouts/slideLayout1.xml><?xml version="1.0" encoding="utf-8"?>
@@ -3829,17 +2800,17 @@
   </p:cSld>
   <p:clrMap bg1="lt1" tx1="dk1" bg2="lt2" tx2="dk2" accent1="accent1" accent2="accent2" accent3="accent3" accent4="accent4" accent5="accent5" accent6="accent6" hlink="hlink" folHlink="folHlink"/>
   <p:sldLayoutIdLst>
-    <p:sldLayoutId xmlns:r="http://schemas.openxmlformats.org/officeDocument/2006/relationships" id="2147483649" r:id="Rb08917bc2b6247ff"/>
-    <p:sldLayoutId xmlns:r="http://schemas.openxmlformats.org/officeDocument/2006/relationships" id="2147483650" r:id="Rd3a40784e2ab4924"/>
-    <p:sldLayoutId xmlns:r="http://schemas.openxmlformats.org/officeDocument/2006/relationships" id="2147483651" r:id="R2bd9451f7bc34da0"/>
-    <p:sldLayoutId xmlns:r="http://schemas.openxmlformats.org/officeDocument/2006/relationships" id="2147483652" r:id="Raab8917bdc994737"/>
-    <p:sldLayoutId xmlns:r="http://schemas.openxmlformats.org/officeDocument/2006/relationships" id="2147483653" r:id="R19628a67652f4a70"/>
-    <p:sldLayoutId xmlns:r="http://schemas.openxmlformats.org/officeDocument/2006/relationships" id="2147483654" r:id="R5fb29c39a0394329"/>
-    <p:sldLayoutId xmlns:r="http://schemas.openxmlformats.org/officeDocument/2006/relationships" id="2147483655" r:id="R7f9a803728c141dc"/>
-    <p:sldLayoutId xmlns:r="http://schemas.openxmlformats.org/officeDocument/2006/relationships" id="2147483656" r:id="R03cb0f756a3b43fb"/>
-    <p:sldLayoutId xmlns:r="http://schemas.openxmlformats.org/officeDocument/2006/relationships" id="2147483657" r:id="Rfd828d2078e74fa4"/>
-    <p:sldLayoutId xmlns:r="http://schemas.openxmlformats.org/officeDocument/2006/relationships" id="2147483658" r:id="R1d26bbc4feed4113"/>
-    <p:sldLayoutId xmlns:r="http://schemas.openxmlformats.org/officeDocument/2006/relationships" id="2147483659" r:id="R0baf831540c04365"/>
+    <p:sldLayoutId xmlns:r="http://schemas.openxmlformats.org/officeDocument/2006/relationships" id="2147483649" r:id="R92a92e4a8216471e"/>
+    <p:sldLayoutId xmlns:r="http://schemas.openxmlformats.org/officeDocument/2006/relationships" id="2147483650" r:id="R46564baa42894e30"/>
+    <p:sldLayoutId xmlns:r="http://schemas.openxmlformats.org/officeDocument/2006/relationships" id="2147483651" r:id="R4aad1deb7dc749e7"/>
+    <p:sldLayoutId xmlns:r="http://schemas.openxmlformats.org/officeDocument/2006/relationships" id="2147483652" r:id="R2752acf03ad34143"/>
+    <p:sldLayoutId xmlns:r="http://schemas.openxmlformats.org/officeDocument/2006/relationships" id="2147483653" r:id="Rb3ad5fff84594633"/>
+    <p:sldLayoutId xmlns:r="http://schemas.openxmlformats.org/officeDocument/2006/relationships" id="2147483654" r:id="R6f3e39368a8f4c80"/>
+    <p:sldLayoutId xmlns:r="http://schemas.openxmlformats.org/officeDocument/2006/relationships" id="2147483655" r:id="R3f9099e1c745491b"/>
+    <p:sldLayoutId xmlns:r="http://schemas.openxmlformats.org/officeDocument/2006/relationships" id="2147483656" r:id="Rd316bf3d91cf4d69"/>
+    <p:sldLayoutId xmlns:r="http://schemas.openxmlformats.org/officeDocument/2006/relationships" id="2147483657" r:id="R30975c55006f40e8"/>
+    <p:sldLayoutId xmlns:r="http://schemas.openxmlformats.org/officeDocument/2006/relationships" id="2147483658" r:id="R2c1c24210c944941"/>
+    <p:sldLayoutId xmlns:r="http://schemas.openxmlformats.org/officeDocument/2006/relationships" id="2147483659" r:id="Re38bb36214aa444c"/>
   </p:sldLayoutIdLst>
   <p:txStyles>
     <p:titleStyle>
@@ -4652,7 +3623,7 @@
     <p:bg>
       <p:bgPr>
         <a:blipFill xmlns:a="http://schemas.openxmlformats.org/drawingml/2006/main" rotWithShape="1">
-          <a:blip xmlns:r="http://schemas.openxmlformats.org/officeDocument/2006/relationships" r:embed="R145405c4e2f54f55">
+          <a:blip xmlns:r="http://schemas.openxmlformats.org/officeDocument/2006/relationships" r:embed="Rb8474059286942c6">
             <a:lum/>
           </a:blip>
           <a:srcRect l="0" t="0" r="0" b="0"/>
@@ -5291,7 +4262,7 @@
       </p:sp>
       <p:cxnSp>
         <p:nvCxnSpPr>
-          <p:cNvPr id="39" name="Google Shape;55;p2"/>
+          <p:cNvPr id="65" name="Google Shape;55;p2"/>
           <p:cNvCxnSpPr/>
           <p:nvPr/>
         </p:nvCxnSpPr>
@@ -5369,7 +4340,7 @@
       </p:sp>
       <p:cxnSp>
         <p:nvCxnSpPr>
-          <p:cNvPr id="41" name="Google Shape;57;p2"/>
+          <p:cNvPr id="67" name="Google Shape;57;p2"/>
           <p:cNvCxnSpPr/>
           <p:nvPr/>
         </p:nvCxnSpPr>
@@ -5447,7 +4418,7 @@
       </p:sp>
       <p:cxnSp>
         <p:nvCxnSpPr>
-          <p:cNvPr id="43" name="Google Shape;59;p2"/>
+          <p:cNvPr id="69" name="Google Shape;59;p2"/>
           <p:cNvCxnSpPr/>
           <p:nvPr/>
         </p:nvCxnSpPr>
@@ -5525,7 +4496,7 @@
       </p:sp>
       <p:cxnSp>
         <p:nvCxnSpPr>
-          <p:cNvPr id="45" name="Google Shape;55;p2"/>
+          <p:cNvPr id="71" name="Google Shape;55;p2"/>
           <p:cNvCxnSpPr/>
           <p:nvPr/>
         </p:nvCxnSpPr>
@@ -5603,14 +4574,14 @@
       </p:sp>
       <p:pic>
         <p:nvPicPr>
-          <p:cNvPr id="47" name=""/>
+          <p:cNvPr id="73" name=""/>
           <p:cNvPicPr>
             <a:picLocks xmlns:a="http://schemas.openxmlformats.org/drawingml/2006/main" noChangeAspect="1"/>
           </p:cNvPicPr>
           <p:nvPr/>
         </p:nvPicPr>
         <p:blipFill>
-          <a:blip xmlns:r="http://schemas.openxmlformats.org/officeDocument/2006/relationships" xmlns:a="http://schemas.openxmlformats.org/drawingml/2006/main" r:embed="R72ada32883664b42"/>
+          <a:blip xmlns:r="http://schemas.openxmlformats.org/officeDocument/2006/relationships" xmlns:a="http://schemas.openxmlformats.org/drawingml/2006/main" r:embed="R6cda572b42fc4b70"/>
           <a:stretch xmlns:a="http://schemas.openxmlformats.org/drawingml/2006/main"/>
         </p:blipFill>
         <p:spPr>
@@ -5670,6 +4641,7 @@
           <a:lstStyle xmlns:a="http://schemas.openxmlformats.org/drawingml/2006/main"/>
           <a:p xmlns:a="http://schemas.openxmlformats.org/drawingml/2006/main">
             <a:pPr algn="ctr">
+              <a:buNone/>
               <a:defRPr sz="975" b="1">
                 <a:solidFill>
                   <a:srgbClr val="1856B6"/>
@@ -5687,6 +4659,7 @@
           </a:p>
           <a:p xmlns:a="http://schemas.openxmlformats.org/drawingml/2006/main">
             <a:pPr algn="ctr">
+              <a:buNone/>
               <a:defRPr sz="975" b="1">
                 <a:solidFill>
                   <a:srgbClr val="1856B6"/>
@@ -5749,6 +4722,7 @@
           <a:lstStyle xmlns:a="http://schemas.openxmlformats.org/drawingml/2006/main"/>
           <a:p xmlns:a="http://schemas.openxmlformats.org/drawingml/2006/main">
             <a:pPr algn="ctr">
+              <a:buNone/>
               <a:defRPr sz="975" b="1">
                 <a:solidFill>
                   <a:srgbClr val="1856B6"/>
@@ -5766,6 +4740,7 @@
           </a:p>
           <a:p xmlns:a="http://schemas.openxmlformats.org/drawingml/2006/main">
             <a:pPr algn="ctr">
+              <a:buNone/>
               <a:defRPr sz="975" b="1">
                 <a:solidFill>
                   <a:srgbClr val="1856B6"/>
@@ -5828,6 +4803,7 @@
           <a:lstStyle xmlns:a="http://schemas.openxmlformats.org/drawingml/2006/main"/>
           <a:p xmlns:a="http://schemas.openxmlformats.org/drawingml/2006/main">
             <a:pPr algn="ctr">
+              <a:buNone/>
               <a:defRPr sz="975" b="1">
                 <a:solidFill>
                   <a:srgbClr val="1856B6"/>
@@ -5845,6 +4821,7 @@
           </a:p>
           <a:p xmlns:a="http://schemas.openxmlformats.org/drawingml/2006/main">
             <a:pPr algn="ctr">
+              <a:buNone/>
               <a:defRPr sz="975" b="1">
                 <a:solidFill>
                   <a:srgbClr val="1856B6"/>
@@ -5907,6 +4884,7 @@
           <a:lstStyle xmlns:a="http://schemas.openxmlformats.org/drawingml/2006/main"/>
           <a:p xmlns:a="http://schemas.openxmlformats.org/drawingml/2006/main">
             <a:pPr algn="ctr">
+              <a:buNone/>
               <a:defRPr sz="975" b="1">
                 <a:solidFill>
                   <a:srgbClr val="1856B6"/>
@@ -6268,7 +5246,7 @@
       </p:sp>
       <p:cxnSp>
         <p:nvCxnSpPr>
-          <p:cNvPr id="44" name="Google Shape;422;g14739c8fea3_0_168"/>
+          <p:cNvPr id="58" name="Google Shape;422;g14739c8fea3_0_168"/>
           <p:cNvCxnSpPr/>
           <p:nvPr/>
         </p:nvCxnSpPr>
@@ -6676,6 +5654,7 @@
           <a:lstStyle xmlns:a="http://schemas.openxmlformats.org/drawingml/2006/main"/>
           <a:p xmlns:a="http://schemas.openxmlformats.org/drawingml/2006/main">
             <a:pPr algn="ctr">
+              <a:buNone/>
               <a:defRPr sz="1050" b="1">
                 <a:solidFill>
                   <a:srgbClr val="216FE8"/>
@@ -6693,6 +5672,7 @@
           </a:p>
           <a:p xmlns:a="http://schemas.openxmlformats.org/drawingml/2006/main">
             <a:pPr algn="ctr">
+              <a:buNone/>
               <a:defRPr sz="1050" b="1">
                 <a:solidFill>
                   <a:srgbClr val="216FE8"/>
@@ -6755,6 +5735,7 @@
           <a:lstStyle xmlns:a="http://schemas.openxmlformats.org/drawingml/2006/main"/>
           <a:p xmlns:a="http://schemas.openxmlformats.org/drawingml/2006/main">
             <a:pPr algn="ctr">
+              <a:buNone/>
               <a:defRPr sz="1050" b="1">
                 <a:solidFill>
                   <a:srgbClr val="216FE8"/>
@@ -6772,6 +5753,7 @@
           </a:p>
           <a:p xmlns:a="http://schemas.openxmlformats.org/drawingml/2006/main">
             <a:pPr algn="ctr">
+              <a:buNone/>
               <a:defRPr sz="1050" b="1">
                 <a:solidFill>
                   <a:srgbClr val="216FE8"/>
@@ -6834,6 +5816,7 @@
           <a:lstStyle xmlns:a="http://schemas.openxmlformats.org/drawingml/2006/main"/>
           <a:p xmlns:a="http://schemas.openxmlformats.org/drawingml/2006/main">
             <a:pPr algn="ctr">
+              <a:buNone/>
               <a:defRPr sz="1050" b="1">
                 <a:solidFill>
                   <a:srgbClr val="216FE8"/>
@@ -6851,6 +5834,7 @@
           </a:p>
           <a:p xmlns:a="http://schemas.openxmlformats.org/drawingml/2006/main">
             <a:pPr algn="ctr">
+              <a:buNone/>
               <a:defRPr sz="1050" b="1">
                 <a:solidFill>
                   <a:srgbClr val="216FE8"/>
@@ -6913,6 +5897,7 @@
           <a:lstStyle xmlns:a="http://schemas.openxmlformats.org/drawingml/2006/main"/>
           <a:p xmlns:a="http://schemas.openxmlformats.org/drawingml/2006/main">
             <a:pPr algn="ctr">
+              <a:buNone/>
               <a:defRPr sz="1050" b="1">
                 <a:solidFill>
                   <a:srgbClr val="FFFFFF"/>
@@ -6930,6 +5915,7 @@
           </a:p>
           <a:p xmlns:a="http://schemas.openxmlformats.org/drawingml/2006/main">
             <a:pPr algn="ctr">
+              <a:buNone/>
               <a:defRPr sz="1050" b="1">
                 <a:solidFill>
                   <a:srgbClr val="FFFFFF"/>
@@ -6949,14 +5935,14 @@
       </p:sp>
       <p:pic>
         <p:nvPicPr>
-          <p:cNvPr id="56" name=""/>
+          <p:cNvPr id="70" name=""/>
           <p:cNvPicPr>
             <a:picLocks xmlns:a="http://schemas.openxmlformats.org/drawingml/2006/main" noChangeAspect="1"/>
           </p:cNvPicPr>
           <p:nvPr/>
         </p:nvPicPr>
         <p:blipFill>
-          <a:blip xmlns:r="http://schemas.openxmlformats.org/officeDocument/2006/relationships" xmlns:a="http://schemas.openxmlformats.org/drawingml/2006/main" r:embed="R9340600bb7c14353"/>
+          <a:blip xmlns:r="http://schemas.openxmlformats.org/officeDocument/2006/relationships" xmlns:a="http://schemas.openxmlformats.org/drawingml/2006/main" r:embed="R2a65534f728940df"/>
           <a:stretch xmlns:a="http://schemas.openxmlformats.org/drawingml/2006/main"/>
         </p:blipFill>
         <p:spPr>
@@ -7000,438 +5986,6 @@
       </p:grpSpPr>
       <p:sp>
         <p:nvSpPr>
-          <p:cNvPr id="2" name="Google Shape;82;p10">
-            <a:extLst xmlns:a="http://schemas.openxmlformats.org/drawingml/2006/main">
-              <a:ext uri="{FF2B5EF4-FFF2-40B4-BE49-F238E27FC236}">
-                <a16:creationId xmlns:a16="http://schemas.microsoft.com/office/drawing/2014/main" id="{FB521582-DCFA-CAE4-6F22-DFAFEB064F60}"/>
-              </a:ext>
-            </a:extLst>
-          </p:cNvPr>
-          <p:cNvSpPr>
-            <a:spLocks xmlns:a="http://schemas.openxmlformats.org/drawingml/2006/main" noGrp="1"/>
-          </p:cNvSpPr>
-          <p:nvPr/>
-        </p:nvSpPr>
-        <p:spPr>
-          <a:xfrm xmlns:a="http://schemas.openxmlformats.org/drawingml/2006/main" rot="0" flipH="0" flipV="0">
-            <a:off x="266004" y="3523779"/>
-            <a:ext cx="3687433" cy="860104"/>
-          </a:xfrm>
-          <a:prstGeom xmlns:a="http://schemas.openxmlformats.org/drawingml/2006/main" prst="roundRect">
-            <a:avLst>
-              <a:gd name="adj" fmla="val 10217"/>
-            </a:avLst>
-          </a:prstGeom>
-          <a:solidFill xmlns:a="http://schemas.openxmlformats.org/drawingml/2006/main">
-            <a:schemeClr val="bg1"/>
-          </a:solidFill>
-          <a:ln xmlns:a="http://schemas.openxmlformats.org/drawingml/2006/main">
-            <a:noFill/>
-          </a:ln>
-          <a:effectLst xmlns:a="http://schemas.openxmlformats.org/drawingml/2006/main">
-            <a:outerShdw blurRad="114300" dist="47625" dir="1680000" algn="bl" rotWithShape="0">
-              <a:srgbClr val="000000">
-                <a:alpha val="8630"/>
-              </a:srgbClr>
-            </a:outerShdw>
-          </a:effectLst>
-        </p:spPr>
-        <p:txBody>
-          <a:bodyPr xmlns:a="http://schemas.openxmlformats.org/drawingml/2006/main" spcFirstLastPara="1" wrap="square" lIns="90000" tIns="72000" rIns="72000" bIns="0" anchor="t">
-            <a:noAutofit/>
-          </a:bodyPr>
-          <a:lstStyle xmlns:a="http://schemas.openxmlformats.org/drawingml/2006/main"/>
-          <a:p xmlns:a="http://schemas.openxmlformats.org/drawingml/2006/main">
-            <a:endParaRPr sz="1000">
-              <a:solidFill>
-                <a:srgbClr val="434343"/>
-              </a:solidFill>
-              <a:latin typeface="ALS Sector Regular"/>
-              <a:ea typeface="ALS Sector Regular"/>
-              <a:cs typeface="ALS Sector Regular"/>
-            </a:endParaRPr>
-          </a:p>
-        </p:txBody>
-      </p:sp>
-      <p:sp>
-        <p:nvSpPr>
-          <p:cNvPr id="9" name="TextBox 8">
-            <a:extLst xmlns:a="http://schemas.openxmlformats.org/drawingml/2006/main">
-              <a:ext uri="{FF2B5EF4-FFF2-40B4-BE49-F238E27FC236}">
-                <a16:creationId xmlns:a16="http://schemas.microsoft.com/office/drawing/2014/main" id="{D9EBCDAC-AEE5-88E8-3C3F-9104A87B753F}"/>
-              </a:ext>
-            </a:extLst>
-          </p:cNvPr>
-          <p:cNvSpPr>
-            <a:spLocks xmlns:a="http://schemas.openxmlformats.org/drawingml/2006/main" noGrp="1"/>
-          </p:cNvSpPr>
-          <p:nvPr/>
-        </p:nvSpPr>
-        <p:spPr>
-          <a:xfrm xmlns:a="http://schemas.openxmlformats.org/drawingml/2006/main" rot="0" flipH="0" flipV="0">
-            <a:off x="351884" y="3860235"/>
-            <a:ext cx="3204516" cy="512064"/>
-          </a:xfrm>
-          <a:prstGeom xmlns:a="http://schemas.openxmlformats.org/drawingml/2006/main" prst="rect">
-            <a:avLst/>
-          </a:prstGeom>
-          <a:noFill xmlns:a="http://schemas.openxmlformats.org/drawingml/2006/main"/>
-        </p:spPr>
-        <p:txBody>
-          <a:bodyPr xmlns:a="http://schemas.openxmlformats.org/drawingml/2006/main" wrap="square">
-            <a:spAutoFit/>
-          </a:bodyPr>
-          <a:lstStyle xmlns:a="http://schemas.openxmlformats.org/drawingml/2006/main"/>
-          <a:p xmlns:a="http://schemas.openxmlformats.org/drawingml/2006/main">
-            <a:pPr marL="0" marR="0" lvl="0" indent="0" algn="l">
-              <a:lnSpc>
-                <a:spcPct val="115000"/>
-              </a:lnSpc>
-              <a:spcBef>
-                <a:spcPts val="0"/>
-              </a:spcBef>
-              <a:spcAft>
-                <a:spcPts val="0"/>
-              </a:spcAft>
-              <a:buNone/>
-            </a:pPr>
-            <a:r>
-              <a:rPr sz="1200">
-                <a:solidFill>
-                  <a:srgbClr val="434343"/>
-                </a:solidFill>
-                <a:latin typeface="ALS Sector Regular"/>
-                <a:ea typeface="ALS Sector Regular"/>
-                <a:cs typeface="ALS Sector Regular"/>
-              </a:rPr>
-              <a:t>около 12 суток</a:t>
-            </a:r>
-            <a:endParaRPr sz="1200">
-              <a:solidFill>
-                <a:srgbClr val="434343"/>
-              </a:solidFill>
-              <a:latin typeface="ALS Sector Regular"/>
-              <a:ea typeface="ALS Sector Regular"/>
-              <a:cs typeface="ALS Sector Regular"/>
-            </a:endParaRPr>
-          </a:p>
-          <a:p xmlns:a="http://schemas.openxmlformats.org/drawingml/2006/main">
-            <a:pPr marL="0" marR="0" lvl="0" indent="0" algn="l">
-              <a:lnSpc>
-                <a:spcPct val="115000"/>
-              </a:lnSpc>
-              <a:spcBef>
-                <a:spcPts val="0"/>
-              </a:spcBef>
-              <a:spcAft>
-                <a:spcPts val="0"/>
-              </a:spcAft>
-              <a:buNone/>
-            </a:pPr>
-            <a:r>
-              <a:rPr sz="1200">
-                <a:solidFill>
-                  <a:srgbClr val="434343"/>
-                </a:solidFill>
-                <a:latin typeface="ALS Sector Regular"/>
-                <a:ea typeface="ALS Sector Regular"/>
-                <a:cs typeface="ALS Sector Regular"/>
-              </a:rPr>
-              <a:t>кривая модели сдвигается вправо</a:t>
-            </a:r>
-            <a:endParaRPr sz="1200">
-              <a:solidFill>
-                <a:srgbClr val="434343"/>
-              </a:solidFill>
-              <a:latin typeface="ALS Sector Regular"/>
-              <a:ea typeface="ALS Sector Regular"/>
-              <a:cs typeface="ALS Sector Regular"/>
-            </a:endParaRPr>
-          </a:p>
-        </p:txBody>
-      </p:sp>
-      <p:sp>
-        <p:nvSpPr>
-          <p:cNvPr id="10" name="TextBox 9">
-            <a:extLst xmlns:a="http://schemas.openxmlformats.org/drawingml/2006/main">
-              <a:ext uri="{FF2B5EF4-FFF2-40B4-BE49-F238E27FC236}">
-                <a16:creationId xmlns:a16="http://schemas.microsoft.com/office/drawing/2014/main" id="{3FCD1D0A-919F-69A4-D09F-4C03BBBF09D4}"/>
-              </a:ext>
-            </a:extLst>
-          </p:cNvPr>
-          <p:cNvSpPr>
-            <a:spLocks xmlns:a="http://schemas.openxmlformats.org/drawingml/2006/main" noGrp="1"/>
-          </p:cNvSpPr>
-          <p:nvPr/>
-        </p:nvSpPr>
-        <p:spPr>
-          <a:xfrm xmlns:a="http://schemas.openxmlformats.org/drawingml/2006/main" rot="0" flipH="0" flipV="0">
-            <a:off x="351886" y="3625559"/>
-            <a:ext cx="3204518" cy="336804"/>
-          </a:xfrm>
-          <a:prstGeom xmlns:a="http://schemas.openxmlformats.org/drawingml/2006/main" prst="rect">
-            <a:avLst/>
-          </a:prstGeom>
-          <a:noFill xmlns:a="http://schemas.openxmlformats.org/drawingml/2006/main"/>
-        </p:spPr>
-        <p:txBody>
-          <a:bodyPr xmlns:a="http://schemas.openxmlformats.org/drawingml/2006/main" wrap="square">
-            <a:spAutoFit/>
-          </a:bodyPr>
-          <a:lstStyle xmlns:a="http://schemas.openxmlformats.org/drawingml/2006/main"/>
-          <a:p xmlns:a="http://schemas.openxmlformats.org/drawingml/2006/main">
-            <a:pPr marL="0" marR="0" lvl="0" indent="0" algn="l">
-              <a:lnSpc>
-                <a:spcPct val="115000"/>
-              </a:lnSpc>
-              <a:spcBef>
-                <a:spcPts val="0"/>
-              </a:spcBef>
-              <a:spcAft>
-                <a:spcPts val="0"/>
-              </a:spcAft>
-              <a:buNone/>
-            </a:pPr>
-            <a:r>
-              <a:rPr sz="1400">
-                <a:solidFill>
-                  <a:srgbClr val="176DEA"/>
-                </a:solidFill>
-                <a:latin typeface="ALS Sector Regular"/>
-                <a:ea typeface="ALS Sector Regular"/>
-                <a:cs typeface="ALS Sector Regular"/>
-              </a:rPr>
-              <a:t>Лаг покрытия</a:t>
-            </a:r>
-            <a:endParaRPr sz="1400">
-              <a:solidFill>
-                <a:srgbClr val="176DEA"/>
-              </a:solidFill>
-              <a:latin typeface="ALS Sector Regular"/>
-              <a:ea typeface="ALS Sector Regular"/>
-              <a:cs typeface="ALS Sector Regular"/>
-            </a:endParaRPr>
-          </a:p>
-        </p:txBody>
-      </p:sp>
-      <p:sp>
-        <p:nvSpPr>
-          <p:cNvPr id="13" name="Google Shape;82;p10">
-            <a:extLst xmlns:a="http://schemas.openxmlformats.org/drawingml/2006/main">
-              <a:ext uri="{FF2B5EF4-FFF2-40B4-BE49-F238E27FC236}">
-                <a16:creationId xmlns:a16="http://schemas.microsoft.com/office/drawing/2014/main" id="{E1F50917-96C6-24BC-A19A-3412F2B69413}"/>
-              </a:ext>
-            </a:extLst>
-          </p:cNvPr>
-          <p:cNvSpPr>
-            <a:spLocks xmlns:a="http://schemas.openxmlformats.org/drawingml/2006/main" noGrp="1"/>
-          </p:cNvSpPr>
-          <p:nvPr/>
-        </p:nvSpPr>
-        <p:spPr>
-          <a:xfrm xmlns:a="http://schemas.openxmlformats.org/drawingml/2006/main" rot="0" flipH="0" flipV="0">
-            <a:off x="266004" y="1761395"/>
-            <a:ext cx="5545166" cy="1347283"/>
-          </a:xfrm>
-          <a:prstGeom xmlns:a="http://schemas.openxmlformats.org/drawingml/2006/main" prst="roundRect">
-            <a:avLst>
-              <a:gd name="adj" fmla="val 10217"/>
-            </a:avLst>
-          </a:prstGeom>
-          <a:solidFill xmlns:a="http://schemas.openxmlformats.org/drawingml/2006/main">
-            <a:schemeClr val="bg1"/>
-          </a:solidFill>
-          <a:ln xmlns:a="http://schemas.openxmlformats.org/drawingml/2006/main">
-            <a:noFill/>
-          </a:ln>
-          <a:effectLst xmlns:a="http://schemas.openxmlformats.org/drawingml/2006/main">
-            <a:outerShdw blurRad="114300" dist="47625" dir="1680000" algn="bl" rotWithShape="0">
-              <a:srgbClr val="000000">
-                <a:alpha val="8630"/>
-              </a:srgbClr>
-            </a:outerShdw>
-          </a:effectLst>
-        </p:spPr>
-        <p:txBody>
-          <a:bodyPr xmlns:a="http://schemas.openxmlformats.org/drawingml/2006/main" spcFirstLastPara="1" wrap="square" lIns="90000" tIns="72000" rIns="72000" bIns="0" anchor="t">
-            <a:noAutofit/>
-          </a:bodyPr>
-          <a:lstStyle xmlns:a="http://schemas.openxmlformats.org/drawingml/2006/main"/>
-          <a:p xmlns:a="http://schemas.openxmlformats.org/drawingml/2006/main">
-            <a:endParaRPr sz="1000">
-              <a:solidFill>
-                <a:srgbClr val="434343"/>
-              </a:solidFill>
-              <a:latin typeface="ALS Sector Regular"/>
-              <a:ea typeface="ALS Sector Regular"/>
-              <a:cs typeface="ALS Sector Regular"/>
-            </a:endParaRPr>
-          </a:p>
-        </p:txBody>
-      </p:sp>
-      <p:sp>
-        <p:nvSpPr>
-          <p:cNvPr id="14" name="TextBox 13">
-            <a:extLst xmlns:a="http://schemas.openxmlformats.org/drawingml/2006/main">
-              <a:ext uri="{FF2B5EF4-FFF2-40B4-BE49-F238E27FC236}">
-                <a16:creationId xmlns:a16="http://schemas.microsoft.com/office/drawing/2014/main" id="{DF01C867-0767-124E-9D92-01AFDAA6B47A}"/>
-              </a:ext>
-            </a:extLst>
-          </p:cNvPr>
-          <p:cNvSpPr>
-            <a:spLocks xmlns:a="http://schemas.openxmlformats.org/drawingml/2006/main" noGrp="1"/>
-          </p:cNvSpPr>
-          <p:nvPr/>
-        </p:nvSpPr>
-        <p:spPr>
-          <a:xfrm xmlns:a="http://schemas.openxmlformats.org/drawingml/2006/main" rot="0" flipH="0" flipV="0">
-            <a:off x="395151" y="2288427"/>
-            <a:ext cx="4818956" cy="512064"/>
-          </a:xfrm>
-          <a:prstGeom xmlns:a="http://schemas.openxmlformats.org/drawingml/2006/main" prst="rect">
-            <a:avLst/>
-          </a:prstGeom>
-          <a:noFill xmlns:a="http://schemas.openxmlformats.org/drawingml/2006/main"/>
-        </p:spPr>
-        <p:txBody>
-          <a:bodyPr xmlns:a="http://schemas.openxmlformats.org/drawingml/2006/main" wrap="square">
-            <a:spAutoFit/>
-          </a:bodyPr>
-          <a:lstStyle xmlns:a="http://schemas.openxmlformats.org/drawingml/2006/main"/>
-          <a:p xmlns:a="http://schemas.openxmlformats.org/drawingml/2006/main">
-            <a:pPr marL="0" marR="0" lvl="0" indent="0" algn="l">
-              <a:lnSpc>
-                <a:spcPct val="115000"/>
-              </a:lnSpc>
-              <a:spcBef>
-                <a:spcPts val="0"/>
-              </a:spcBef>
-              <a:spcAft>
-                <a:spcPts val="0"/>
-              </a:spcAft>
-              <a:buNone/>
-            </a:pPr>
-            <a:r>
-              <a:rPr sz="1200">
-                <a:solidFill>
-                  <a:srgbClr val="434343"/>
-                </a:solidFill>
-                <a:latin typeface="ALS Sector Regular"/>
-                <a:ea typeface="ALS Sector Regular"/>
-                <a:cs typeface="ALS Sector Regular"/>
-              </a:rPr>
-              <a:t>r = 0,763</a:t>
-            </a:r>
-            <a:endParaRPr sz="1200">
-              <a:solidFill>
-                <a:srgbClr val="434343"/>
-              </a:solidFill>
-              <a:latin typeface="ALS Sector Regular"/>
-              <a:ea typeface="ALS Sector Regular"/>
-              <a:cs typeface="ALS Sector Regular"/>
-            </a:endParaRPr>
-          </a:p>
-          <a:p xmlns:a="http://schemas.openxmlformats.org/drawingml/2006/main">
-            <a:pPr marL="0" marR="0" lvl="0" indent="0" algn="l">
-              <a:lnSpc>
-                <a:spcPct val="115000"/>
-              </a:lnSpc>
-              <a:spcBef>
-                <a:spcPts val="0"/>
-              </a:spcBef>
-              <a:spcAft>
-                <a:spcPts val="0"/>
-              </a:spcAft>
-              <a:buNone/>
-            </a:pPr>
-            <a:r>
-              <a:rPr sz="1200">
-                <a:solidFill>
-                  <a:srgbClr val="434343"/>
-                </a:solidFill>
-                <a:latin typeface="ALS Sector Regular"/>
-                <a:ea typeface="ALS Sector Regular"/>
-                <a:cs typeface="ALS Sector Regular"/>
-              </a:rPr>
-              <a:t>R² = 0,583</a:t>
-            </a:r>
-            <a:endParaRPr sz="1200">
-              <a:solidFill>
-                <a:srgbClr val="434343"/>
-              </a:solidFill>
-              <a:latin typeface="ALS Sector Regular"/>
-              <a:ea typeface="ALS Sector Regular"/>
-              <a:cs typeface="ALS Sector Regular"/>
-            </a:endParaRPr>
-          </a:p>
-        </p:txBody>
-      </p:sp>
-      <p:sp>
-        <p:nvSpPr>
-          <p:cNvPr id="15" name="TextBox 14">
-            <a:extLst xmlns:a="http://schemas.openxmlformats.org/drawingml/2006/main">
-              <a:ext uri="{FF2B5EF4-FFF2-40B4-BE49-F238E27FC236}">
-                <a16:creationId xmlns:a16="http://schemas.microsoft.com/office/drawing/2014/main" id="{94917517-CF32-E120-A224-5AA3EC749AB7}"/>
-              </a:ext>
-            </a:extLst>
-          </p:cNvPr>
-          <p:cNvSpPr>
-            <a:spLocks xmlns:a="http://schemas.openxmlformats.org/drawingml/2006/main" noGrp="1"/>
-          </p:cNvSpPr>
-          <p:nvPr/>
-        </p:nvSpPr>
-        <p:spPr>
-          <a:xfrm xmlns:a="http://schemas.openxmlformats.org/drawingml/2006/main" rot="0" flipH="0" flipV="0">
-            <a:off x="395153" y="1920826"/>
-            <a:ext cx="4818958" cy="336804"/>
-          </a:xfrm>
-          <a:prstGeom xmlns:a="http://schemas.openxmlformats.org/drawingml/2006/main" prst="rect">
-            <a:avLst/>
-          </a:prstGeom>
-          <a:noFill xmlns:a="http://schemas.openxmlformats.org/drawingml/2006/main"/>
-        </p:spPr>
-        <p:txBody>
-          <a:bodyPr xmlns:a="http://schemas.openxmlformats.org/drawingml/2006/main" wrap="square">
-            <a:spAutoFit/>
-          </a:bodyPr>
-          <a:lstStyle xmlns:a="http://schemas.openxmlformats.org/drawingml/2006/main"/>
-          <a:p xmlns:a="http://schemas.openxmlformats.org/drawingml/2006/main">
-            <a:pPr marL="0" marR="0" lvl="0" indent="0" algn="l">
-              <a:lnSpc>
-                <a:spcPct val="115000"/>
-              </a:lnSpc>
-              <a:spcBef>
-                <a:spcPts val="0"/>
-              </a:spcBef>
-              <a:spcAft>
-                <a:spcPts val="0"/>
-              </a:spcAft>
-              <a:buNone/>
-            </a:pPr>
-            <a:r>
-              <a:rPr sz="1400">
-                <a:solidFill>
-                  <a:srgbClr val="176DEA"/>
-                </a:solidFill>
-                <a:latin typeface="ALS Sector Regular"/>
-                <a:ea typeface="ALS Sector Regular"/>
-                <a:cs typeface="ALS Sector Regular"/>
-              </a:rPr>
-              <a:t>Связь рядов</a:t>
-            </a:r>
-            <a:endParaRPr sz="1400">
-              <a:solidFill>
-                <a:srgbClr val="176DEA"/>
-              </a:solidFill>
-              <a:latin typeface="ALS Sector Regular"/>
-              <a:ea typeface="ALS Sector Regular"/>
-              <a:cs typeface="ALS Sector Regular"/>
-            </a:endParaRPr>
-          </a:p>
-        </p:txBody>
-      </p:sp>
-      <p:sp>
-        <p:nvSpPr>
           <p:cNvPr id="16" name="Google Shape;69;p3">
             <a:extLst xmlns:a="http://schemas.openxmlformats.org/drawingml/2006/main">
               <a:ext uri="{FF2B5EF4-FFF2-40B4-BE49-F238E27FC236}">
@@ -7478,1306 +6032,33 @@
                 <a:ea typeface="ALS Sector Regular"/>
                 <a:cs typeface="ALS Sector Regular"/>
               </a:rPr>
-              <a:t>FCOVER ограничивает модель</a:t>
-            </a:r>
-          </a:p>
-        </p:txBody>
-      </p:sp>
-      <p:sp>
-        <p:nvSpPr>
-          <p:cNvPr id="17" name="Google Shape;69;p3">
-            <a:extLst xmlns:a="http://schemas.openxmlformats.org/drawingml/2006/main">
-              <a:ext uri="{FF2B5EF4-FFF2-40B4-BE49-F238E27FC236}">
-                <a16:creationId xmlns:a16="http://schemas.microsoft.com/office/drawing/2014/main" id="{414298D1-E7A5-E014-FE3A-97C7FFBE5699}"/>
-              </a:ext>
-            </a:extLst>
-          </p:cNvPr>
-          <p:cNvSpPr>
-            <a:spLocks xmlns:a="http://schemas.openxmlformats.org/drawingml/2006/main" noGrp="1"/>
-          </p:cNvSpPr>
+              <a:t>Сезонная динамика FCOVER, воды и влажности</a:t>
+            </a:r>
+          </a:p>
+        </p:txBody>
+      </p:sp>
+      <p:pic>
+        <p:nvPicPr>
+          <p:cNvPr id="19" name=""/>
+          <p:cNvPicPr>
+            <a:picLocks xmlns:a="http://schemas.openxmlformats.org/drawingml/2006/main" noChangeAspect="1"/>
+          </p:cNvPicPr>
           <p:nvPr/>
-        </p:nvSpPr>
+        </p:nvPicPr>
+        <p:blipFill>
+          <a:blip xmlns:r="http://schemas.openxmlformats.org/officeDocument/2006/relationships" xmlns:a="http://schemas.openxmlformats.org/drawingml/2006/main" r:embed="R06bc389c009e48c3"/>
+          <a:stretch xmlns:a="http://schemas.openxmlformats.org/drawingml/2006/main"/>
+        </p:blipFill>
         <p:spPr>
           <a:xfrm xmlns:a="http://schemas.openxmlformats.org/drawingml/2006/main">
-            <a:off x="400474" y="1090940"/>
-            <a:ext cx="4574939" cy="630936"/>
+            <a:off x="2723969" y="1285875"/>
+            <a:ext cx="6744062" cy="5381625"/>
           </a:xfrm>
           <a:prstGeom xmlns:a="http://schemas.openxmlformats.org/drawingml/2006/main" prst="rect">
             <a:avLst/>
           </a:prstGeom>
-          <a:noFill xmlns:a="http://schemas.openxmlformats.org/drawingml/2006/main"/>
-          <a:ln xmlns:a="http://schemas.openxmlformats.org/drawingml/2006/main">
-            <a:noFill/>
-          </a:ln>
-        </p:spPr>
-        <p:txBody>
-          <a:bodyPr xmlns:a="http://schemas.openxmlformats.org/drawingml/2006/main" spcFirstLastPara="1" wrap="square" lIns="0" tIns="0" rIns="0" bIns="0" anchor="t">
-            <a:spAutoFit/>
-          </a:bodyPr>
-          <a:lstStyle xmlns:a="http://schemas.openxmlformats.org/drawingml/2006/main"/>
-          <a:p xmlns:a="http://schemas.openxmlformats.org/drawingml/2006/main">
-            <a:pPr>
-              <a:lnSpc>
-                <a:spcPct val="115000"/>
-              </a:lnSpc>
-              <a:buNone/>
-            </a:pPr>
-            <a:r>
-              <a:rPr spc="300">
-                <a:solidFill>
-                  <a:srgbClr val="176DEA"/>
-                </a:solidFill>
-                <a:latin typeface="ALS Sector Regular"/>
-                <a:ea typeface="ALS Sector Regular"/>
-                <a:cs typeface="ALS Sector Regular"/>
-              </a:rPr>
-              <a:t>Проверка выполнена до Sentinel-1</a:t>
-            </a:r>
-          </a:p>
-        </p:txBody>
-      </p:sp>
-      <p:sp>
-        <p:nvSpPr>
-          <p:cNvPr id="19" name="Google Shape;82;p10">
-            <a:extLst xmlns:a="http://schemas.openxmlformats.org/drawingml/2006/main">
-              <a:ext uri="{FF2B5EF4-FFF2-40B4-BE49-F238E27FC236}">
-                <a16:creationId xmlns:a16="http://schemas.microsoft.com/office/drawing/2014/main" id="{A6B5F328-CF02-2936-7D86-B260ECDC637F}"/>
-              </a:ext>
-            </a:extLst>
-          </p:cNvPr>
-          <p:cNvSpPr>
-            <a:spLocks xmlns:a="http://schemas.openxmlformats.org/drawingml/2006/main" noGrp="1"/>
-          </p:cNvSpPr>
-          <p:nvPr/>
-        </p:nvSpPr>
-        <p:spPr>
-          <a:xfrm xmlns:a="http://schemas.openxmlformats.org/drawingml/2006/main" rot="0" flipH="0" flipV="0">
-            <a:off x="266004" y="4798984"/>
-            <a:ext cx="2622671" cy="1347283"/>
-          </a:xfrm>
-          <a:prstGeom xmlns:a="http://schemas.openxmlformats.org/drawingml/2006/main" prst="roundRect">
-            <a:avLst>
-              <a:gd name="adj" fmla="val 10217"/>
-            </a:avLst>
-          </a:prstGeom>
-          <a:solidFill xmlns:a="http://schemas.openxmlformats.org/drawingml/2006/main">
-            <a:schemeClr val="bg1"/>
-          </a:solidFill>
-          <a:ln xmlns:a="http://schemas.openxmlformats.org/drawingml/2006/main">
-            <a:noFill/>
-          </a:ln>
-          <a:effectLst xmlns:a="http://schemas.openxmlformats.org/drawingml/2006/main">
-            <a:outerShdw blurRad="114300" dist="47625" dir="1680000" algn="bl" rotWithShape="0">
-              <a:srgbClr val="000000">
-                <a:alpha val="8630"/>
-              </a:srgbClr>
-            </a:outerShdw>
-          </a:effectLst>
-        </p:spPr>
-        <p:txBody>
-          <a:bodyPr xmlns:a="http://schemas.openxmlformats.org/drawingml/2006/main" spcFirstLastPara="1" wrap="square" lIns="90000" tIns="72000" rIns="72000" bIns="0" anchor="t">
-            <a:noAutofit/>
-          </a:bodyPr>
-          <a:lstStyle xmlns:a="http://schemas.openxmlformats.org/drawingml/2006/main"/>
-          <a:p xmlns:a="http://schemas.openxmlformats.org/drawingml/2006/main">
-            <a:endParaRPr sz="1000">
-              <a:solidFill>
-                <a:srgbClr val="434343"/>
-              </a:solidFill>
-              <a:latin typeface="ALS Sector Regular"/>
-              <a:ea typeface="ALS Sector Regular"/>
-              <a:cs typeface="ALS Sector Regular"/>
-            </a:endParaRPr>
-          </a:p>
-        </p:txBody>
-      </p:sp>
-      <p:sp>
-        <p:nvSpPr>
-          <p:cNvPr id="20" name="TextBox 19">
-            <a:extLst xmlns:a="http://schemas.openxmlformats.org/drawingml/2006/main">
-              <a:ext uri="{FF2B5EF4-FFF2-40B4-BE49-F238E27FC236}">
-                <a16:creationId xmlns:a16="http://schemas.microsoft.com/office/drawing/2014/main" id="{A47D4EC6-6D53-91D3-D06A-DE2240366530}"/>
-              </a:ext>
-            </a:extLst>
-          </p:cNvPr>
-          <p:cNvSpPr>
-            <a:spLocks xmlns:a="http://schemas.openxmlformats.org/drawingml/2006/main" noGrp="1"/>
-          </p:cNvSpPr>
-          <p:nvPr/>
-        </p:nvSpPr>
-        <p:spPr>
-          <a:xfrm xmlns:a="http://schemas.openxmlformats.org/drawingml/2006/main" rot="0" flipH="0" flipV="0">
-            <a:off x="327086" y="5326016"/>
-            <a:ext cx="2279199" cy="722376"/>
-          </a:xfrm>
-          <a:prstGeom xmlns:a="http://schemas.openxmlformats.org/drawingml/2006/main" prst="rect">
-            <a:avLst/>
-          </a:prstGeom>
-          <a:noFill xmlns:a="http://schemas.openxmlformats.org/drawingml/2006/main"/>
-        </p:spPr>
-        <p:txBody>
-          <a:bodyPr xmlns:a="http://schemas.openxmlformats.org/drawingml/2006/main" wrap="square">
-            <a:spAutoFit/>
-          </a:bodyPr>
-          <a:lstStyle xmlns:a="http://schemas.openxmlformats.org/drawingml/2006/main"/>
-          <a:p xmlns:a="http://schemas.openxmlformats.org/drawingml/2006/main">
-            <a:pPr marL="0" marR="0" lvl="0" indent="0" algn="l">
-              <a:lnSpc>
-                <a:spcPct val="115000"/>
-              </a:lnSpc>
-              <a:spcBef>
-                <a:spcPts val="0"/>
-              </a:spcBef>
-              <a:spcAft>
-                <a:spcPts val="0"/>
-              </a:spcAft>
-              <a:buNone/>
-            </a:pPr>
-            <a:r>
-              <a:rPr sz="1200">
-                <a:solidFill>
-                  <a:srgbClr val="434343"/>
-                </a:solidFill>
-                <a:latin typeface="ALS Sector Regular"/>
-                <a:ea typeface="ALS Sector Regular"/>
-                <a:cs typeface="ALS Sector Regular"/>
-              </a:rPr>
-              <a:t>Sentinel-2 фиксирует сезонную</a:t>
-            </a:r>
-            <a:endParaRPr sz="1200">
-              <a:solidFill>
-                <a:srgbClr val="434343"/>
-              </a:solidFill>
-              <a:latin typeface="ALS Sector Regular"/>
-              <a:ea typeface="ALS Sector Regular"/>
-              <a:cs typeface="ALS Sector Regular"/>
-            </a:endParaRPr>
-          </a:p>
-          <a:p xmlns:a="http://schemas.openxmlformats.org/drawingml/2006/main">
-            <a:pPr marL="0" marR="0" lvl="0" indent="0" algn="l">
-              <a:lnSpc>
-                <a:spcPct val="115000"/>
-              </a:lnSpc>
-              <a:spcBef>
-                <a:spcPts val="0"/>
-              </a:spcBef>
-              <a:spcAft>
-                <a:spcPts val="0"/>
-              </a:spcAft>
-              <a:buNone/>
-            </a:pPr>
-            <a:r>
-              <a:rPr sz="1200">
-                <a:solidFill>
-                  <a:srgbClr val="434343"/>
-                </a:solidFill>
-                <a:latin typeface="ALS Sector Regular"/>
-                <a:ea typeface="ALS Sector Regular"/>
-                <a:cs typeface="ALS Sector Regular"/>
-              </a:rPr>
-              <a:t>динамику растительности</a:t>
-            </a:r>
-            <a:endParaRPr sz="1200">
-              <a:solidFill>
-                <a:srgbClr val="434343"/>
-              </a:solidFill>
-              <a:latin typeface="ALS Sector Regular"/>
-              <a:ea typeface="ALS Sector Regular"/>
-              <a:cs typeface="ALS Sector Regular"/>
-            </a:endParaRPr>
-          </a:p>
-        </p:txBody>
-      </p:sp>
-      <p:sp>
-        <p:nvSpPr>
-          <p:cNvPr id="21" name="TextBox 20">
-            <a:extLst xmlns:a="http://schemas.openxmlformats.org/drawingml/2006/main">
-              <a:ext uri="{FF2B5EF4-FFF2-40B4-BE49-F238E27FC236}">
-                <a16:creationId xmlns:a16="http://schemas.microsoft.com/office/drawing/2014/main" id="{55131FA9-F518-6555-5B9A-165408B1B01E}"/>
-              </a:ext>
-            </a:extLst>
-          </p:cNvPr>
-          <p:cNvSpPr>
-            <a:spLocks xmlns:a="http://schemas.openxmlformats.org/drawingml/2006/main" noGrp="1"/>
-          </p:cNvSpPr>
-          <p:nvPr/>
-        </p:nvSpPr>
-        <p:spPr>
-          <a:xfrm xmlns:a="http://schemas.openxmlformats.org/drawingml/2006/main" rot="0" flipH="0" flipV="0">
-            <a:off x="327087" y="4958415"/>
-            <a:ext cx="2279200" cy="336804"/>
-          </a:xfrm>
-          <a:prstGeom xmlns:a="http://schemas.openxmlformats.org/drawingml/2006/main" prst="rect">
-            <a:avLst/>
-          </a:prstGeom>
-          <a:noFill xmlns:a="http://schemas.openxmlformats.org/drawingml/2006/main"/>
-        </p:spPr>
-        <p:txBody>
-          <a:bodyPr xmlns:a="http://schemas.openxmlformats.org/drawingml/2006/main" wrap="square">
-            <a:spAutoFit/>
-          </a:bodyPr>
-          <a:lstStyle xmlns:a="http://schemas.openxmlformats.org/drawingml/2006/main"/>
-          <a:p xmlns:a="http://schemas.openxmlformats.org/drawingml/2006/main">
-            <a:pPr marL="0" marR="0" lvl="0" indent="0" algn="l">
-              <a:lnSpc>
-                <a:spcPct val="115000"/>
-              </a:lnSpc>
-              <a:spcBef>
-                <a:spcPts val="0"/>
-              </a:spcBef>
-              <a:spcAft>
-                <a:spcPts val="0"/>
-              </a:spcAft>
-              <a:buNone/>
-            </a:pPr>
-            <a:r>
-              <a:rPr sz="1400">
-                <a:solidFill>
-                  <a:srgbClr val="176DEA"/>
-                </a:solidFill>
-                <a:latin typeface="ALS Sector Regular"/>
-                <a:ea typeface="ALS Sector Regular"/>
-                <a:cs typeface="ALS Sector Regular"/>
-              </a:rPr>
-              <a:t>Смысл</a:t>
-            </a:r>
-            <a:endParaRPr sz="1400">
-              <a:solidFill>
-                <a:srgbClr val="176DEA"/>
-              </a:solidFill>
-              <a:latin typeface="ALS Sector Regular"/>
-              <a:ea typeface="ALS Sector Regular"/>
-              <a:cs typeface="ALS Sector Regular"/>
-            </a:endParaRPr>
-          </a:p>
-        </p:txBody>
-      </p:sp>
-      <p:sp>
-        <p:nvSpPr>
-          <p:cNvPr id="31" name="Google Shape;82;p10">
-            <a:extLst xmlns:a="http://schemas.openxmlformats.org/drawingml/2006/main">
-              <a:ext uri="{FF2B5EF4-FFF2-40B4-BE49-F238E27FC236}">
-                <a16:creationId xmlns:a16="http://schemas.microsoft.com/office/drawing/2014/main" id="{7C0C7529-75C9-F2DD-4D2F-A85B9CB619C6}"/>
-              </a:ext>
-            </a:extLst>
-          </p:cNvPr>
-          <p:cNvSpPr>
-            <a:spLocks xmlns:a="http://schemas.openxmlformats.org/drawingml/2006/main" noGrp="1"/>
-          </p:cNvSpPr>
-          <p:nvPr/>
-        </p:nvSpPr>
-        <p:spPr>
-          <a:xfrm xmlns:a="http://schemas.openxmlformats.org/drawingml/2006/main" rot="0" flipH="0" flipV="0">
-            <a:off x="6048600" y="1763590"/>
-            <a:ext cx="5545166" cy="1347283"/>
-          </a:xfrm>
-          <a:prstGeom xmlns:a="http://schemas.openxmlformats.org/drawingml/2006/main" prst="roundRect">
-            <a:avLst>
-              <a:gd name="adj" fmla="val 10217"/>
-            </a:avLst>
-          </a:prstGeom>
-          <a:solidFill xmlns:a="http://schemas.openxmlformats.org/drawingml/2006/main">
-            <a:schemeClr val="bg1"/>
-          </a:solidFill>
-          <a:ln xmlns:a="http://schemas.openxmlformats.org/drawingml/2006/main">
-            <a:noFill/>
-          </a:ln>
-          <a:effectLst xmlns:a="http://schemas.openxmlformats.org/drawingml/2006/main">
-            <a:outerShdw blurRad="114300" dist="47625" dir="1680000" algn="bl" rotWithShape="0">
-              <a:srgbClr val="000000">
-                <a:alpha val="8630"/>
-              </a:srgbClr>
-            </a:outerShdw>
-          </a:effectLst>
-        </p:spPr>
-        <p:txBody>
-          <a:bodyPr xmlns:a="http://schemas.openxmlformats.org/drawingml/2006/main" spcFirstLastPara="1" wrap="square" lIns="90000" tIns="72000" rIns="72000" bIns="0" anchor="t">
-            <a:noAutofit/>
-          </a:bodyPr>
-          <a:lstStyle xmlns:a="http://schemas.openxmlformats.org/drawingml/2006/main"/>
-          <a:p xmlns:a="http://schemas.openxmlformats.org/drawingml/2006/main">
-            <a:endParaRPr sz="1000">
-              <a:solidFill>
-                <a:srgbClr val="434343"/>
-              </a:solidFill>
-              <a:latin typeface="ALS Sector Regular"/>
-              <a:ea typeface="ALS Sector Regular"/>
-              <a:cs typeface="ALS Sector Regular"/>
-            </a:endParaRPr>
-          </a:p>
-        </p:txBody>
-      </p:sp>
-      <p:sp>
-        <p:nvSpPr>
-          <p:cNvPr id="32" name="TextBox 31">
-            <a:extLst xmlns:a="http://schemas.openxmlformats.org/drawingml/2006/main">
-              <a:ext uri="{FF2B5EF4-FFF2-40B4-BE49-F238E27FC236}">
-                <a16:creationId xmlns:a16="http://schemas.microsoft.com/office/drawing/2014/main" id="{04601E31-CA91-B1F4-B822-15A808E98B79}"/>
-              </a:ext>
-            </a:extLst>
-          </p:cNvPr>
-          <p:cNvSpPr>
-            <a:spLocks xmlns:a="http://schemas.openxmlformats.org/drawingml/2006/main" noGrp="1"/>
-          </p:cNvSpPr>
-          <p:nvPr/>
-        </p:nvSpPr>
-        <p:spPr>
-          <a:xfrm xmlns:a="http://schemas.openxmlformats.org/drawingml/2006/main" rot="0" flipH="0" flipV="0">
-            <a:off x="6177747" y="2290622"/>
-            <a:ext cx="4818956" cy="512064"/>
-          </a:xfrm>
-          <a:prstGeom xmlns:a="http://schemas.openxmlformats.org/drawingml/2006/main" prst="rect">
-            <a:avLst/>
-          </a:prstGeom>
-          <a:noFill xmlns:a="http://schemas.openxmlformats.org/drawingml/2006/main"/>
-        </p:spPr>
-        <p:txBody>
-          <a:bodyPr xmlns:a="http://schemas.openxmlformats.org/drawingml/2006/main" wrap="square">
-            <a:spAutoFit/>
-          </a:bodyPr>
-          <a:lstStyle xmlns:a="http://schemas.openxmlformats.org/drawingml/2006/main"/>
-          <a:p xmlns:a="http://schemas.openxmlformats.org/drawingml/2006/main">
-            <a:pPr marL="0" marR="0" lvl="0" indent="0" algn="l">
-              <a:lnSpc>
-                <a:spcPct val="115000"/>
-              </a:lnSpc>
-              <a:spcBef>
-                <a:spcPts val="0"/>
-              </a:spcBef>
-              <a:spcAft>
-                <a:spcPts val="0"/>
-              </a:spcAft>
-              <a:buNone/>
-            </a:pPr>
-            <a:r>
-              <a:rPr sz="1200">
-                <a:solidFill>
-                  <a:srgbClr val="434343"/>
-                </a:solidFill>
-                <a:latin typeface="ALS Sector Regular"/>
-                <a:ea typeface="ALS Sector Regular"/>
-                <a:cs typeface="ALS Sector Regular"/>
-              </a:rPr>
-              <a:t>медиана r = 0,944</a:t>
-            </a:r>
-            <a:endParaRPr sz="1200">
-              <a:solidFill>
-                <a:srgbClr val="434343"/>
-              </a:solidFill>
-              <a:latin typeface="ALS Sector Regular"/>
-              <a:ea typeface="ALS Sector Regular"/>
-              <a:cs typeface="ALS Sector Regular"/>
-            </a:endParaRPr>
-          </a:p>
-          <a:p xmlns:a="http://schemas.openxmlformats.org/drawingml/2006/main">
-            <a:pPr marL="0" marR="0" lvl="0" indent="0" algn="l">
-              <a:lnSpc>
-                <a:spcPct val="115000"/>
-              </a:lnSpc>
-              <a:spcBef>
-                <a:spcPts val="0"/>
-              </a:spcBef>
-              <a:spcAft>
-                <a:spcPts val="0"/>
-              </a:spcAft>
-              <a:buNone/>
-            </a:pPr>
-            <a:r>
-              <a:rPr sz="1200">
-                <a:solidFill>
-                  <a:srgbClr val="434343"/>
-                </a:solidFill>
-                <a:latin typeface="ALS Sector Regular"/>
-                <a:ea typeface="ALS Sector Regular"/>
-                <a:cs typeface="ALS Sector Regular"/>
-              </a:rPr>
-              <a:t>34 из 36 связей положительные</a:t>
-            </a:r>
-            <a:endParaRPr sz="1200">
-              <a:solidFill>
-                <a:srgbClr val="434343"/>
-              </a:solidFill>
-              <a:latin typeface="ALS Sector Regular"/>
-              <a:ea typeface="ALS Sector Regular"/>
-              <a:cs typeface="ALS Sector Regular"/>
-            </a:endParaRPr>
-          </a:p>
-        </p:txBody>
-      </p:sp>
-      <p:sp>
-        <p:nvSpPr>
-          <p:cNvPr id="33" name="TextBox 32">
-            <a:extLst xmlns:a="http://schemas.openxmlformats.org/drawingml/2006/main">
-              <a:ext uri="{FF2B5EF4-FFF2-40B4-BE49-F238E27FC236}">
-                <a16:creationId xmlns:a16="http://schemas.microsoft.com/office/drawing/2014/main" id="{FEACFE02-6694-E808-2485-7D37CCF221BA}"/>
-              </a:ext>
-            </a:extLst>
-          </p:cNvPr>
-          <p:cNvSpPr>
-            <a:spLocks xmlns:a="http://schemas.openxmlformats.org/drawingml/2006/main" noGrp="1"/>
-          </p:cNvSpPr>
-          <p:nvPr/>
-        </p:nvSpPr>
-        <p:spPr>
-          <a:xfrm xmlns:a="http://schemas.openxmlformats.org/drawingml/2006/main" rot="0" flipH="0" flipV="0">
-            <a:off x="6177749" y="1923021"/>
-            <a:ext cx="4818958" cy="336804"/>
-          </a:xfrm>
-          <a:prstGeom xmlns:a="http://schemas.openxmlformats.org/drawingml/2006/main" prst="rect">
-            <a:avLst/>
-          </a:prstGeom>
-          <a:noFill xmlns:a="http://schemas.openxmlformats.org/drawingml/2006/main"/>
-        </p:spPr>
-        <p:txBody>
-          <a:bodyPr xmlns:a="http://schemas.openxmlformats.org/drawingml/2006/main" wrap="square">
-            <a:spAutoFit/>
-          </a:bodyPr>
-          <a:lstStyle xmlns:a="http://schemas.openxmlformats.org/drawingml/2006/main"/>
-          <a:p xmlns:a="http://schemas.openxmlformats.org/drawingml/2006/main">
-            <a:pPr marL="0" marR="0" lvl="0" indent="0" algn="l">
-              <a:lnSpc>
-                <a:spcPct val="115000"/>
-              </a:lnSpc>
-              <a:spcBef>
-                <a:spcPts val="0"/>
-              </a:spcBef>
-              <a:spcAft>
-                <a:spcPts val="0"/>
-              </a:spcAft>
-              <a:buNone/>
-            </a:pPr>
-            <a:r>
-              <a:rPr sz="1400">
-                <a:solidFill>
-                  <a:srgbClr val="176DEA"/>
-                </a:solidFill>
-                <a:latin typeface="ALS Sector Regular"/>
-                <a:ea typeface="ALS Sector Regular"/>
-                <a:cs typeface="ALS Sector Regular"/>
-              </a:rPr>
-              <a:t>Внутри полей</a:t>
-            </a:r>
-            <a:endParaRPr sz="1400">
-              <a:solidFill>
-                <a:srgbClr val="176DEA"/>
-              </a:solidFill>
-              <a:latin typeface="ALS Sector Regular"/>
-              <a:ea typeface="ALS Sector Regular"/>
-              <a:cs typeface="ALS Sector Regular"/>
-            </a:endParaRPr>
-          </a:p>
-        </p:txBody>
-      </p:sp>
-      <p:sp>
-        <p:nvSpPr>
-          <p:cNvPr id="38" name="Овал 37">
-            <a:extLst xmlns:a="http://schemas.openxmlformats.org/drawingml/2006/main">
-              <a:ext uri="{FF2B5EF4-FFF2-40B4-BE49-F238E27FC236}">
-                <a16:creationId xmlns:a16="http://schemas.microsoft.com/office/drawing/2014/main" id="{561F09B3-AAD6-8997-CB73-AF9BB0BDEB5F}"/>
-              </a:ext>
-            </a:extLst>
-          </p:cNvPr>
-          <p:cNvSpPr>
-            <a:spLocks xmlns:a="http://schemas.openxmlformats.org/drawingml/2006/main" noGrp="1"/>
-          </p:cNvSpPr>
-          <p:nvPr/>
-        </p:nvSpPr>
-        <p:spPr>
-          <a:xfrm xmlns:a="http://schemas.openxmlformats.org/drawingml/2006/main" rot="0" flipH="0" flipV="0">
-            <a:off x="11221767" y="1626180"/>
-            <a:ext cx="721269" cy="721269"/>
-          </a:xfrm>
-          <a:prstGeom xmlns:a="http://schemas.openxmlformats.org/drawingml/2006/main" prst="ellipse">
-            <a:avLst/>
-          </a:prstGeom>
-          <a:solidFill xmlns:a="http://schemas.openxmlformats.org/drawingml/2006/main">
-            <a:srgbClr val="D4E5FE"/>
-          </a:solidFill>
-          <a:ln xmlns:a="http://schemas.openxmlformats.org/drawingml/2006/main" w="22225">
-            <a:solidFill>
-              <a:schemeClr val="bg1"/>
-            </a:solidFill>
-          </a:ln>
-        </p:spPr>
-        <p:style>
-          <a:lnRef xmlns:a="http://schemas.openxmlformats.org/drawingml/2006/main" idx="2">
-            <a:schemeClr val="accent1">
-              <a:shade val="50000"/>
-            </a:schemeClr>
-          </a:lnRef>
-          <a:fillRef xmlns:a="http://schemas.openxmlformats.org/drawingml/2006/main" idx="1">
-            <a:schemeClr val="accent1"/>
-          </a:fillRef>
-          <a:effectRef xmlns:a="http://schemas.openxmlformats.org/drawingml/2006/main" idx="0">
-            <a:schemeClr val="accent1"/>
-          </a:effectRef>
-          <a:fontRef xmlns:a="http://schemas.openxmlformats.org/drawingml/2006/main" idx="minor">
-            <a:schemeClr val="lt1"/>
-          </a:fontRef>
-        </p:style>
-        <p:txBody>
-          <a:bodyPr xmlns:a="http://schemas.openxmlformats.org/drawingml/2006/main" anchor="ctr"/>
-          <a:lstStyle xmlns:a="http://schemas.openxmlformats.org/drawingml/2006/main"/>
-          <a:p xmlns:a="http://schemas.openxmlformats.org/drawingml/2006/main">
-            <a:pPr algn="ctr">
-              <a:buNone/>
-            </a:pPr>
-            <a:endParaRPr/>
-          </a:p>
-        </p:txBody>
-      </p:sp>
-      <p:sp>
-        <p:nvSpPr>
-          <p:cNvPr id="39" name="TextBox 38">
-            <a:extLst xmlns:a="http://schemas.openxmlformats.org/drawingml/2006/main">
-              <a:ext uri="{FF2B5EF4-FFF2-40B4-BE49-F238E27FC236}">
-                <a16:creationId xmlns:a16="http://schemas.microsoft.com/office/drawing/2014/main" id="{224F52B9-E99A-FBC1-5C78-DEEBF4C0732D}"/>
-              </a:ext>
-            </a:extLst>
-          </p:cNvPr>
-          <p:cNvSpPr>
-            <a:spLocks xmlns:a="http://schemas.openxmlformats.org/drawingml/2006/main" noGrp="1"/>
-          </p:cNvSpPr>
-          <p:nvPr/>
-        </p:nvSpPr>
-        <p:spPr>
-          <a:xfrm xmlns:a="http://schemas.openxmlformats.org/drawingml/2006/main" rot="0" flipH="0" flipV="0">
-            <a:off x="11134599" y="1880731"/>
-            <a:ext cx="895608" cy="214122"/>
-          </a:xfrm>
-          <a:prstGeom xmlns:a="http://schemas.openxmlformats.org/drawingml/2006/main" prst="rect">
-            <a:avLst/>
-          </a:prstGeom>
-          <a:noFill xmlns:a="http://schemas.openxmlformats.org/drawingml/2006/main"/>
-        </p:spPr>
-        <p:txBody>
-          <a:bodyPr xmlns:a="http://schemas.openxmlformats.org/drawingml/2006/main" wrap="square">
-            <a:spAutoFit/>
-          </a:bodyPr>
-          <a:lstStyle xmlns:a="http://schemas.openxmlformats.org/drawingml/2006/main"/>
-          <a:p xmlns:a="http://schemas.openxmlformats.org/drawingml/2006/main">
-            <a:pPr marL="0" marR="0" lvl="0" indent="0" algn="ctr">
-              <a:lnSpc>
-                <a:spcPct val="115000"/>
-              </a:lnSpc>
-              <a:spcBef>
-                <a:spcPts val="0"/>
-              </a:spcBef>
-              <a:spcAft>
-                <a:spcPts val="0"/>
-              </a:spcAft>
-              <a:buNone/>
-            </a:pPr>
-            <a:r>
-              <a:rPr sz="700">
-                <a:solidFill>
-                  <a:schemeClr val="tx2">
-                    <a:lumMod val="10000"/>
-                  </a:schemeClr>
-                </a:solidFill>
-                <a:latin typeface="ALS Sector Regular"/>
-                <a:ea typeface="ALS Sector Regular"/>
-                <a:cs typeface="ALS Sector Regular"/>
-              </a:rPr>
-              <a:t>r</a:t>
-            </a:r>
-            <a:endParaRPr sz="1000">
-              <a:solidFill>
-                <a:schemeClr val="tx2">
-                  <a:lumMod val="10000"/>
-                </a:schemeClr>
-              </a:solidFill>
-              <a:latin typeface="ALS Sector Regular"/>
-              <a:ea typeface="ALS Sector Regular"/>
-              <a:cs typeface="ALS Sector Regular"/>
-            </a:endParaRPr>
-          </a:p>
-        </p:txBody>
-      </p:sp>
-      <p:sp>
-        <p:nvSpPr>
-          <p:cNvPr id="35" name="Google Shape;82;p10">
-            <a:extLst xmlns:a="http://schemas.openxmlformats.org/drawingml/2006/main">
-              <a:ext uri="{FF2B5EF4-FFF2-40B4-BE49-F238E27FC236}">
-                <a16:creationId xmlns:a16="http://schemas.microsoft.com/office/drawing/2014/main" id="{6384B63C-C4AD-051E-C8B0-517C4DEE6C21}"/>
-              </a:ext>
-            </a:extLst>
-          </p:cNvPr>
-          <p:cNvSpPr>
-            <a:spLocks xmlns:a="http://schemas.openxmlformats.org/drawingml/2006/main" noGrp="1"/>
-          </p:cNvSpPr>
-          <p:nvPr/>
-        </p:nvSpPr>
-        <p:spPr>
-          <a:xfrm xmlns:a="http://schemas.openxmlformats.org/drawingml/2006/main" rot="0" flipH="0" flipV="0">
-            <a:off x="6048600" y="4798984"/>
-            <a:ext cx="2622671" cy="1347283"/>
-          </a:xfrm>
-          <a:prstGeom xmlns:a="http://schemas.openxmlformats.org/drawingml/2006/main" prst="roundRect">
-            <a:avLst>
-              <a:gd name="adj" fmla="val 10217"/>
-            </a:avLst>
-          </a:prstGeom>
-          <a:solidFill xmlns:a="http://schemas.openxmlformats.org/drawingml/2006/main">
-            <a:schemeClr val="bg1"/>
-          </a:solidFill>
-          <a:ln xmlns:a="http://schemas.openxmlformats.org/drawingml/2006/main">
-            <a:noFill/>
-          </a:ln>
-          <a:effectLst xmlns:a="http://schemas.openxmlformats.org/drawingml/2006/main">
-            <a:outerShdw blurRad="114300" dist="47625" dir="1680000" algn="bl" rotWithShape="0">
-              <a:srgbClr val="000000">
-                <a:alpha val="8630"/>
-              </a:srgbClr>
-            </a:outerShdw>
-          </a:effectLst>
-        </p:spPr>
-        <p:txBody>
-          <a:bodyPr xmlns:a="http://schemas.openxmlformats.org/drawingml/2006/main" spcFirstLastPara="1" wrap="square" lIns="90000" tIns="72000" rIns="72000" bIns="0" anchor="t">
-            <a:noAutofit/>
-          </a:bodyPr>
-          <a:lstStyle xmlns:a="http://schemas.openxmlformats.org/drawingml/2006/main"/>
-          <a:p xmlns:a="http://schemas.openxmlformats.org/drawingml/2006/main">
-            <a:endParaRPr sz="1000">
-              <a:solidFill>
-                <a:srgbClr val="434343"/>
-              </a:solidFill>
-              <a:latin typeface="ALS Sector Regular"/>
-              <a:ea typeface="ALS Sector Regular"/>
-              <a:cs typeface="ALS Sector Regular"/>
-            </a:endParaRPr>
-          </a:p>
-        </p:txBody>
-      </p:sp>
-      <p:sp>
-        <p:nvSpPr>
-          <p:cNvPr id="36" name="TextBox 35">
-            <a:extLst xmlns:a="http://schemas.openxmlformats.org/drawingml/2006/main">
-              <a:ext uri="{FF2B5EF4-FFF2-40B4-BE49-F238E27FC236}">
-                <a16:creationId xmlns:a16="http://schemas.microsoft.com/office/drawing/2014/main" id="{8D94D19C-F693-5F18-37E7-C30063D758B0}"/>
-              </a:ext>
-            </a:extLst>
-          </p:cNvPr>
-          <p:cNvSpPr>
-            <a:spLocks xmlns:a="http://schemas.openxmlformats.org/drawingml/2006/main" noGrp="1"/>
-          </p:cNvSpPr>
-          <p:nvPr/>
-        </p:nvSpPr>
-        <p:spPr>
-          <a:xfrm xmlns:a="http://schemas.openxmlformats.org/drawingml/2006/main" rot="0" flipH="0" flipV="0">
-            <a:off x="6109682" y="5326016"/>
-            <a:ext cx="2279199" cy="512064"/>
-          </a:xfrm>
-          <a:prstGeom xmlns:a="http://schemas.openxmlformats.org/drawingml/2006/main" prst="rect">
-            <a:avLst/>
-          </a:prstGeom>
-          <a:noFill xmlns:a="http://schemas.openxmlformats.org/drawingml/2006/main"/>
-        </p:spPr>
-        <p:txBody>
-          <a:bodyPr xmlns:a="http://schemas.openxmlformats.org/drawingml/2006/main" wrap="square">
-            <a:spAutoFit/>
-          </a:bodyPr>
-          <a:lstStyle xmlns:a="http://schemas.openxmlformats.org/drawingml/2006/main"/>
-          <a:p xmlns:a="http://schemas.openxmlformats.org/drawingml/2006/main">
-            <a:pPr marL="0" marR="0" lvl="0" indent="0" algn="l">
-              <a:lnSpc>
-                <a:spcPct val="115000"/>
-              </a:lnSpc>
-              <a:spcBef>
-                <a:spcPts val="0"/>
-              </a:spcBef>
-              <a:spcAft>
-                <a:spcPts val="0"/>
-              </a:spcAft>
-              <a:buNone/>
-            </a:pPr>
-            <a:r>
-              <a:rPr sz="1200">
-                <a:solidFill>
-                  <a:srgbClr val="434343"/>
-                </a:solidFill>
-                <a:latin typeface="ALS Sector Regular"/>
-                <a:ea typeface="ALS Sector Regular"/>
-                <a:cs typeface="ALS Sector Regular"/>
-              </a:rPr>
-              <a:t>Результат: растение</a:t>
-            </a:r>
-            <a:endParaRPr sz="1200">
-              <a:solidFill>
-                <a:srgbClr val="434343"/>
-              </a:solidFill>
-              <a:latin typeface="ALS Sector Regular"/>
-              <a:ea typeface="ALS Sector Regular"/>
-              <a:cs typeface="ALS Sector Regular"/>
-            </a:endParaRPr>
-          </a:p>
-          <a:p xmlns:a="http://schemas.openxmlformats.org/drawingml/2006/main">
-            <a:pPr marL="0" marR="0" lvl="0" indent="0" algn="l">
-              <a:lnSpc>
-                <a:spcPct val="115000"/>
-              </a:lnSpc>
-              <a:spcBef>
-                <a:spcPts val="0"/>
-              </a:spcBef>
-              <a:spcAft>
-                <a:spcPts val="0"/>
-              </a:spcAft>
-              <a:buNone/>
-            </a:pPr>
-            <a:r>
-              <a:rPr sz="1200">
-                <a:solidFill>
-                  <a:srgbClr val="434343"/>
-                </a:solidFill>
-                <a:latin typeface="ALS Sector Regular"/>
-                <a:ea typeface="ALS Sector Regular"/>
-                <a:cs typeface="ALS Sector Regular"/>
-              </a:rPr>
-              <a:t>отделено от влаги</a:t>
-            </a:r>
-            <a:endParaRPr sz="1200">
-              <a:solidFill>
-                <a:srgbClr val="434343"/>
-              </a:solidFill>
-              <a:latin typeface="ALS Sector Regular"/>
-              <a:ea typeface="ALS Sector Regular"/>
-              <a:cs typeface="ALS Sector Regular"/>
-            </a:endParaRPr>
-          </a:p>
-        </p:txBody>
-      </p:sp>
-      <p:sp>
-        <p:nvSpPr>
-          <p:cNvPr id="37" name="TextBox 36">
-            <a:extLst xmlns:a="http://schemas.openxmlformats.org/drawingml/2006/main">
-              <a:ext uri="{FF2B5EF4-FFF2-40B4-BE49-F238E27FC236}">
-                <a16:creationId xmlns:a16="http://schemas.microsoft.com/office/drawing/2014/main" id="{929CA29E-9A6F-2C39-7FC2-B1A625A06894}"/>
-              </a:ext>
-            </a:extLst>
-          </p:cNvPr>
-          <p:cNvSpPr>
-            <a:spLocks xmlns:a="http://schemas.openxmlformats.org/drawingml/2006/main" noGrp="1"/>
-          </p:cNvSpPr>
-          <p:nvPr/>
-        </p:nvSpPr>
-        <p:spPr>
-          <a:xfrm xmlns:a="http://schemas.openxmlformats.org/drawingml/2006/main" rot="0" flipH="0" flipV="0">
-            <a:off x="6109683" y="4958415"/>
-            <a:ext cx="2279200" cy="336804"/>
-          </a:xfrm>
-          <a:prstGeom xmlns:a="http://schemas.openxmlformats.org/drawingml/2006/main" prst="rect">
-            <a:avLst/>
-          </a:prstGeom>
-          <a:noFill xmlns:a="http://schemas.openxmlformats.org/drawingml/2006/main"/>
-        </p:spPr>
-        <p:txBody>
-          <a:bodyPr xmlns:a="http://schemas.openxmlformats.org/drawingml/2006/main" wrap="square">
-            <a:spAutoFit/>
-          </a:bodyPr>
-          <a:lstStyle xmlns:a="http://schemas.openxmlformats.org/drawingml/2006/main"/>
-          <a:p xmlns:a="http://schemas.openxmlformats.org/drawingml/2006/main">
-            <a:pPr marL="0" marR="0" lvl="0" indent="0" algn="l">
-              <a:lnSpc>
-                <a:spcPct val="115000"/>
-              </a:lnSpc>
-              <a:spcBef>
-                <a:spcPts val="0"/>
-              </a:spcBef>
-              <a:spcAft>
-                <a:spcPts val="0"/>
-              </a:spcAft>
-              <a:buNone/>
-            </a:pPr>
-            <a:r>
-              <a:rPr sz="1400">
-                <a:solidFill>
-                  <a:srgbClr val="176DEA"/>
-                </a:solidFill>
-                <a:latin typeface="ALS Sector Regular"/>
-                <a:ea typeface="ALS Sector Regular"/>
-                <a:cs typeface="ALS Sector Regular"/>
-              </a:rPr>
-              <a:t>Зачем это нужно</a:t>
-            </a:r>
-            <a:endParaRPr sz="1400">
-              <a:solidFill>
-                <a:srgbClr val="176DEA"/>
-              </a:solidFill>
-              <a:latin typeface="ALS Sector Regular"/>
-              <a:ea typeface="ALS Sector Regular"/>
-              <a:cs typeface="ALS Sector Regular"/>
-            </a:endParaRPr>
-          </a:p>
-        </p:txBody>
-      </p:sp>
-      <p:sp>
-        <p:nvSpPr>
-          <p:cNvPr id="47" name="Овал 46">
-            <a:extLst xmlns:a="http://schemas.openxmlformats.org/drawingml/2006/main">
-              <a:ext uri="{FF2B5EF4-FFF2-40B4-BE49-F238E27FC236}">
-                <a16:creationId xmlns:a16="http://schemas.microsoft.com/office/drawing/2014/main" id="{5988A6F7-FFE3-B091-C782-468D584BA7E8}"/>
-              </a:ext>
-            </a:extLst>
-          </p:cNvPr>
-          <p:cNvSpPr>
-            <a:spLocks xmlns:a="http://schemas.openxmlformats.org/drawingml/2006/main" noGrp="1"/>
-          </p:cNvSpPr>
-          <p:nvPr/>
-        </p:nvSpPr>
-        <p:spPr>
-          <a:xfrm xmlns:a="http://schemas.openxmlformats.org/drawingml/2006/main" rot="0" flipH="0" flipV="0">
-            <a:off x="8310636" y="4667535"/>
-            <a:ext cx="721269" cy="721269"/>
-          </a:xfrm>
-          <a:prstGeom xmlns:a="http://schemas.openxmlformats.org/drawingml/2006/main" prst="ellipse">
-            <a:avLst/>
-          </a:prstGeom>
-          <a:solidFill xmlns:a="http://schemas.openxmlformats.org/drawingml/2006/main">
-            <a:srgbClr val="D4E5FE"/>
-          </a:solidFill>
-          <a:ln xmlns:a="http://schemas.openxmlformats.org/drawingml/2006/main" w="22225">
-            <a:solidFill>
-              <a:schemeClr val="bg1"/>
-            </a:solidFill>
-          </a:ln>
-        </p:spPr>
-        <p:style>
-          <a:lnRef xmlns:a="http://schemas.openxmlformats.org/drawingml/2006/main" idx="2">
-            <a:schemeClr val="accent1">
-              <a:shade val="50000"/>
-            </a:schemeClr>
-          </a:lnRef>
-          <a:fillRef xmlns:a="http://schemas.openxmlformats.org/drawingml/2006/main" idx="1">
-            <a:schemeClr val="accent1"/>
-          </a:fillRef>
-          <a:effectRef xmlns:a="http://schemas.openxmlformats.org/drawingml/2006/main" idx="0">
-            <a:schemeClr val="accent1"/>
-          </a:effectRef>
-          <a:fontRef xmlns:a="http://schemas.openxmlformats.org/drawingml/2006/main" idx="minor">
-            <a:schemeClr val="lt1"/>
-          </a:fontRef>
-        </p:style>
-        <p:txBody>
-          <a:bodyPr xmlns:a="http://schemas.openxmlformats.org/drawingml/2006/main" anchor="ctr"/>
-          <a:lstStyle xmlns:a="http://schemas.openxmlformats.org/drawingml/2006/main"/>
-          <a:p xmlns:a="http://schemas.openxmlformats.org/drawingml/2006/main">
-            <a:pPr algn="ctr">
-              <a:buNone/>
-            </a:pPr>
-            <a:endParaRPr/>
-          </a:p>
-        </p:txBody>
-      </p:sp>
-      <p:sp>
-        <p:nvSpPr>
-          <p:cNvPr id="48" name="TextBox 47">
-            <a:extLst xmlns:a="http://schemas.openxmlformats.org/drawingml/2006/main">
-              <a:ext uri="{FF2B5EF4-FFF2-40B4-BE49-F238E27FC236}">
-                <a16:creationId xmlns:a16="http://schemas.microsoft.com/office/drawing/2014/main" id="{052BF64D-8786-505D-2290-81F8E1443E60}"/>
-              </a:ext>
-            </a:extLst>
-          </p:cNvPr>
-          <p:cNvSpPr>
-            <a:spLocks xmlns:a="http://schemas.openxmlformats.org/drawingml/2006/main" noGrp="1"/>
-          </p:cNvSpPr>
-          <p:nvPr/>
-        </p:nvSpPr>
-        <p:spPr>
-          <a:xfrm xmlns:a="http://schemas.openxmlformats.org/drawingml/2006/main" rot="0" flipH="0" flipV="0">
-            <a:off x="8223468" y="4922086"/>
-            <a:ext cx="895608" cy="214122"/>
-          </a:xfrm>
-          <a:prstGeom xmlns:a="http://schemas.openxmlformats.org/drawingml/2006/main" prst="rect">
-            <a:avLst/>
-          </a:prstGeom>
-          <a:noFill xmlns:a="http://schemas.openxmlformats.org/drawingml/2006/main"/>
-        </p:spPr>
-        <p:txBody>
-          <a:bodyPr xmlns:a="http://schemas.openxmlformats.org/drawingml/2006/main" wrap="square">
-            <a:spAutoFit/>
-          </a:bodyPr>
-          <a:lstStyle xmlns:a="http://schemas.openxmlformats.org/drawingml/2006/main"/>
-          <a:p xmlns:a="http://schemas.openxmlformats.org/drawingml/2006/main">
-            <a:pPr marL="0" marR="0" lvl="0" indent="0" algn="ctr">
-              <a:lnSpc>
-                <a:spcPct val="115000"/>
-              </a:lnSpc>
-              <a:spcBef>
-                <a:spcPts val="0"/>
-              </a:spcBef>
-              <a:spcAft>
-                <a:spcPts val="0"/>
-              </a:spcAft>
-              <a:buNone/>
-            </a:pPr>
-            <a:r>
-              <a:rPr sz="700">
-                <a:solidFill>
-                  <a:schemeClr val="tx2">
-                    <a:lumMod val="10000"/>
-                  </a:schemeClr>
-                </a:solidFill>
-                <a:latin typeface="ALS Sector Regular"/>
-                <a:ea typeface="ALS Sector Regular"/>
-                <a:cs typeface="ALS Sector Regular"/>
-              </a:rPr>
-              <a:t>12 сут.</a:t>
-            </a:r>
-            <a:endParaRPr sz="1000">
-              <a:solidFill>
-                <a:schemeClr val="tx2">
-                  <a:lumMod val="10000"/>
-                </a:schemeClr>
-              </a:solidFill>
-              <a:latin typeface="ALS Sector Regular"/>
-              <a:ea typeface="ALS Sector Regular"/>
-              <a:cs typeface="ALS Sector Regular"/>
-            </a:endParaRPr>
-          </a:p>
-        </p:txBody>
-      </p:sp>
-      <p:sp>
-        <p:nvSpPr>
-          <p:cNvPr id="27" name="Google Shape;82;p10">
-            <a:extLst xmlns:a="http://schemas.openxmlformats.org/drawingml/2006/main">
-              <a:ext uri="{FF2B5EF4-FFF2-40B4-BE49-F238E27FC236}">
-                <a16:creationId xmlns:a16="http://schemas.microsoft.com/office/drawing/2014/main" id="{492E67EB-030F-A540-A005-3F337B23D1F3}"/>
-              </a:ext>
-            </a:extLst>
-          </p:cNvPr>
-          <p:cNvSpPr>
-            <a:spLocks xmlns:a="http://schemas.openxmlformats.org/drawingml/2006/main" noGrp="1"/>
-          </p:cNvSpPr>
-          <p:nvPr/>
-        </p:nvSpPr>
-        <p:spPr>
-          <a:xfrm xmlns:a="http://schemas.openxmlformats.org/drawingml/2006/main" rot="0" flipH="0" flipV="0">
-            <a:off x="6048600" y="3523779"/>
-            <a:ext cx="3687433" cy="860104"/>
-          </a:xfrm>
-          <a:prstGeom xmlns:a="http://schemas.openxmlformats.org/drawingml/2006/main" prst="roundRect">
-            <a:avLst>
-              <a:gd name="adj" fmla="val 10217"/>
-            </a:avLst>
-          </a:prstGeom>
-          <a:solidFill xmlns:a="http://schemas.openxmlformats.org/drawingml/2006/main">
-            <a:schemeClr val="bg1"/>
-          </a:solidFill>
-          <a:ln xmlns:a="http://schemas.openxmlformats.org/drawingml/2006/main">
-            <a:noFill/>
-          </a:ln>
-          <a:effectLst xmlns:a="http://schemas.openxmlformats.org/drawingml/2006/main">
-            <a:outerShdw blurRad="114300" dist="47625" dir="1680000" algn="bl" rotWithShape="0">
-              <a:srgbClr val="000000">
-                <a:alpha val="8630"/>
-              </a:srgbClr>
-            </a:outerShdw>
-          </a:effectLst>
-        </p:spPr>
-        <p:txBody>
-          <a:bodyPr xmlns:a="http://schemas.openxmlformats.org/drawingml/2006/main" spcFirstLastPara="1" wrap="square" lIns="90000" tIns="72000" rIns="72000" bIns="0" anchor="t">
-            <a:noAutofit/>
-          </a:bodyPr>
-          <a:lstStyle xmlns:a="http://schemas.openxmlformats.org/drawingml/2006/main"/>
-          <a:p xmlns:a="http://schemas.openxmlformats.org/drawingml/2006/main">
-            <a:endParaRPr sz="1000">
-              <a:solidFill>
-                <a:srgbClr val="434343"/>
-              </a:solidFill>
-              <a:latin typeface="ALS Sector Regular"/>
-              <a:ea typeface="ALS Sector Regular"/>
-              <a:cs typeface="ALS Sector Regular"/>
-            </a:endParaRPr>
-          </a:p>
-        </p:txBody>
-      </p:sp>
-      <p:sp>
-        <p:nvSpPr>
-          <p:cNvPr id="28" name="TextBox 27">
-            <a:extLst xmlns:a="http://schemas.openxmlformats.org/drawingml/2006/main">
-              <a:ext uri="{FF2B5EF4-FFF2-40B4-BE49-F238E27FC236}">
-                <a16:creationId xmlns:a16="http://schemas.microsoft.com/office/drawing/2014/main" id="{15BBB136-4EB9-CD8B-C03C-F194FFEB861C}"/>
-              </a:ext>
-            </a:extLst>
-          </p:cNvPr>
-          <p:cNvSpPr>
-            <a:spLocks xmlns:a="http://schemas.openxmlformats.org/drawingml/2006/main" noGrp="1"/>
-          </p:cNvSpPr>
-          <p:nvPr/>
-        </p:nvSpPr>
-        <p:spPr>
-          <a:xfrm xmlns:a="http://schemas.openxmlformats.org/drawingml/2006/main" rot="0" flipH="0" flipV="0">
-            <a:off x="6134480" y="3860235"/>
-            <a:ext cx="3204516" cy="512064"/>
-          </a:xfrm>
-          <a:prstGeom xmlns:a="http://schemas.openxmlformats.org/drawingml/2006/main" prst="rect">
-            <a:avLst/>
-          </a:prstGeom>
-          <a:noFill xmlns:a="http://schemas.openxmlformats.org/drawingml/2006/main"/>
-        </p:spPr>
-        <p:txBody>
-          <a:bodyPr xmlns:a="http://schemas.openxmlformats.org/drawingml/2006/main" wrap="square">
-            <a:spAutoFit/>
-          </a:bodyPr>
-          <a:lstStyle xmlns:a="http://schemas.openxmlformats.org/drawingml/2006/main"/>
-          <a:p xmlns:a="http://schemas.openxmlformats.org/drawingml/2006/main">
-            <a:pPr marL="0" marR="0" lvl="0" indent="0" algn="l">
-              <a:lnSpc>
-                <a:spcPct val="115000"/>
-              </a:lnSpc>
-              <a:spcBef>
-                <a:spcPts val="0"/>
-              </a:spcBef>
-              <a:spcAft>
-                <a:spcPts val="0"/>
-              </a:spcAft>
-              <a:buNone/>
-            </a:pPr>
-            <a:r>
-              <a:rPr sz="1200">
-                <a:solidFill>
-                  <a:srgbClr val="434343"/>
-                </a:solidFill>
-                <a:latin typeface="ALS Sector Regular"/>
-                <a:ea typeface="ALS Sector Regular"/>
-                <a:cs typeface="ALS Sector Regular"/>
-              </a:rPr>
-              <a:t>Это настройка растительного блока,</a:t>
-            </a:r>
-            <a:endParaRPr sz="1200">
-              <a:solidFill>
-                <a:srgbClr val="434343"/>
-              </a:solidFill>
-              <a:latin typeface="ALS Sector Regular"/>
-              <a:ea typeface="ALS Sector Regular"/>
-              <a:cs typeface="ALS Sector Regular"/>
-            </a:endParaRPr>
-          </a:p>
-          <a:p xmlns:a="http://schemas.openxmlformats.org/drawingml/2006/main">
-            <a:pPr marL="0" marR="0" lvl="0" indent="0" algn="l">
-              <a:lnSpc>
-                <a:spcPct val="115000"/>
-              </a:lnSpc>
-              <a:spcBef>
-                <a:spcPts val="0"/>
-              </a:spcBef>
-              <a:spcAft>
-                <a:spcPts val="0"/>
-              </a:spcAft>
-              <a:buNone/>
-            </a:pPr>
-            <a:r>
-              <a:rPr sz="1200">
-                <a:solidFill>
-                  <a:srgbClr val="434343"/>
-                </a:solidFill>
-                <a:latin typeface="ALS Sector Regular"/>
-                <a:ea typeface="ALS Sector Regular"/>
-                <a:cs typeface="ALS Sector Regular"/>
-              </a:rPr>
-              <a:t>не проверка влажности по Sentinel-1</a:t>
-            </a:r>
-            <a:endParaRPr sz="1200">
-              <a:solidFill>
-                <a:srgbClr val="434343"/>
-              </a:solidFill>
-              <a:latin typeface="ALS Sector Regular"/>
-              <a:ea typeface="ALS Sector Regular"/>
-              <a:cs typeface="ALS Sector Regular"/>
-            </a:endParaRPr>
-          </a:p>
-        </p:txBody>
-      </p:sp>
-      <p:sp>
-        <p:nvSpPr>
-          <p:cNvPr id="29" name="TextBox 28">
-            <a:extLst xmlns:a="http://schemas.openxmlformats.org/drawingml/2006/main">
-              <a:ext uri="{FF2B5EF4-FFF2-40B4-BE49-F238E27FC236}">
-                <a16:creationId xmlns:a16="http://schemas.microsoft.com/office/drawing/2014/main" id="{64F58E4D-3132-29A2-CF0B-E33FB8920C00}"/>
-              </a:ext>
-            </a:extLst>
-          </p:cNvPr>
-          <p:cNvSpPr>
-            <a:spLocks xmlns:a="http://schemas.openxmlformats.org/drawingml/2006/main" noGrp="1"/>
-          </p:cNvSpPr>
-          <p:nvPr/>
-        </p:nvSpPr>
-        <p:spPr>
-          <a:xfrm xmlns:a="http://schemas.openxmlformats.org/drawingml/2006/main" rot="0" flipH="0" flipV="0">
-            <a:off x="6134482" y="3625559"/>
-            <a:ext cx="3204518" cy="336804"/>
-          </a:xfrm>
-          <a:prstGeom xmlns:a="http://schemas.openxmlformats.org/drawingml/2006/main" prst="rect">
-            <a:avLst/>
-          </a:prstGeom>
-          <a:noFill xmlns:a="http://schemas.openxmlformats.org/drawingml/2006/main"/>
-        </p:spPr>
-        <p:txBody>
-          <a:bodyPr xmlns:a="http://schemas.openxmlformats.org/drawingml/2006/main" wrap="square">
-            <a:spAutoFit/>
-          </a:bodyPr>
-          <a:lstStyle xmlns:a="http://schemas.openxmlformats.org/drawingml/2006/main"/>
-          <a:p xmlns:a="http://schemas.openxmlformats.org/drawingml/2006/main">
-            <a:pPr marL="0" marR="0" lvl="0" indent="0" algn="l">
-              <a:lnSpc>
-                <a:spcPct val="115000"/>
-              </a:lnSpc>
-              <a:spcBef>
-                <a:spcPts val="0"/>
-              </a:spcBef>
-              <a:spcAft>
-                <a:spcPts val="0"/>
-              </a:spcAft>
-              <a:buNone/>
-            </a:pPr>
-            <a:r>
-              <a:rPr sz="1400">
-                <a:solidFill>
-                  <a:srgbClr val="176DEA"/>
-                </a:solidFill>
-                <a:latin typeface="ALS Sector Regular"/>
-                <a:ea typeface="ALS Sector Regular"/>
-                <a:cs typeface="ALS Sector Regular"/>
-              </a:rPr>
-              <a:t>Граница интерпретации</a:t>
-            </a:r>
-            <a:endParaRPr sz="1400">
-              <a:solidFill>
-                <a:srgbClr val="176DEA"/>
-              </a:solidFill>
-              <a:latin typeface="ALS Sector Regular"/>
-              <a:ea typeface="ALS Sector Regular"/>
-              <a:cs typeface="ALS Sector Regular"/>
-            </a:endParaRPr>
-          </a:p>
-        </p:txBody>
-      </p:sp>
-      <p:sp>
-        <p:nvSpPr>
-          <p:cNvPr id="45" name="Овал 44">
-            <a:extLst xmlns:a="http://schemas.openxmlformats.org/drawingml/2006/main">
-              <a:ext uri="{FF2B5EF4-FFF2-40B4-BE49-F238E27FC236}">
-                <a16:creationId xmlns:a16="http://schemas.microsoft.com/office/drawing/2014/main" id="{1C14481A-470C-94BB-8FF0-0B9EB6D8A2DD}"/>
-              </a:ext>
-            </a:extLst>
-          </p:cNvPr>
-          <p:cNvSpPr>
-            <a:spLocks xmlns:a="http://schemas.openxmlformats.org/drawingml/2006/main" noGrp="1"/>
-          </p:cNvSpPr>
-          <p:nvPr/>
-        </p:nvSpPr>
-        <p:spPr>
-          <a:xfrm xmlns:a="http://schemas.openxmlformats.org/drawingml/2006/main" rot="0" flipH="0" flipV="0">
-            <a:off x="9338997" y="3376678"/>
-            <a:ext cx="721269" cy="721269"/>
-          </a:xfrm>
-          <a:prstGeom xmlns:a="http://schemas.openxmlformats.org/drawingml/2006/main" prst="ellipse">
-            <a:avLst/>
-          </a:prstGeom>
-          <a:solidFill xmlns:a="http://schemas.openxmlformats.org/drawingml/2006/main">
-            <a:srgbClr val="D4E5FE"/>
-          </a:solidFill>
-          <a:ln xmlns:a="http://schemas.openxmlformats.org/drawingml/2006/main" w="22225">
-            <a:solidFill>
-              <a:schemeClr val="bg1"/>
-            </a:solidFill>
-          </a:ln>
-        </p:spPr>
-        <p:style>
-          <a:lnRef xmlns:a="http://schemas.openxmlformats.org/drawingml/2006/main" idx="2">
-            <a:schemeClr val="accent1">
-              <a:shade val="50000"/>
-            </a:schemeClr>
-          </a:lnRef>
-          <a:fillRef xmlns:a="http://schemas.openxmlformats.org/drawingml/2006/main" idx="1">
-            <a:schemeClr val="accent1"/>
-          </a:fillRef>
-          <a:effectRef xmlns:a="http://schemas.openxmlformats.org/drawingml/2006/main" idx="0">
-            <a:schemeClr val="accent1"/>
-          </a:effectRef>
-          <a:fontRef xmlns:a="http://schemas.openxmlformats.org/drawingml/2006/main" idx="minor">
-            <a:schemeClr val="lt1"/>
-          </a:fontRef>
-        </p:style>
-        <p:txBody>
-          <a:bodyPr xmlns:a="http://schemas.openxmlformats.org/drawingml/2006/main" anchor="ctr"/>
-          <a:lstStyle xmlns:a="http://schemas.openxmlformats.org/drawingml/2006/main"/>
-          <a:p xmlns:a="http://schemas.openxmlformats.org/drawingml/2006/main">
-            <a:pPr algn="ctr">
-              <a:buNone/>
-            </a:pPr>
-            <a:endParaRPr/>
-          </a:p>
-        </p:txBody>
-      </p:sp>
-      <p:sp>
-        <p:nvSpPr>
-          <p:cNvPr id="59" name="TextBox 58">
-            <a:extLst xmlns:a="http://schemas.openxmlformats.org/drawingml/2006/main">
-              <a:ext uri="{FF2B5EF4-FFF2-40B4-BE49-F238E27FC236}">
-                <a16:creationId xmlns:a16="http://schemas.microsoft.com/office/drawing/2014/main" id="{6FE0B59A-923D-2FE6-B110-CA1657362D6F}"/>
-              </a:ext>
-            </a:extLst>
-          </p:cNvPr>
-          <p:cNvSpPr>
-            <a:spLocks xmlns:a="http://schemas.openxmlformats.org/drawingml/2006/main" noGrp="1"/>
-          </p:cNvSpPr>
-          <p:nvPr/>
-        </p:nvSpPr>
-        <p:spPr>
-          <a:xfrm xmlns:a="http://schemas.openxmlformats.org/drawingml/2006/main" rot="0" flipH="0" flipV="0">
-            <a:off x="9251827" y="3623220"/>
-            <a:ext cx="895608" cy="214122"/>
-          </a:xfrm>
-          <a:prstGeom xmlns:a="http://schemas.openxmlformats.org/drawingml/2006/main" prst="rect">
-            <a:avLst/>
-          </a:prstGeom>
-          <a:noFill xmlns:a="http://schemas.openxmlformats.org/drawingml/2006/main"/>
-        </p:spPr>
-        <p:txBody>
-          <a:bodyPr xmlns:a="http://schemas.openxmlformats.org/drawingml/2006/main" wrap="square">
-            <a:spAutoFit/>
-          </a:bodyPr>
-          <a:lstStyle xmlns:a="http://schemas.openxmlformats.org/drawingml/2006/main"/>
-          <a:p xmlns:a="http://schemas.openxmlformats.org/drawingml/2006/main">
-            <a:pPr marL="0" marR="0" lvl="0" indent="0" algn="ctr">
-              <a:lnSpc>
-                <a:spcPct val="115000"/>
-              </a:lnSpc>
-              <a:spcBef>
-                <a:spcPts val="0"/>
-              </a:spcBef>
-              <a:spcAft>
-                <a:spcPts val="0"/>
-              </a:spcAft>
-              <a:buNone/>
-            </a:pPr>
-            <a:r>
-              <a:rPr sz="700">
-                <a:solidFill>
-                  <a:schemeClr val="tx2">
-                    <a:lumMod val="10000"/>
-                  </a:schemeClr>
-                </a:solidFill>
-                <a:latin typeface="ALS Sector Regular"/>
-                <a:ea typeface="ALS Sector Regular"/>
-                <a:cs typeface="ALS Sector Regular"/>
-              </a:rPr>
-              <a:t>FCOVER</a:t>
-            </a:r>
-            <a:endParaRPr sz="1000">
-              <a:solidFill>
-                <a:schemeClr val="tx2">
-                  <a:lumMod val="10000"/>
-                </a:schemeClr>
-              </a:solidFill>
-              <a:latin typeface="ALS Sector Regular"/>
-              <a:ea typeface="ALS Sector Regular"/>
-              <a:cs typeface="ALS Sector Regular"/>
-            </a:endParaRPr>
-          </a:p>
-        </p:txBody>
-      </p:sp>
+        </p:spPr>
+      </p:pic>
     </p:spTree>
     <p:extLst>
       <p:ext uri="{BB962C8B-B14F-4D97-AF65-F5344CB8AC3E}">
@@ -10153,7 +7434,7 @@
       </p:sp>
       <p:cxnSp>
         <p:nvCxnSpPr>
-          <p:cNvPr id="73" name="Google Shape;422;g14739c8fea3_0_168"/>
+          <p:cNvPr id="113" name="Google Shape;422;g14739c8fea3_0_168"/>
           <p:cNvCxnSpPr/>
           <p:nvPr/>
         </p:nvCxnSpPr>
@@ -10292,7 +7573,7 @@
       </p:sp>
       <p:graphicFrame>
         <p:nvGraphicFramePr>
-          <p:cNvPr id="76" name="Chart 3"/>
+          <p:cNvPr id="116" name="Chart 3"/>
           <p:cNvGraphicFramePr/>
           <p:nvPr/>
         </p:nvGraphicFramePr>
@@ -10302,7 +7583,7 @@
         </p:xfrm>
         <a:graphic xmlns:a="http://schemas.openxmlformats.org/drawingml/2006/main">
           <a:graphicData uri="http://schemas.openxmlformats.org/drawingml/2006/chart">
-            <c:chart xmlns:r="http://schemas.openxmlformats.org/officeDocument/2006/relationships" xmlns:c="http://schemas.openxmlformats.org/drawingml/2006/chart" r:id="R5450b6b4a7f34dc6"/>
+            <c:chart xmlns:r="http://schemas.openxmlformats.org/officeDocument/2006/relationships" xmlns:c="http://schemas.openxmlformats.org/drawingml/2006/chart" r:id="R767033a07fcc4cda"/>
           </a:graphicData>
         </a:graphic>
       </p:graphicFrame>
